--- a/中間発表 power point/25007 大平凜音.pptx
+++ b/中間発表 power point/25007 大平凜音.pptx
@@ -9,9 +9,11 @@
     <p:sldId id="257" r:id="rId3"/>
     <p:sldId id="258" r:id="rId4"/>
     <p:sldId id="264" r:id="rId5"/>
-    <p:sldId id="261" r:id="rId6"/>
-    <p:sldId id="262" r:id="rId7"/>
-    <p:sldId id="265" r:id="rId8"/>
+    <p:sldId id="266" r:id="rId6"/>
+    <p:sldId id="261" r:id="rId7"/>
+    <p:sldId id="262" r:id="rId8"/>
+    <p:sldId id="265" r:id="rId9"/>
+    <p:sldId id="267" r:id="rId10"/>
   </p:sldIdLst>
   <p:sldSz cx="12192000" cy="6858000"/>
   <p:notesSz cx="6858000" cy="9144000"/>
@@ -110,6 +112,11 @@
       </a:defRPr>
     </a:lvl9pPr>
   </p:defaultTextStyle>
+  <p:extLst>
+    <p:ext uri="{EFAFB233-063F-42B5-8137-9DF3F51BA10A}">
+      <p15:sldGuideLst xmlns:p15="http://schemas.microsoft.com/office/powerpoint/2012/main"/>
+    </p:ext>
+  </p:extLst>
 </p:presentation>
 </file>
 
@@ -5198,43 +5205,6 @@
         </a:p>
       </dgm:t>
     </dgm:pt>
-    <dgm:pt modelId="{7D35E113-47B4-4232-B871-D957DCA34083}">
-      <dgm:prSet/>
-      <dgm:spPr/>
-      <dgm:t>
-        <a:bodyPr/>
-        <a:lstStyle/>
-        <a:p>
-          <a:r>
-            <a:rPr lang="ja-JP" dirty="0"/>
-            <a:t>油山 </a:t>
-          </a:r>
-          <a:endParaRPr lang="en-US" dirty="0"/>
-        </a:p>
-      </dgm:t>
-    </dgm:pt>
-    <dgm:pt modelId="{6A372481-EC2E-4078-BEBB-7667205428A8}" type="parTrans" cxnId="{17AF21CC-D8FD-46B9-B6F4-D9F2681D274A}">
-      <dgm:prSet/>
-      <dgm:spPr/>
-      <dgm:t>
-        <a:bodyPr/>
-        <a:lstStyle/>
-        <a:p>
-          <a:endParaRPr lang="en-US"/>
-        </a:p>
-      </dgm:t>
-    </dgm:pt>
-    <dgm:pt modelId="{F13F07F3-8717-4192-9F51-0FD894EA7BF2}" type="sibTrans" cxnId="{17AF21CC-D8FD-46B9-B6F4-D9F2681D274A}">
-      <dgm:prSet/>
-      <dgm:spPr/>
-      <dgm:t>
-        <a:bodyPr/>
-        <a:lstStyle/>
-        <a:p>
-          <a:endParaRPr lang="en-US"/>
-        </a:p>
-      </dgm:t>
-    </dgm:pt>
     <dgm:pt modelId="{AEC4C6CB-CD88-4C5A-BCC3-C5A0BE1C1C41}">
       <dgm:prSet/>
       <dgm:spPr/>
@@ -5272,46 +5242,6 @@
         </a:p>
       </dgm:t>
     </dgm:pt>
-    <dgm:pt modelId="{0AFBBC78-51B9-46B1-BACC-07DA3E19E596}">
-      <dgm:prSet/>
-      <dgm:spPr/>
-      <dgm:t>
-        <a:bodyPr/>
-        <a:lstStyle/>
-        <a:p>
-          <a:pPr>
-            <a:buNone/>
-          </a:pPr>
-          <a:r>
-            <a:rPr lang="ja-JP" dirty="0"/>
-            <a:t>福岡タワー </a:t>
-          </a:r>
-          <a:endParaRPr lang="en-US" altLang="ja-JP" dirty="0"/>
-        </a:p>
-      </dgm:t>
-    </dgm:pt>
-    <dgm:pt modelId="{DD81A28B-983F-4F8D-AEA2-119C5E0330F1}" type="parTrans" cxnId="{1174F396-4E66-4CF6-BBD5-E5F6B6BF1224}">
-      <dgm:prSet/>
-      <dgm:spPr/>
-      <dgm:t>
-        <a:bodyPr/>
-        <a:lstStyle/>
-        <a:p>
-          <a:endParaRPr kumimoji="1" lang="ja-JP" altLang="en-US"/>
-        </a:p>
-      </dgm:t>
-    </dgm:pt>
-    <dgm:pt modelId="{39410DC5-FF58-41DA-B23B-3958571B207B}" type="sibTrans" cxnId="{1174F396-4E66-4CF6-BBD5-E5F6B6BF1224}">
-      <dgm:prSet/>
-      <dgm:spPr/>
-      <dgm:t>
-        <a:bodyPr/>
-        <a:lstStyle/>
-        <a:p>
-          <a:endParaRPr kumimoji="1" lang="ja-JP" altLang="en-US"/>
-        </a:p>
-      </dgm:t>
-    </dgm:pt>
     <dgm:pt modelId="{2EC38DB5-44ED-411C-9BBD-93D4E19C83E5}">
       <dgm:prSet/>
       <dgm:spPr/>
@@ -5339,6 +5269,87 @@
       </dgm:t>
     </dgm:pt>
     <dgm:pt modelId="{24413E46-EA5C-405F-975B-82A615255774}" type="sibTrans" cxnId="{2F6469F0-4A0E-42A3-95F2-39ACDA56DEBE}">
+      <dgm:prSet/>
+      <dgm:spPr/>
+      <dgm:t>
+        <a:bodyPr/>
+        <a:lstStyle/>
+        <a:p>
+          <a:endParaRPr kumimoji="1" lang="ja-JP" altLang="en-US"/>
+        </a:p>
+      </dgm:t>
+    </dgm:pt>
+    <dgm:pt modelId="{7D35E113-47B4-4232-B871-D957DCA34083}">
+      <dgm:prSet/>
+      <dgm:spPr/>
+      <dgm:t>
+        <a:bodyPr/>
+        <a:lstStyle/>
+        <a:p>
+          <a:r>
+            <a:rPr lang="ja-JP" dirty="0"/>
+            <a:t>油山 </a:t>
+          </a:r>
+          <a:endParaRPr lang="en-US" dirty="0"/>
+        </a:p>
+      </dgm:t>
+    </dgm:pt>
+    <dgm:pt modelId="{F13F07F3-8717-4192-9F51-0FD894EA7BF2}" type="sibTrans" cxnId="{17AF21CC-D8FD-46B9-B6F4-D9F2681D274A}">
+      <dgm:prSet/>
+      <dgm:spPr/>
+      <dgm:t>
+        <a:bodyPr/>
+        <a:lstStyle/>
+        <a:p>
+          <a:endParaRPr lang="en-US"/>
+        </a:p>
+      </dgm:t>
+    </dgm:pt>
+    <dgm:pt modelId="{6A372481-EC2E-4078-BEBB-7667205428A8}" type="parTrans" cxnId="{17AF21CC-D8FD-46B9-B6F4-D9F2681D274A}">
+      <dgm:prSet/>
+      <dgm:spPr/>
+      <dgm:t>
+        <a:bodyPr/>
+        <a:lstStyle/>
+        <a:p>
+          <a:endParaRPr lang="en-US"/>
+        </a:p>
+      </dgm:t>
+    </dgm:pt>
+    <dgm:pt modelId="{0AFBBC78-51B9-46B1-BACC-07DA3E19E596}">
+      <dgm:prSet/>
+      <dgm:spPr/>
+      <dgm:t>
+        <a:bodyPr/>
+        <a:lstStyle/>
+        <a:p>
+          <a:pPr>
+            <a:buNone/>
+          </a:pPr>
+          <a:r>
+            <a:rPr lang="ja-JP" altLang="en-US" dirty="0"/>
+            <a:t>夜景人気ランキング</a:t>
+          </a:r>
+          <a:r>
+            <a:rPr lang="ja-JP" dirty="0"/>
+            <a:t> </a:t>
+          </a:r>
+          <a:endParaRPr lang="en-US" altLang="ja-JP" dirty="0"/>
+        </a:p>
+      </dgm:t>
+    </dgm:pt>
+    <dgm:pt modelId="{39410DC5-FF58-41DA-B23B-3958571B207B}" type="sibTrans" cxnId="{1174F396-4E66-4CF6-BBD5-E5F6B6BF1224}">
+      <dgm:prSet/>
+      <dgm:spPr/>
+      <dgm:t>
+        <a:bodyPr/>
+        <a:lstStyle/>
+        <a:p>
+          <a:endParaRPr kumimoji="1" lang="ja-JP" altLang="en-US"/>
+        </a:p>
+      </dgm:t>
+    </dgm:pt>
+    <dgm:pt modelId="{DD81A28B-983F-4F8D-AEA2-119C5E0330F1}" type="parTrans" cxnId="{1174F396-4E66-4CF6-BBD5-E5F6B6BF1224}">
       <dgm:prSet/>
       <dgm:spPr/>
       <dgm:t>
@@ -6675,8 +6686,12 @@
             <a:buNone/>
           </a:pPr>
           <a:r>
+            <a:rPr lang="ja-JP" altLang="en-US" sz="4000" kern="1200" dirty="0"/>
+            <a:t>夜景人気ランキング</a:t>
+          </a:r>
+          <a:r>
             <a:rPr lang="ja-JP" sz="4000" kern="1200" dirty="0"/>
-            <a:t>福岡タワー </a:t>
+            <a:t> </a:t>
           </a:r>
           <a:endParaRPr lang="en-US" altLang="ja-JP" sz="4000" kern="1200" dirty="0"/>
         </a:p>
@@ -15321,7 +15336,7 @@
           <a:p>
             <a:fld id="{96184D05-BF12-4806-9DA3-587B7D57B7E5}" type="datetimeFigureOut">
               <a:rPr kumimoji="1" lang="ja-JP" altLang="en-US" smtClean="0"/>
-              <a:t>2026/6/29</a:t>
+              <a:t>2026/6/30</a:t>
             </a:fld>
             <a:endParaRPr kumimoji="1" lang="ja-JP" altLang="en-US"/>
           </a:p>
@@ -15523,7 +15538,7 @@
           <a:p>
             <a:fld id="{96184D05-BF12-4806-9DA3-587B7D57B7E5}" type="datetimeFigureOut">
               <a:rPr kumimoji="1" lang="ja-JP" altLang="en-US" smtClean="0"/>
-              <a:t>2026/6/29</a:t>
+              <a:t>2026/6/30</a:t>
             </a:fld>
             <a:endParaRPr kumimoji="1" lang="ja-JP" altLang="en-US"/>
           </a:p>
@@ -15735,7 +15750,7 @@
           <a:p>
             <a:fld id="{96184D05-BF12-4806-9DA3-587B7D57B7E5}" type="datetimeFigureOut">
               <a:rPr kumimoji="1" lang="ja-JP" altLang="en-US" smtClean="0"/>
-              <a:t>2026/6/29</a:t>
+              <a:t>2026/6/30</a:t>
             </a:fld>
             <a:endParaRPr kumimoji="1" lang="ja-JP" altLang="en-US"/>
           </a:p>
@@ -15937,7 +15952,7 @@
           <a:p>
             <a:fld id="{96184D05-BF12-4806-9DA3-587B7D57B7E5}" type="datetimeFigureOut">
               <a:rPr kumimoji="1" lang="ja-JP" altLang="en-US" smtClean="0"/>
-              <a:t>2026/6/29</a:t>
+              <a:t>2026/6/30</a:t>
             </a:fld>
             <a:endParaRPr kumimoji="1" lang="ja-JP" altLang="en-US"/>
           </a:p>
@@ -16183,7 +16198,7 @@
           <a:p>
             <a:fld id="{96184D05-BF12-4806-9DA3-587B7D57B7E5}" type="datetimeFigureOut">
               <a:rPr kumimoji="1" lang="ja-JP" altLang="en-US" smtClean="0"/>
-              <a:t>2026/6/29</a:t>
+              <a:t>2026/6/30</a:t>
             </a:fld>
             <a:endParaRPr kumimoji="1" lang="ja-JP" altLang="en-US"/>
           </a:p>
@@ -16479,7 +16494,7 @@
           <a:p>
             <a:fld id="{96184D05-BF12-4806-9DA3-587B7D57B7E5}" type="datetimeFigureOut">
               <a:rPr kumimoji="1" lang="ja-JP" altLang="en-US" smtClean="0"/>
-              <a:t>2026/6/29</a:t>
+              <a:t>2026/6/30</a:t>
             </a:fld>
             <a:endParaRPr kumimoji="1" lang="ja-JP" altLang="en-US"/>
           </a:p>
@@ -16910,7 +16925,7 @@
           <a:p>
             <a:fld id="{96184D05-BF12-4806-9DA3-587B7D57B7E5}" type="datetimeFigureOut">
               <a:rPr kumimoji="1" lang="ja-JP" altLang="en-US" smtClean="0"/>
-              <a:t>2026/6/29</a:t>
+              <a:t>2026/6/30</a:t>
             </a:fld>
             <a:endParaRPr kumimoji="1" lang="ja-JP" altLang="en-US"/>
           </a:p>
@@ -17028,7 +17043,7 @@
           <a:p>
             <a:fld id="{96184D05-BF12-4806-9DA3-587B7D57B7E5}" type="datetimeFigureOut">
               <a:rPr kumimoji="1" lang="ja-JP" altLang="en-US" smtClean="0"/>
-              <a:t>2026/6/29</a:t>
+              <a:t>2026/6/30</a:t>
             </a:fld>
             <a:endParaRPr kumimoji="1" lang="ja-JP" altLang="en-US"/>
           </a:p>
@@ -17123,7 +17138,7 @@
           <a:p>
             <a:fld id="{96184D05-BF12-4806-9DA3-587B7D57B7E5}" type="datetimeFigureOut">
               <a:rPr kumimoji="1" lang="ja-JP" altLang="en-US" smtClean="0"/>
-              <a:t>2026/6/29</a:t>
+              <a:t>2026/6/30</a:t>
             </a:fld>
             <a:endParaRPr kumimoji="1" lang="ja-JP" altLang="en-US"/>
           </a:p>
@@ -17432,7 +17447,7 @@
           <a:p>
             <a:fld id="{96184D05-BF12-4806-9DA3-587B7D57B7E5}" type="datetimeFigureOut">
               <a:rPr kumimoji="1" lang="ja-JP" altLang="en-US" smtClean="0"/>
-              <a:t>2026/6/29</a:t>
+              <a:t>2026/6/30</a:t>
             </a:fld>
             <a:endParaRPr kumimoji="1" lang="ja-JP" altLang="en-US"/>
           </a:p>
@@ -17689,7 +17704,7 @@
           <a:p>
             <a:fld id="{96184D05-BF12-4806-9DA3-587B7D57B7E5}" type="datetimeFigureOut">
               <a:rPr kumimoji="1" lang="ja-JP" altLang="en-US" smtClean="0"/>
-              <a:t>2026/6/29</a:t>
+              <a:t>2026/6/30</a:t>
             </a:fld>
             <a:endParaRPr kumimoji="1" lang="ja-JP" altLang="en-US"/>
           </a:p>
@@ -17934,7 +17949,7 @@
           <a:p>
             <a:fld id="{96184D05-BF12-4806-9DA3-587B7D57B7E5}" type="datetimeFigureOut">
               <a:rPr kumimoji="1" lang="ja-JP" altLang="en-US" smtClean="0"/>
-              <a:t>2026/6/29</a:t>
+              <a:t>2026/6/30</a:t>
             </a:fld>
             <a:endParaRPr kumimoji="1" lang="ja-JP" altLang="en-US"/>
           </a:p>
@@ -27349,7 +27364,7 @@
             <p:ph idx="1"/>
             <p:extLst>
               <p:ext uri="{D42A27DB-BD31-4B8C-83A1-F6EECF244321}">
-                <p14:modId xmlns:p14="http://schemas.microsoft.com/office/powerpoint/2010/main" val="4048596121"/>
+                <p14:modId xmlns:p14="http://schemas.microsoft.com/office/powerpoint/2010/main" val="431361224"/>
               </p:ext>
             </p:extLst>
           </p:nvPr>
@@ -27378,6 +27393,669 @@
 </file>
 
 <file path=ppt/slides/slide5.xml><?xml version="1.0" encoding="utf-8"?>
+<p:sld xmlns:a="http://schemas.openxmlformats.org/drawingml/2006/main" xmlns:r="http://schemas.openxmlformats.org/officeDocument/2006/relationships" xmlns:p="http://schemas.openxmlformats.org/presentationml/2006/main">
+  <p:cSld>
+    <p:bg>
+      <p:bgPr>
+        <a:solidFill>
+          <a:schemeClr val="bg1"/>
+        </a:solidFill>
+        <a:effectLst/>
+      </p:bgPr>
+    </p:bg>
+    <p:spTree>
+      <p:nvGrpSpPr>
+        <p:cNvPr id="1" name=""/>
+        <p:cNvGrpSpPr/>
+        <p:nvPr/>
+      </p:nvGrpSpPr>
+      <p:grpSpPr>
+        <a:xfrm>
+          <a:off x="0" y="0"/>
+          <a:ext cx="0" cy="0"/>
+          <a:chOff x="0" y="0"/>
+          <a:chExt cx="0" cy="0"/>
+        </a:xfrm>
+      </p:grpSpPr>
+      <p:sp useBgFill="1">
+        <p:nvSpPr>
+          <p:cNvPr id="13" name="Rectangle 12">
+            <a:extLst>
+              <a:ext uri="{FF2B5EF4-FFF2-40B4-BE49-F238E27FC236}">
+                <a16:creationId xmlns:a16="http://schemas.microsoft.com/office/drawing/2014/main" id="{2B97F24A-32CE-4C1C-A50D-3016B394DCFB}"/>
+              </a:ext>
+              <a:ext uri="{C183D7F6-B498-43B3-948B-1728B52AA6E4}">
+                <adec:decorative xmlns:adec="http://schemas.microsoft.com/office/drawing/2017/decorative" val="1"/>
+              </a:ext>
+            </a:extLst>
+          </p:cNvPr>
+          <p:cNvSpPr>
+            <a:spLocks noGrp="1" noRot="1" noChangeAspect="1" noMove="1" noResize="1" noEditPoints="1" noAdjustHandles="1" noChangeArrowheads="1" noChangeShapeType="1" noTextEdit="1"/>
+          </p:cNvSpPr>
+          <p:nvPr>
+            <p:extLst>
+              <p:ext uri="{386F3935-93C4-4BCD-93E2-E3B085C9AB24}">
+                <p16:designElem xmlns:p16="http://schemas.microsoft.com/office/powerpoint/2015/main" val="1"/>
+              </p:ext>
+            </p:extLst>
+          </p:nvPr>
+        </p:nvSpPr>
+        <p:spPr>
+          <a:xfrm>
+            <a:off x="0" y="0"/>
+            <a:ext cx="12192000" cy="6858000"/>
+          </a:xfrm>
+          <a:prstGeom prst="rect">
+            <a:avLst/>
+          </a:prstGeom>
+          <a:ln>
+            <a:noFill/>
+          </a:ln>
+        </p:spPr>
+        <p:style>
+          <a:lnRef idx="2">
+            <a:schemeClr val="accent1">
+              <a:shade val="50000"/>
+            </a:schemeClr>
+          </a:lnRef>
+          <a:fillRef idx="1">
+            <a:schemeClr val="accent1"/>
+          </a:fillRef>
+          <a:effectRef idx="0">
+            <a:schemeClr val="accent1"/>
+          </a:effectRef>
+          <a:fontRef idx="minor">
+            <a:schemeClr val="lt1"/>
+          </a:fontRef>
+        </p:style>
+        <p:txBody>
+          <a:bodyPr rtlCol="0" anchor="ctr"/>
+          <a:lstStyle/>
+          <a:p>
+            <a:pPr algn="ctr"/>
+            <a:endParaRPr lang="en-US"/>
+          </a:p>
+        </p:txBody>
+      </p:sp>
+      <p:sp>
+        <p:nvSpPr>
+          <p:cNvPr id="15" name="sketch line">
+            <a:extLst>
+              <a:ext uri="{FF2B5EF4-FFF2-40B4-BE49-F238E27FC236}">
+                <a16:creationId xmlns:a16="http://schemas.microsoft.com/office/drawing/2014/main" id="{CD8B4F24-440B-49E9-B85D-733523DC064B}"/>
+              </a:ext>
+              <a:ext uri="{C183D7F6-B498-43B3-948B-1728B52AA6E4}">
+                <adec:decorative xmlns:adec="http://schemas.microsoft.com/office/drawing/2017/decorative" val="1"/>
+              </a:ext>
+            </a:extLst>
+          </p:cNvPr>
+          <p:cNvSpPr>
+            <a:spLocks noGrp="1" noRot="1" noChangeAspect="1" noMove="1" noResize="1" noEditPoints="1" noAdjustHandles="1" noChangeArrowheads="1" noChangeShapeType="1" noTextEdit="1"/>
+          </p:cNvSpPr>
+          <p:nvPr>
+            <p:extLst>
+              <p:ext uri="{386F3935-93C4-4BCD-93E2-E3B085C9AB24}">
+                <p16:designElem xmlns:p16="http://schemas.microsoft.com/office/powerpoint/2015/main" val="1"/>
+              </p:ext>
+            </p:extLst>
+          </p:nvPr>
+        </p:nvSpPr>
+        <p:spPr>
+          <a:xfrm>
+            <a:off x="643278" y="2573756"/>
+            <a:ext cx="3255095" cy="18288"/>
+          </a:xfrm>
+          <a:custGeom>
+            <a:avLst/>
+            <a:gdLst>
+              <a:gd name="csX0" fmla="*/ 0 w 3255095"/>
+              <a:gd name="csY0" fmla="*/ 0 h 18288"/>
+              <a:gd name="csX1" fmla="*/ 618468 w 3255095"/>
+              <a:gd name="csY1" fmla="*/ 0 h 18288"/>
+              <a:gd name="csX2" fmla="*/ 1269487 w 3255095"/>
+              <a:gd name="csY2" fmla="*/ 0 h 18288"/>
+              <a:gd name="csX3" fmla="*/ 1953057 w 3255095"/>
+              <a:gd name="csY3" fmla="*/ 0 h 18288"/>
+              <a:gd name="csX4" fmla="*/ 2636627 w 3255095"/>
+              <a:gd name="csY4" fmla="*/ 0 h 18288"/>
+              <a:gd name="csX5" fmla="*/ 3255095 w 3255095"/>
+              <a:gd name="csY5" fmla="*/ 0 h 18288"/>
+              <a:gd name="csX6" fmla="*/ 3255095 w 3255095"/>
+              <a:gd name="csY6" fmla="*/ 18288 h 18288"/>
+              <a:gd name="csX7" fmla="*/ 2538974 w 3255095"/>
+              <a:gd name="csY7" fmla="*/ 18288 h 18288"/>
+              <a:gd name="csX8" fmla="*/ 1822853 w 3255095"/>
+              <a:gd name="csY8" fmla="*/ 18288 h 18288"/>
+              <a:gd name="csX9" fmla="*/ 1171834 w 3255095"/>
+              <a:gd name="csY9" fmla="*/ 18288 h 18288"/>
+              <a:gd name="csX10" fmla="*/ 0 w 3255095"/>
+              <a:gd name="csY10" fmla="*/ 18288 h 18288"/>
+              <a:gd name="csX11" fmla="*/ 0 w 3255095"/>
+              <a:gd name="csY11" fmla="*/ 0 h 18288"/>
+            </a:gdLst>
+            <a:ahLst/>
+            <a:cxnLst>
+              <a:cxn ang="0">
+                <a:pos x="csX0" y="csY0"/>
+              </a:cxn>
+              <a:cxn ang="0">
+                <a:pos x="csX1" y="csY1"/>
+              </a:cxn>
+              <a:cxn ang="0">
+                <a:pos x="csX2" y="csY2"/>
+              </a:cxn>
+              <a:cxn ang="0">
+                <a:pos x="csX3" y="csY3"/>
+              </a:cxn>
+              <a:cxn ang="0">
+                <a:pos x="csX4" y="csY4"/>
+              </a:cxn>
+              <a:cxn ang="0">
+                <a:pos x="csX5" y="csY5"/>
+              </a:cxn>
+              <a:cxn ang="0">
+                <a:pos x="csX6" y="csY6"/>
+              </a:cxn>
+              <a:cxn ang="0">
+                <a:pos x="csX7" y="csY7"/>
+              </a:cxn>
+              <a:cxn ang="0">
+                <a:pos x="csX8" y="csY8"/>
+              </a:cxn>
+              <a:cxn ang="0">
+                <a:pos x="csX9" y="csY9"/>
+              </a:cxn>
+              <a:cxn ang="0">
+                <a:pos x="csX10" y="csY10"/>
+              </a:cxn>
+              <a:cxn ang="0">
+                <a:pos x="csX11" y="csY11"/>
+              </a:cxn>
+            </a:cxnLst>
+            <a:rect l="l" t="t" r="r" b="b"/>
+            <a:pathLst>
+              <a:path w="3255095" h="18288" fill="none" extrusionOk="0">
+                <a:moveTo>
+                  <a:pt x="0" y="0"/>
+                </a:moveTo>
+                <a:cubicBezTo>
+                  <a:pt x="240201" y="-22123"/>
+                  <a:pt x="462021" y="-19623"/>
+                  <a:pt x="618468" y="0"/>
+                </a:cubicBezTo>
+                <a:cubicBezTo>
+                  <a:pt x="774915" y="19623"/>
+                  <a:pt x="974734" y="2035"/>
+                  <a:pt x="1269487" y="0"/>
+                </a:cubicBezTo>
+                <a:cubicBezTo>
+                  <a:pt x="1564240" y="-2035"/>
+                  <a:pt x="1733579" y="10639"/>
+                  <a:pt x="1953057" y="0"/>
+                </a:cubicBezTo>
+                <a:cubicBezTo>
+                  <a:pt x="2172535" y="-10639"/>
+                  <a:pt x="2453962" y="14018"/>
+                  <a:pt x="2636627" y="0"/>
+                </a:cubicBezTo>
+                <a:cubicBezTo>
+                  <a:pt x="2819292" y="-14018"/>
+                  <a:pt x="3121375" y="5399"/>
+                  <a:pt x="3255095" y="0"/>
+                </a:cubicBezTo>
+                <a:cubicBezTo>
+                  <a:pt x="3254386" y="8157"/>
+                  <a:pt x="3254682" y="12125"/>
+                  <a:pt x="3255095" y="18288"/>
+                </a:cubicBezTo>
+                <a:cubicBezTo>
+                  <a:pt x="3088545" y="23203"/>
+                  <a:pt x="2687475" y="7419"/>
+                  <a:pt x="2538974" y="18288"/>
+                </a:cubicBezTo>
+                <a:cubicBezTo>
+                  <a:pt x="2390473" y="29157"/>
+                  <a:pt x="2137381" y="-8959"/>
+                  <a:pt x="1822853" y="18288"/>
+                </a:cubicBezTo>
+                <a:cubicBezTo>
+                  <a:pt x="1508325" y="45535"/>
+                  <a:pt x="1466437" y="20385"/>
+                  <a:pt x="1171834" y="18288"/>
+                </a:cubicBezTo>
+                <a:cubicBezTo>
+                  <a:pt x="877231" y="16191"/>
+                  <a:pt x="561097" y="37643"/>
+                  <a:pt x="0" y="18288"/>
+                </a:cubicBezTo>
+                <a:cubicBezTo>
+                  <a:pt x="-46" y="12483"/>
+                  <a:pt x="-203" y="6491"/>
+                  <a:pt x="0" y="0"/>
+                </a:cubicBezTo>
+                <a:close/>
+              </a:path>
+              <a:path w="3255095" h="18288" stroke="0" extrusionOk="0">
+                <a:moveTo>
+                  <a:pt x="0" y="0"/>
+                </a:moveTo>
+                <a:cubicBezTo>
+                  <a:pt x="291965" y="19429"/>
+                  <a:pt x="363155" y="8568"/>
+                  <a:pt x="618468" y="0"/>
+                </a:cubicBezTo>
+                <a:cubicBezTo>
+                  <a:pt x="873781" y="-8568"/>
+                  <a:pt x="904459" y="-19505"/>
+                  <a:pt x="1171834" y="0"/>
+                </a:cubicBezTo>
+                <a:cubicBezTo>
+                  <a:pt x="1439209" y="19505"/>
+                  <a:pt x="1744369" y="9790"/>
+                  <a:pt x="1887955" y="0"/>
+                </a:cubicBezTo>
+                <a:cubicBezTo>
+                  <a:pt x="2031541" y="-9790"/>
+                  <a:pt x="2346378" y="21240"/>
+                  <a:pt x="2506423" y="0"/>
+                </a:cubicBezTo>
+                <a:cubicBezTo>
+                  <a:pt x="2666468" y="-21240"/>
+                  <a:pt x="2990257" y="30414"/>
+                  <a:pt x="3255095" y="0"/>
+                </a:cubicBezTo>
+                <a:cubicBezTo>
+                  <a:pt x="3254831" y="4493"/>
+                  <a:pt x="3255479" y="9472"/>
+                  <a:pt x="3255095" y="18288"/>
+                </a:cubicBezTo>
+                <a:cubicBezTo>
+                  <a:pt x="3120743" y="16690"/>
+                  <a:pt x="2759628" y="42462"/>
+                  <a:pt x="2604076" y="18288"/>
+                </a:cubicBezTo>
+                <a:cubicBezTo>
+                  <a:pt x="2448524" y="-5886"/>
+                  <a:pt x="2184336" y="19599"/>
+                  <a:pt x="1887955" y="18288"/>
+                </a:cubicBezTo>
+                <a:cubicBezTo>
+                  <a:pt x="1591574" y="16977"/>
+                  <a:pt x="1548845" y="6870"/>
+                  <a:pt x="1334589" y="18288"/>
+                </a:cubicBezTo>
+                <a:cubicBezTo>
+                  <a:pt x="1120333" y="29706"/>
+                  <a:pt x="996014" y="9662"/>
+                  <a:pt x="683570" y="18288"/>
+                </a:cubicBezTo>
+                <a:cubicBezTo>
+                  <a:pt x="371126" y="26914"/>
+                  <a:pt x="198687" y="16167"/>
+                  <a:pt x="0" y="18288"/>
+                </a:cubicBezTo>
+                <a:cubicBezTo>
+                  <a:pt x="843" y="9577"/>
+                  <a:pt x="371" y="6900"/>
+                  <a:pt x="0" y="0"/>
+                </a:cubicBezTo>
+                <a:close/>
+              </a:path>
+            </a:pathLst>
+          </a:custGeom>
+          <a:solidFill>
+            <a:schemeClr val="accent2"/>
+          </a:solidFill>
+          <a:ln w="38100" cap="rnd">
+            <a:solidFill>
+              <a:schemeClr val="accent2"/>
+            </a:solidFill>
+            <a:round/>
+            <a:extLst>
+              <a:ext uri="{C807C97D-BFC1-408E-A445-0C87EB9F89A2}">
+                <ask:lineSketchStyleProps xmlns:ask="http://schemas.microsoft.com/office/drawing/2018/sketchyshapes" sd="1219033472">
+                  <a:prstGeom prst="rect">
+                    <a:avLst/>
+                  </a:prstGeom>
+                  <ask:type>
+                    <ask:lineSketchFreehand/>
+                  </ask:type>
+                </ask:lineSketchStyleProps>
+              </a:ext>
+            </a:extLst>
+          </a:ln>
+        </p:spPr>
+        <p:style>
+          <a:lnRef idx="2">
+            <a:schemeClr val="accent1">
+              <a:shade val="50000"/>
+            </a:schemeClr>
+          </a:lnRef>
+          <a:fillRef idx="1">
+            <a:schemeClr val="accent1"/>
+          </a:fillRef>
+          <a:effectRef idx="0">
+            <a:schemeClr val="accent1"/>
+          </a:effectRef>
+          <a:fontRef idx="minor">
+            <a:schemeClr val="lt1"/>
+          </a:fontRef>
+        </p:style>
+        <p:txBody>
+          <a:bodyPr rtlCol="0" anchor="ctr"/>
+          <a:lstStyle/>
+          <a:p>
+            <a:pPr algn="ctr"/>
+            <a:endParaRPr lang="en-US"/>
+          </a:p>
+        </p:txBody>
+      </p:sp>
+      <p:sp>
+        <p:nvSpPr>
+          <p:cNvPr id="4" name="テキスト ボックス 3">
+            <a:extLst>
+              <a:ext uri="{FF2B5EF4-FFF2-40B4-BE49-F238E27FC236}">
+                <a16:creationId xmlns:a16="http://schemas.microsoft.com/office/drawing/2014/main" id="{1087D012-FF68-A423-E55E-E0990031B53E}"/>
+              </a:ext>
+            </a:extLst>
+          </p:cNvPr>
+          <p:cNvSpPr txBox="1"/>
+          <p:nvPr/>
+        </p:nvSpPr>
+        <p:spPr>
+          <a:xfrm>
+            <a:off x="491067" y="1346200"/>
+            <a:ext cx="3730663" cy="2929467"/>
+          </a:xfrm>
+          <a:prstGeom prst="rect">
+            <a:avLst/>
+          </a:prstGeom>
+        </p:spPr>
+        <p:txBody>
+          <a:bodyPr vert="horz" lIns="91440" tIns="45720" rIns="91440" bIns="45720" rtlCol="0" anchor="t">
+            <a:normAutofit/>
+          </a:bodyPr>
+          <a:lstStyle/>
+          <a:p>
+            <a:pPr indent="-228600" defTabSz="914400">
+              <a:lnSpc>
+                <a:spcPct val="90000"/>
+              </a:lnSpc>
+              <a:spcAft>
+                <a:spcPts val="600"/>
+              </a:spcAft>
+              <a:buFont typeface="Arial" panose="020B0604020202020204" pitchFamily="34" charset="0"/>
+              <a:buChar char="•"/>
+            </a:pPr>
+            <a:r>
+              <a:rPr kumimoji="1" lang="ja-JP" altLang="en-US" sz="1600" dirty="0">
+                <a:latin typeface="BIZ UDゴシック" panose="020B0400000000000000" pitchFamily="49" charset="-128"/>
+                <a:ea typeface="BIZ UDゴシック" panose="020B0400000000000000" pitchFamily="49" charset="-128"/>
+              </a:rPr>
+              <a:t>ページ数は４ページにします。</a:t>
+            </a:r>
+            <a:endParaRPr kumimoji="1" lang="en-US" altLang="ja-JP" sz="1600" dirty="0">
+              <a:latin typeface="BIZ UDゴシック" panose="020B0400000000000000" pitchFamily="49" charset="-128"/>
+              <a:ea typeface="BIZ UDゴシック" panose="020B0400000000000000" pitchFamily="49" charset="-128"/>
+            </a:endParaRPr>
+          </a:p>
+          <a:p>
+            <a:pPr defTabSz="914400">
+              <a:lnSpc>
+                <a:spcPct val="90000"/>
+              </a:lnSpc>
+              <a:spcAft>
+                <a:spcPts val="600"/>
+              </a:spcAft>
+            </a:pPr>
+            <a:r>
+              <a:rPr kumimoji="1" lang="ja-JP" altLang="en-US" sz="1600" dirty="0">
+                <a:latin typeface="BIZ UDゴシック" panose="020B0400000000000000" pitchFamily="49" charset="-128"/>
+                <a:ea typeface="BIZ UDゴシック" panose="020B0400000000000000" pitchFamily="49" charset="-128"/>
+              </a:rPr>
+              <a:t>１ページにつき写真を４枚程度掲載し、１枚づつに</a:t>
+            </a:r>
+            <a:r>
+              <a:rPr kumimoji="1" lang="en-US" altLang="ja-JP" sz="1600" dirty="0">
+                <a:latin typeface="BIZ UDゴシック" panose="020B0400000000000000" pitchFamily="49" charset="-128"/>
+                <a:ea typeface="BIZ UDゴシック" panose="020B0400000000000000" pitchFamily="49" charset="-128"/>
+              </a:rPr>
+              <a:t>300</a:t>
+            </a:r>
+            <a:r>
+              <a:rPr kumimoji="1" lang="ja-JP" altLang="en-US" sz="1600" dirty="0">
+                <a:latin typeface="BIZ UDゴシック" panose="020B0400000000000000" pitchFamily="49" charset="-128"/>
+                <a:ea typeface="BIZ UDゴシック" panose="020B0400000000000000" pitchFamily="49" charset="-128"/>
+              </a:rPr>
+              <a:t>文字くらいの</a:t>
+            </a:r>
+            <a:endParaRPr kumimoji="1" lang="en-US" altLang="ja-JP" sz="1600" dirty="0">
+              <a:latin typeface="BIZ UDゴシック" panose="020B0400000000000000" pitchFamily="49" charset="-128"/>
+              <a:ea typeface="BIZ UDゴシック" panose="020B0400000000000000" pitchFamily="49" charset="-128"/>
+            </a:endParaRPr>
+          </a:p>
+          <a:p>
+            <a:pPr defTabSz="914400">
+              <a:lnSpc>
+                <a:spcPct val="90000"/>
+              </a:lnSpc>
+              <a:spcAft>
+                <a:spcPts val="600"/>
+              </a:spcAft>
+            </a:pPr>
+            <a:r>
+              <a:rPr kumimoji="1" lang="ja-JP" altLang="en-US" sz="1500" dirty="0">
+                <a:latin typeface="BIZ UDゴシック" panose="020B0400000000000000" pitchFamily="49" charset="-128"/>
+                <a:ea typeface="BIZ UDゴシック" panose="020B0400000000000000" pitchFamily="49" charset="-128"/>
+              </a:rPr>
+              <a:t>説明文とアクセスポイントを書きます。</a:t>
+            </a:r>
+            <a:endParaRPr kumimoji="1" lang="en-US" altLang="ja-JP" sz="1500" dirty="0">
+              <a:latin typeface="BIZ UDゴシック" panose="020B0400000000000000" pitchFamily="49" charset="-128"/>
+              <a:ea typeface="BIZ UDゴシック" panose="020B0400000000000000" pitchFamily="49" charset="-128"/>
+            </a:endParaRPr>
+          </a:p>
+          <a:p>
+            <a:pPr indent="-228600" defTabSz="914400">
+              <a:lnSpc>
+                <a:spcPct val="90000"/>
+              </a:lnSpc>
+              <a:spcAft>
+                <a:spcPts val="600"/>
+              </a:spcAft>
+              <a:buFont typeface="Arial" panose="020B0604020202020204" pitchFamily="34" charset="0"/>
+              <a:buChar char="•"/>
+            </a:pPr>
+            <a:endParaRPr kumimoji="1" lang="en-US" altLang="ja-JP" sz="1500" dirty="0">
+              <a:latin typeface="BIZ UDゴシック" panose="020B0400000000000000" pitchFamily="49" charset="-128"/>
+              <a:ea typeface="BIZ UDゴシック" panose="020B0400000000000000" pitchFamily="49" charset="-128"/>
+            </a:endParaRPr>
+          </a:p>
+          <a:p>
+            <a:pPr indent="-228600" defTabSz="914400">
+              <a:lnSpc>
+                <a:spcPct val="90000"/>
+              </a:lnSpc>
+              <a:spcAft>
+                <a:spcPts val="600"/>
+              </a:spcAft>
+              <a:buFont typeface="Arial" panose="020B0604020202020204" pitchFamily="34" charset="0"/>
+              <a:buChar char="•"/>
+            </a:pPr>
+            <a:endParaRPr lang="en-US" altLang="ja-JP" sz="1500" dirty="0">
+              <a:latin typeface="BIZ UDゴシック" panose="020B0400000000000000" pitchFamily="49" charset="-128"/>
+              <a:ea typeface="BIZ UDゴシック" panose="020B0400000000000000" pitchFamily="49" charset="-128"/>
+            </a:endParaRPr>
+          </a:p>
+          <a:p>
+            <a:pPr indent="-228600" defTabSz="914400">
+              <a:lnSpc>
+                <a:spcPct val="90000"/>
+              </a:lnSpc>
+              <a:spcAft>
+                <a:spcPts val="600"/>
+              </a:spcAft>
+              <a:buFont typeface="Arial" panose="020B0604020202020204" pitchFamily="34" charset="0"/>
+              <a:buChar char="•"/>
+            </a:pPr>
+            <a:r>
+              <a:rPr lang="ja-JP" altLang="en-US" sz="1500" dirty="0">
+                <a:latin typeface="BIZ UDゴシック" panose="020B0400000000000000" pitchFamily="49" charset="-128"/>
+                <a:ea typeface="BIZ UDゴシック" panose="020B0400000000000000" pitchFamily="49" charset="-128"/>
+              </a:rPr>
+              <a:t>８月に福岡県内の夜景スポットを撮　　　　  影し写真素材を収集。</a:t>
+            </a:r>
+            <a:endParaRPr lang="en-US" altLang="ja-JP" sz="1500" dirty="0">
+              <a:latin typeface="BIZ UDゴシック" panose="020B0400000000000000" pitchFamily="49" charset="-128"/>
+              <a:ea typeface="BIZ UDゴシック" panose="020B0400000000000000" pitchFamily="49" charset="-128"/>
+            </a:endParaRPr>
+          </a:p>
+          <a:p>
+            <a:pPr indent="-228600" defTabSz="914400">
+              <a:lnSpc>
+                <a:spcPct val="90000"/>
+              </a:lnSpc>
+              <a:spcAft>
+                <a:spcPts val="600"/>
+              </a:spcAft>
+              <a:buFont typeface="Arial" panose="020B0604020202020204" pitchFamily="34" charset="0"/>
+              <a:buChar char="•"/>
+            </a:pPr>
+            <a:r>
+              <a:rPr lang="en-US" altLang="ja-JP" sz="1500" dirty="0">
+                <a:latin typeface="BIZ UDゴシック" panose="020B0400000000000000" pitchFamily="49" charset="-128"/>
+                <a:ea typeface="BIZ UDゴシック" panose="020B0400000000000000" pitchFamily="49" charset="-128"/>
+              </a:rPr>
+              <a:t>Photoshop</a:t>
+            </a:r>
+            <a:r>
+              <a:rPr lang="ja-JP" altLang="en-US" sz="1500" dirty="0">
+                <a:latin typeface="BIZ UDゴシック" panose="020B0400000000000000" pitchFamily="49" charset="-128"/>
+                <a:ea typeface="BIZ UDゴシック" panose="020B0400000000000000" pitchFamily="49" charset="-128"/>
+              </a:rPr>
+              <a:t>で写真の色味や明るさを調整・加工する。</a:t>
+            </a:r>
+            <a:endParaRPr kumimoji="1" lang="en-US" altLang="ja-JP" sz="1500" dirty="0">
+              <a:latin typeface="BIZ UDゴシック" panose="020B0400000000000000" pitchFamily="49" charset="-128"/>
+              <a:ea typeface="BIZ UDゴシック" panose="020B0400000000000000" pitchFamily="49" charset="-128"/>
+            </a:endParaRPr>
+          </a:p>
+          <a:p>
+            <a:pPr indent="-228600" defTabSz="914400">
+              <a:lnSpc>
+                <a:spcPct val="90000"/>
+              </a:lnSpc>
+              <a:spcAft>
+                <a:spcPts val="600"/>
+              </a:spcAft>
+              <a:buFont typeface="Arial" panose="020B0604020202020204" pitchFamily="34" charset="0"/>
+              <a:buChar char="•"/>
+            </a:pPr>
+            <a:endParaRPr kumimoji="1" lang="en-US" altLang="ja-JP" sz="1500" dirty="0">
+              <a:latin typeface="BIZ UDゴシック" panose="020B0400000000000000" pitchFamily="49" charset="-128"/>
+              <a:ea typeface="BIZ UDゴシック" panose="020B0400000000000000" pitchFamily="49" charset="-128"/>
+            </a:endParaRPr>
+          </a:p>
+          <a:p>
+            <a:pPr indent="-228600" defTabSz="914400">
+              <a:lnSpc>
+                <a:spcPct val="90000"/>
+              </a:lnSpc>
+              <a:spcAft>
+                <a:spcPts val="600"/>
+              </a:spcAft>
+              <a:buFont typeface="Arial" panose="020B0604020202020204" pitchFamily="34" charset="0"/>
+              <a:buChar char="•"/>
+            </a:pPr>
+            <a:endParaRPr kumimoji="1" lang="en-US" altLang="ja-JP" sz="1500" dirty="0">
+              <a:latin typeface="BIZ UDゴシック" panose="020B0400000000000000" pitchFamily="49" charset="-128"/>
+              <a:ea typeface="BIZ UDゴシック" panose="020B0400000000000000" pitchFamily="49" charset="-128"/>
+            </a:endParaRPr>
+          </a:p>
+          <a:p>
+            <a:pPr indent="-228600" defTabSz="914400">
+              <a:lnSpc>
+                <a:spcPct val="90000"/>
+              </a:lnSpc>
+              <a:spcAft>
+                <a:spcPts val="600"/>
+              </a:spcAft>
+              <a:buFont typeface="Arial" panose="020B0604020202020204" pitchFamily="34" charset="0"/>
+              <a:buChar char="•"/>
+            </a:pPr>
+            <a:endParaRPr kumimoji="1" lang="en-US" altLang="ja-JP" sz="1500" dirty="0">
+              <a:latin typeface="BIZ UDゴシック" panose="020B0400000000000000" pitchFamily="49" charset="-128"/>
+              <a:ea typeface="BIZ UDゴシック" panose="020B0400000000000000" pitchFamily="49" charset="-128"/>
+            </a:endParaRPr>
+          </a:p>
+          <a:p>
+            <a:pPr indent="-228600" defTabSz="914400">
+              <a:lnSpc>
+                <a:spcPct val="90000"/>
+              </a:lnSpc>
+              <a:spcAft>
+                <a:spcPts val="600"/>
+              </a:spcAft>
+              <a:buFont typeface="Arial" panose="020B0604020202020204" pitchFamily="34" charset="0"/>
+              <a:buChar char="•"/>
+            </a:pPr>
+            <a:endParaRPr kumimoji="1" lang="en-US" altLang="ja-JP" sz="1500" dirty="0">
+              <a:latin typeface="BIZ UDゴシック" panose="020B0400000000000000" pitchFamily="49" charset="-128"/>
+              <a:ea typeface="BIZ UDゴシック" panose="020B0400000000000000" pitchFamily="49" charset="-128"/>
+            </a:endParaRPr>
+          </a:p>
+        </p:txBody>
+      </p:sp>
+      <p:pic>
+        <p:nvPicPr>
+          <p:cNvPr id="8" name="図 7">
+            <a:extLst>
+              <a:ext uri="{FF2B5EF4-FFF2-40B4-BE49-F238E27FC236}">
+                <a16:creationId xmlns:a16="http://schemas.microsoft.com/office/drawing/2014/main" id="{E423E1CF-7A65-DA65-D7B4-F0DF6CC6ECDA}"/>
+              </a:ext>
+            </a:extLst>
+          </p:cNvPr>
+          <p:cNvPicPr>
+            <a:picLocks noChangeAspect="1"/>
+          </p:cNvPicPr>
+          <p:nvPr/>
+        </p:nvPicPr>
+        <p:blipFill>
+          <a:blip r:embed="rId2">
+            <a:extLst>
+              <a:ext uri="{28A0092B-C50C-407E-A947-70E740481C1C}">
+                <a14:useLocalDpi xmlns:a14="http://schemas.microsoft.com/office/drawing/2010/main" val="0"/>
+              </a:ext>
+            </a:extLst>
+          </a:blip>
+          <a:stretch>
+            <a:fillRect/>
+          </a:stretch>
+        </p:blipFill>
+        <p:spPr>
+          <a:xfrm>
+            <a:off x="4221730" y="742846"/>
+            <a:ext cx="7857248" cy="5067508"/>
+          </a:xfrm>
+          <a:prstGeom prst="rect">
+            <a:avLst/>
+          </a:prstGeom>
+        </p:spPr>
+      </p:pic>
+    </p:spTree>
+    <p:extLst>
+      <p:ext uri="{BB962C8B-B14F-4D97-AF65-F5344CB8AC3E}">
+        <p14:creationId xmlns:p14="http://schemas.microsoft.com/office/powerpoint/2010/main" val="3254490378"/>
+      </p:ext>
+    </p:extLst>
+  </p:cSld>
+  <p:clrMapOvr>
+    <a:masterClrMapping/>
+  </p:clrMapOvr>
+</p:sld>
+</file>
+
+<file path=ppt/slides/slide6.xml><?xml version="1.0" encoding="utf-8"?>
 <p:sld xmlns:a="http://schemas.openxmlformats.org/drawingml/2006/main" xmlns:r="http://schemas.openxmlformats.org/officeDocument/2006/relationships" xmlns:p="http://schemas.openxmlformats.org/presentationml/2006/main">
   <p:cSld>
     <p:bg>
@@ -30007,7 +30685,7 @@
 </p:sld>
 </file>
 
-<file path=ppt/slides/slide6.xml><?xml version="1.0" encoding="utf-8"?>
+<file path=ppt/slides/slide7.xml><?xml version="1.0" encoding="utf-8"?>
 <p:sld xmlns:a="http://schemas.openxmlformats.org/drawingml/2006/main" xmlns:r="http://schemas.openxmlformats.org/officeDocument/2006/relationships" xmlns:p="http://schemas.openxmlformats.org/presentationml/2006/main">
   <p:cSld>
     <p:bg>
@@ -32619,7 +33297,7 @@
 </p:sld>
 </file>
 
-<file path=ppt/slides/slide7.xml><?xml version="1.0" encoding="utf-8"?>
+<file path=ppt/slides/slide8.xml><?xml version="1.0" encoding="utf-8"?>
 <p:sld xmlns:a="http://schemas.openxmlformats.org/drawingml/2006/main" xmlns:r="http://schemas.openxmlformats.org/officeDocument/2006/relationships" xmlns:p="http://schemas.openxmlformats.org/presentationml/2006/main">
   <p:cSld>
     <p:bg>
@@ -35235,6 +35913,675 @@
 </p:sld>
 </file>
 
+<file path=ppt/slides/slide9.xml><?xml version="1.0" encoding="utf-8"?>
+<p:sld xmlns:a="http://schemas.openxmlformats.org/drawingml/2006/main" xmlns:r="http://schemas.openxmlformats.org/officeDocument/2006/relationships" xmlns:p="http://schemas.openxmlformats.org/presentationml/2006/main">
+  <p:cSld>
+    <p:bg>
+      <p:bgPr>
+        <a:solidFill>
+          <a:schemeClr val="bg1"/>
+        </a:solidFill>
+        <a:effectLst/>
+      </p:bgPr>
+    </p:bg>
+    <p:spTree>
+      <p:nvGrpSpPr>
+        <p:cNvPr id="1" name="">
+          <a:extLst>
+            <a:ext uri="{FF2B5EF4-FFF2-40B4-BE49-F238E27FC236}">
+              <a16:creationId xmlns:a16="http://schemas.microsoft.com/office/drawing/2014/main" id="{3DBCBD8D-32EE-0C99-2B88-27354A93712E}"/>
+            </a:ext>
+          </a:extLst>
+        </p:cNvPr>
+        <p:cNvGrpSpPr/>
+        <p:nvPr/>
+      </p:nvGrpSpPr>
+      <p:grpSpPr>
+        <a:xfrm>
+          <a:off x="0" y="0"/>
+          <a:ext cx="0" cy="0"/>
+          <a:chOff x="0" y="0"/>
+          <a:chExt cx="0" cy="0"/>
+        </a:xfrm>
+      </p:grpSpPr>
+      <p:sp useBgFill="1">
+        <p:nvSpPr>
+          <p:cNvPr id="13" name="Rectangle 12">
+            <a:extLst>
+              <a:ext uri="{FF2B5EF4-FFF2-40B4-BE49-F238E27FC236}">
+                <a16:creationId xmlns:a16="http://schemas.microsoft.com/office/drawing/2014/main" id="{B7E013D1-870B-4466-79B5-519AC314361C}"/>
+              </a:ext>
+              <a:ext uri="{C183D7F6-B498-43B3-948B-1728B52AA6E4}">
+                <adec:decorative xmlns:adec="http://schemas.microsoft.com/office/drawing/2017/decorative" val="1"/>
+              </a:ext>
+            </a:extLst>
+          </p:cNvPr>
+          <p:cNvSpPr>
+            <a:spLocks noGrp="1" noRot="1" noChangeAspect="1" noMove="1" noResize="1" noEditPoints="1" noAdjustHandles="1" noChangeArrowheads="1" noChangeShapeType="1" noTextEdit="1"/>
+          </p:cNvSpPr>
+          <p:nvPr>
+            <p:extLst>
+              <p:ext uri="{386F3935-93C4-4BCD-93E2-E3B085C9AB24}">
+                <p16:designElem xmlns:p16="http://schemas.microsoft.com/office/powerpoint/2015/main" val="1"/>
+              </p:ext>
+            </p:extLst>
+          </p:nvPr>
+        </p:nvSpPr>
+        <p:spPr>
+          <a:xfrm>
+            <a:off x="0" y="0"/>
+            <a:ext cx="12192000" cy="6858000"/>
+          </a:xfrm>
+          <a:prstGeom prst="rect">
+            <a:avLst/>
+          </a:prstGeom>
+          <a:ln>
+            <a:noFill/>
+          </a:ln>
+        </p:spPr>
+        <p:style>
+          <a:lnRef idx="2">
+            <a:schemeClr val="accent1">
+              <a:shade val="50000"/>
+            </a:schemeClr>
+          </a:lnRef>
+          <a:fillRef idx="1">
+            <a:schemeClr val="accent1"/>
+          </a:fillRef>
+          <a:effectRef idx="0">
+            <a:schemeClr val="accent1"/>
+          </a:effectRef>
+          <a:fontRef idx="minor">
+            <a:schemeClr val="lt1"/>
+          </a:fontRef>
+        </p:style>
+        <p:txBody>
+          <a:bodyPr rtlCol="0" anchor="ctr"/>
+          <a:lstStyle/>
+          <a:p>
+            <a:pPr algn="ctr"/>
+            <a:endParaRPr lang="en-US"/>
+          </a:p>
+        </p:txBody>
+      </p:sp>
+      <p:sp>
+        <p:nvSpPr>
+          <p:cNvPr id="15" name="sketch line">
+            <a:extLst>
+              <a:ext uri="{FF2B5EF4-FFF2-40B4-BE49-F238E27FC236}">
+                <a16:creationId xmlns:a16="http://schemas.microsoft.com/office/drawing/2014/main" id="{F1F7E849-B94A-5CBA-E6BB-E22C94F3DE52}"/>
+              </a:ext>
+              <a:ext uri="{C183D7F6-B498-43B3-948B-1728B52AA6E4}">
+                <adec:decorative xmlns:adec="http://schemas.microsoft.com/office/drawing/2017/decorative" val="1"/>
+              </a:ext>
+            </a:extLst>
+          </p:cNvPr>
+          <p:cNvSpPr>
+            <a:spLocks noGrp="1" noRot="1" noChangeAspect="1" noMove="1" noResize="1" noEditPoints="1" noAdjustHandles="1" noChangeArrowheads="1" noChangeShapeType="1" noTextEdit="1"/>
+          </p:cNvSpPr>
+          <p:nvPr>
+            <p:extLst>
+              <p:ext uri="{386F3935-93C4-4BCD-93E2-E3B085C9AB24}">
+                <p16:designElem xmlns:p16="http://schemas.microsoft.com/office/powerpoint/2015/main" val="1"/>
+              </p:ext>
+            </p:extLst>
+          </p:nvPr>
+        </p:nvSpPr>
+        <p:spPr>
+          <a:xfrm>
+            <a:off x="643278" y="2573756"/>
+            <a:ext cx="3255095" cy="18288"/>
+          </a:xfrm>
+          <a:custGeom>
+            <a:avLst/>
+            <a:gdLst>
+              <a:gd name="csX0" fmla="*/ 0 w 3255095"/>
+              <a:gd name="csY0" fmla="*/ 0 h 18288"/>
+              <a:gd name="csX1" fmla="*/ 618468 w 3255095"/>
+              <a:gd name="csY1" fmla="*/ 0 h 18288"/>
+              <a:gd name="csX2" fmla="*/ 1269487 w 3255095"/>
+              <a:gd name="csY2" fmla="*/ 0 h 18288"/>
+              <a:gd name="csX3" fmla="*/ 1953057 w 3255095"/>
+              <a:gd name="csY3" fmla="*/ 0 h 18288"/>
+              <a:gd name="csX4" fmla="*/ 2636627 w 3255095"/>
+              <a:gd name="csY4" fmla="*/ 0 h 18288"/>
+              <a:gd name="csX5" fmla="*/ 3255095 w 3255095"/>
+              <a:gd name="csY5" fmla="*/ 0 h 18288"/>
+              <a:gd name="csX6" fmla="*/ 3255095 w 3255095"/>
+              <a:gd name="csY6" fmla="*/ 18288 h 18288"/>
+              <a:gd name="csX7" fmla="*/ 2538974 w 3255095"/>
+              <a:gd name="csY7" fmla="*/ 18288 h 18288"/>
+              <a:gd name="csX8" fmla="*/ 1822853 w 3255095"/>
+              <a:gd name="csY8" fmla="*/ 18288 h 18288"/>
+              <a:gd name="csX9" fmla="*/ 1171834 w 3255095"/>
+              <a:gd name="csY9" fmla="*/ 18288 h 18288"/>
+              <a:gd name="csX10" fmla="*/ 0 w 3255095"/>
+              <a:gd name="csY10" fmla="*/ 18288 h 18288"/>
+              <a:gd name="csX11" fmla="*/ 0 w 3255095"/>
+              <a:gd name="csY11" fmla="*/ 0 h 18288"/>
+            </a:gdLst>
+            <a:ahLst/>
+            <a:cxnLst>
+              <a:cxn ang="0">
+                <a:pos x="csX0" y="csY0"/>
+              </a:cxn>
+              <a:cxn ang="0">
+                <a:pos x="csX1" y="csY1"/>
+              </a:cxn>
+              <a:cxn ang="0">
+                <a:pos x="csX2" y="csY2"/>
+              </a:cxn>
+              <a:cxn ang="0">
+                <a:pos x="csX3" y="csY3"/>
+              </a:cxn>
+              <a:cxn ang="0">
+                <a:pos x="csX4" y="csY4"/>
+              </a:cxn>
+              <a:cxn ang="0">
+                <a:pos x="csX5" y="csY5"/>
+              </a:cxn>
+              <a:cxn ang="0">
+                <a:pos x="csX6" y="csY6"/>
+              </a:cxn>
+              <a:cxn ang="0">
+                <a:pos x="csX7" y="csY7"/>
+              </a:cxn>
+              <a:cxn ang="0">
+                <a:pos x="csX8" y="csY8"/>
+              </a:cxn>
+              <a:cxn ang="0">
+                <a:pos x="csX9" y="csY9"/>
+              </a:cxn>
+              <a:cxn ang="0">
+                <a:pos x="csX10" y="csY10"/>
+              </a:cxn>
+              <a:cxn ang="0">
+                <a:pos x="csX11" y="csY11"/>
+              </a:cxn>
+            </a:cxnLst>
+            <a:rect l="l" t="t" r="r" b="b"/>
+            <a:pathLst>
+              <a:path w="3255095" h="18288" fill="none" extrusionOk="0">
+                <a:moveTo>
+                  <a:pt x="0" y="0"/>
+                </a:moveTo>
+                <a:cubicBezTo>
+                  <a:pt x="240201" y="-22123"/>
+                  <a:pt x="462021" y="-19623"/>
+                  <a:pt x="618468" y="0"/>
+                </a:cubicBezTo>
+                <a:cubicBezTo>
+                  <a:pt x="774915" y="19623"/>
+                  <a:pt x="974734" y="2035"/>
+                  <a:pt x="1269487" y="0"/>
+                </a:cubicBezTo>
+                <a:cubicBezTo>
+                  <a:pt x="1564240" y="-2035"/>
+                  <a:pt x="1733579" y="10639"/>
+                  <a:pt x="1953057" y="0"/>
+                </a:cubicBezTo>
+                <a:cubicBezTo>
+                  <a:pt x="2172535" y="-10639"/>
+                  <a:pt x="2453962" y="14018"/>
+                  <a:pt x="2636627" y="0"/>
+                </a:cubicBezTo>
+                <a:cubicBezTo>
+                  <a:pt x="2819292" y="-14018"/>
+                  <a:pt x="3121375" y="5399"/>
+                  <a:pt x="3255095" y="0"/>
+                </a:cubicBezTo>
+                <a:cubicBezTo>
+                  <a:pt x="3254386" y="8157"/>
+                  <a:pt x="3254682" y="12125"/>
+                  <a:pt x="3255095" y="18288"/>
+                </a:cubicBezTo>
+                <a:cubicBezTo>
+                  <a:pt x="3088545" y="23203"/>
+                  <a:pt x="2687475" y="7419"/>
+                  <a:pt x="2538974" y="18288"/>
+                </a:cubicBezTo>
+                <a:cubicBezTo>
+                  <a:pt x="2390473" y="29157"/>
+                  <a:pt x="2137381" y="-8959"/>
+                  <a:pt x="1822853" y="18288"/>
+                </a:cubicBezTo>
+                <a:cubicBezTo>
+                  <a:pt x="1508325" y="45535"/>
+                  <a:pt x="1466437" y="20385"/>
+                  <a:pt x="1171834" y="18288"/>
+                </a:cubicBezTo>
+                <a:cubicBezTo>
+                  <a:pt x="877231" y="16191"/>
+                  <a:pt x="561097" y="37643"/>
+                  <a:pt x="0" y="18288"/>
+                </a:cubicBezTo>
+                <a:cubicBezTo>
+                  <a:pt x="-46" y="12483"/>
+                  <a:pt x="-203" y="6491"/>
+                  <a:pt x="0" y="0"/>
+                </a:cubicBezTo>
+                <a:close/>
+              </a:path>
+              <a:path w="3255095" h="18288" stroke="0" extrusionOk="0">
+                <a:moveTo>
+                  <a:pt x="0" y="0"/>
+                </a:moveTo>
+                <a:cubicBezTo>
+                  <a:pt x="291965" y="19429"/>
+                  <a:pt x="363155" y="8568"/>
+                  <a:pt x="618468" y="0"/>
+                </a:cubicBezTo>
+                <a:cubicBezTo>
+                  <a:pt x="873781" y="-8568"/>
+                  <a:pt x="904459" y="-19505"/>
+                  <a:pt x="1171834" y="0"/>
+                </a:cubicBezTo>
+                <a:cubicBezTo>
+                  <a:pt x="1439209" y="19505"/>
+                  <a:pt x="1744369" y="9790"/>
+                  <a:pt x="1887955" y="0"/>
+                </a:cubicBezTo>
+                <a:cubicBezTo>
+                  <a:pt x="2031541" y="-9790"/>
+                  <a:pt x="2346378" y="21240"/>
+                  <a:pt x="2506423" y="0"/>
+                </a:cubicBezTo>
+                <a:cubicBezTo>
+                  <a:pt x="2666468" y="-21240"/>
+                  <a:pt x="2990257" y="30414"/>
+                  <a:pt x="3255095" y="0"/>
+                </a:cubicBezTo>
+                <a:cubicBezTo>
+                  <a:pt x="3254831" y="4493"/>
+                  <a:pt x="3255479" y="9472"/>
+                  <a:pt x="3255095" y="18288"/>
+                </a:cubicBezTo>
+                <a:cubicBezTo>
+                  <a:pt x="3120743" y="16690"/>
+                  <a:pt x="2759628" y="42462"/>
+                  <a:pt x="2604076" y="18288"/>
+                </a:cubicBezTo>
+                <a:cubicBezTo>
+                  <a:pt x="2448524" y="-5886"/>
+                  <a:pt x="2184336" y="19599"/>
+                  <a:pt x="1887955" y="18288"/>
+                </a:cubicBezTo>
+                <a:cubicBezTo>
+                  <a:pt x="1591574" y="16977"/>
+                  <a:pt x="1548845" y="6870"/>
+                  <a:pt x="1334589" y="18288"/>
+                </a:cubicBezTo>
+                <a:cubicBezTo>
+                  <a:pt x="1120333" y="29706"/>
+                  <a:pt x="996014" y="9662"/>
+                  <a:pt x="683570" y="18288"/>
+                </a:cubicBezTo>
+                <a:cubicBezTo>
+                  <a:pt x="371126" y="26914"/>
+                  <a:pt x="198687" y="16167"/>
+                  <a:pt x="0" y="18288"/>
+                </a:cubicBezTo>
+                <a:cubicBezTo>
+                  <a:pt x="843" y="9577"/>
+                  <a:pt x="371" y="6900"/>
+                  <a:pt x="0" y="0"/>
+                </a:cubicBezTo>
+                <a:close/>
+              </a:path>
+            </a:pathLst>
+          </a:custGeom>
+          <a:solidFill>
+            <a:schemeClr val="accent2"/>
+          </a:solidFill>
+          <a:ln w="38100" cap="rnd">
+            <a:solidFill>
+              <a:schemeClr val="accent2"/>
+            </a:solidFill>
+            <a:round/>
+            <a:extLst>
+              <a:ext uri="{C807C97D-BFC1-408E-A445-0C87EB9F89A2}">
+                <ask:lineSketchStyleProps xmlns:ask="http://schemas.microsoft.com/office/drawing/2018/sketchyshapes" sd="1219033472">
+                  <a:prstGeom prst="rect">
+                    <a:avLst/>
+                  </a:prstGeom>
+                  <ask:type>
+                    <ask:lineSketchFreehand/>
+                  </ask:type>
+                </ask:lineSketchStyleProps>
+              </a:ext>
+            </a:extLst>
+          </a:ln>
+        </p:spPr>
+        <p:style>
+          <a:lnRef idx="2">
+            <a:schemeClr val="accent1">
+              <a:shade val="50000"/>
+            </a:schemeClr>
+          </a:lnRef>
+          <a:fillRef idx="1">
+            <a:schemeClr val="accent1"/>
+          </a:fillRef>
+          <a:effectRef idx="0">
+            <a:schemeClr val="accent1"/>
+          </a:effectRef>
+          <a:fontRef idx="minor">
+            <a:schemeClr val="lt1"/>
+          </a:fontRef>
+        </p:style>
+        <p:txBody>
+          <a:bodyPr rtlCol="0" anchor="ctr"/>
+          <a:lstStyle/>
+          <a:p>
+            <a:pPr algn="ctr"/>
+            <a:endParaRPr lang="en-US"/>
+          </a:p>
+        </p:txBody>
+      </p:sp>
+      <p:sp>
+        <p:nvSpPr>
+          <p:cNvPr id="4" name="テキスト ボックス 3">
+            <a:extLst>
+              <a:ext uri="{FF2B5EF4-FFF2-40B4-BE49-F238E27FC236}">
+                <a16:creationId xmlns:a16="http://schemas.microsoft.com/office/drawing/2014/main" id="{C85FC780-BC13-92AF-6770-2C279500FECA}"/>
+              </a:ext>
+            </a:extLst>
+          </p:cNvPr>
+          <p:cNvSpPr txBox="1"/>
+          <p:nvPr/>
+        </p:nvSpPr>
+        <p:spPr>
+          <a:xfrm>
+            <a:off x="491067" y="1346200"/>
+            <a:ext cx="3730663" cy="2929467"/>
+          </a:xfrm>
+          <a:prstGeom prst="rect">
+            <a:avLst/>
+          </a:prstGeom>
+        </p:spPr>
+        <p:txBody>
+          <a:bodyPr vert="horz" lIns="91440" tIns="45720" rIns="91440" bIns="45720" rtlCol="0" anchor="t">
+            <a:normAutofit/>
+          </a:bodyPr>
+          <a:lstStyle/>
+          <a:p>
+            <a:pPr indent="-228600" defTabSz="914400">
+              <a:lnSpc>
+                <a:spcPct val="90000"/>
+              </a:lnSpc>
+              <a:spcAft>
+                <a:spcPts val="600"/>
+              </a:spcAft>
+              <a:buFont typeface="Arial" panose="020B0604020202020204" pitchFamily="34" charset="0"/>
+              <a:buChar char="•"/>
+            </a:pPr>
+            <a:r>
+              <a:rPr kumimoji="1" lang="ja-JP" altLang="en-US" sz="1600" dirty="0">
+                <a:latin typeface="BIZ UDゴシック" panose="020B0400000000000000" pitchFamily="49" charset="-128"/>
+                <a:ea typeface="BIZ UDゴシック" panose="020B0400000000000000" pitchFamily="49" charset="-128"/>
+              </a:rPr>
+              <a:t>ページ数は４ページにします。</a:t>
+            </a:r>
+            <a:endParaRPr kumimoji="1" lang="en-US" altLang="ja-JP" sz="1600" dirty="0">
+              <a:latin typeface="BIZ UDゴシック" panose="020B0400000000000000" pitchFamily="49" charset="-128"/>
+              <a:ea typeface="BIZ UDゴシック" panose="020B0400000000000000" pitchFamily="49" charset="-128"/>
+            </a:endParaRPr>
+          </a:p>
+          <a:p>
+            <a:pPr defTabSz="914400">
+              <a:lnSpc>
+                <a:spcPct val="90000"/>
+              </a:lnSpc>
+              <a:spcAft>
+                <a:spcPts val="600"/>
+              </a:spcAft>
+            </a:pPr>
+            <a:r>
+              <a:rPr kumimoji="1" lang="ja-JP" altLang="en-US" sz="1600" dirty="0">
+                <a:latin typeface="BIZ UDゴシック" panose="020B0400000000000000" pitchFamily="49" charset="-128"/>
+                <a:ea typeface="BIZ UDゴシック" panose="020B0400000000000000" pitchFamily="49" charset="-128"/>
+              </a:rPr>
+              <a:t>１ページにつき写真を４枚程度掲載し、１枚づつに</a:t>
+            </a:r>
+            <a:r>
+              <a:rPr kumimoji="1" lang="en-US" altLang="ja-JP" sz="1600" dirty="0">
+                <a:latin typeface="BIZ UDゴシック" panose="020B0400000000000000" pitchFamily="49" charset="-128"/>
+                <a:ea typeface="BIZ UDゴシック" panose="020B0400000000000000" pitchFamily="49" charset="-128"/>
+              </a:rPr>
+              <a:t>300</a:t>
+            </a:r>
+            <a:r>
+              <a:rPr kumimoji="1" lang="ja-JP" altLang="en-US" sz="1600" dirty="0">
+                <a:latin typeface="BIZ UDゴシック" panose="020B0400000000000000" pitchFamily="49" charset="-128"/>
+                <a:ea typeface="BIZ UDゴシック" panose="020B0400000000000000" pitchFamily="49" charset="-128"/>
+              </a:rPr>
+              <a:t>文字くらいの</a:t>
+            </a:r>
+            <a:endParaRPr kumimoji="1" lang="en-US" altLang="ja-JP" sz="1600" dirty="0">
+              <a:latin typeface="BIZ UDゴシック" panose="020B0400000000000000" pitchFamily="49" charset="-128"/>
+              <a:ea typeface="BIZ UDゴシック" panose="020B0400000000000000" pitchFamily="49" charset="-128"/>
+            </a:endParaRPr>
+          </a:p>
+          <a:p>
+            <a:pPr defTabSz="914400">
+              <a:lnSpc>
+                <a:spcPct val="90000"/>
+              </a:lnSpc>
+              <a:spcAft>
+                <a:spcPts val="600"/>
+              </a:spcAft>
+            </a:pPr>
+            <a:r>
+              <a:rPr kumimoji="1" lang="ja-JP" altLang="en-US" sz="1500" dirty="0">
+                <a:latin typeface="BIZ UDゴシック" panose="020B0400000000000000" pitchFamily="49" charset="-128"/>
+                <a:ea typeface="BIZ UDゴシック" panose="020B0400000000000000" pitchFamily="49" charset="-128"/>
+              </a:rPr>
+              <a:t>説明文とアクセスポイントを書きます。</a:t>
+            </a:r>
+            <a:endParaRPr kumimoji="1" lang="en-US" altLang="ja-JP" sz="1500" dirty="0">
+              <a:latin typeface="BIZ UDゴシック" panose="020B0400000000000000" pitchFamily="49" charset="-128"/>
+              <a:ea typeface="BIZ UDゴシック" panose="020B0400000000000000" pitchFamily="49" charset="-128"/>
+            </a:endParaRPr>
+          </a:p>
+          <a:p>
+            <a:pPr indent="-228600" defTabSz="914400">
+              <a:lnSpc>
+                <a:spcPct val="90000"/>
+              </a:lnSpc>
+              <a:spcAft>
+                <a:spcPts val="600"/>
+              </a:spcAft>
+              <a:buFont typeface="Arial" panose="020B0604020202020204" pitchFamily="34" charset="0"/>
+              <a:buChar char="•"/>
+            </a:pPr>
+            <a:endParaRPr kumimoji="1" lang="en-US" altLang="ja-JP" sz="1500" dirty="0">
+              <a:latin typeface="BIZ UDゴシック" panose="020B0400000000000000" pitchFamily="49" charset="-128"/>
+              <a:ea typeface="BIZ UDゴシック" panose="020B0400000000000000" pitchFamily="49" charset="-128"/>
+            </a:endParaRPr>
+          </a:p>
+          <a:p>
+            <a:pPr indent="-228600" defTabSz="914400">
+              <a:lnSpc>
+                <a:spcPct val="90000"/>
+              </a:lnSpc>
+              <a:spcAft>
+                <a:spcPts val="600"/>
+              </a:spcAft>
+              <a:buFont typeface="Arial" panose="020B0604020202020204" pitchFamily="34" charset="0"/>
+              <a:buChar char="•"/>
+            </a:pPr>
+            <a:endParaRPr lang="en-US" altLang="ja-JP" sz="1500" dirty="0">
+              <a:latin typeface="BIZ UDゴシック" panose="020B0400000000000000" pitchFamily="49" charset="-128"/>
+              <a:ea typeface="BIZ UDゴシック" panose="020B0400000000000000" pitchFamily="49" charset="-128"/>
+            </a:endParaRPr>
+          </a:p>
+          <a:p>
+            <a:pPr indent="-228600" defTabSz="914400">
+              <a:lnSpc>
+                <a:spcPct val="90000"/>
+              </a:lnSpc>
+              <a:spcAft>
+                <a:spcPts val="600"/>
+              </a:spcAft>
+              <a:buFont typeface="Arial" panose="020B0604020202020204" pitchFamily="34" charset="0"/>
+              <a:buChar char="•"/>
+            </a:pPr>
+            <a:r>
+              <a:rPr lang="ja-JP" altLang="en-US" sz="1500" dirty="0">
+                <a:latin typeface="BIZ UDゴシック" panose="020B0400000000000000" pitchFamily="49" charset="-128"/>
+                <a:ea typeface="BIZ UDゴシック" panose="020B0400000000000000" pitchFamily="49" charset="-128"/>
+              </a:rPr>
+              <a:t>８月に福岡県内の夜景スポットを撮　　　　  影し写真素材を収集。</a:t>
+            </a:r>
+            <a:endParaRPr lang="en-US" altLang="ja-JP" sz="1500" dirty="0">
+              <a:latin typeface="BIZ UDゴシック" panose="020B0400000000000000" pitchFamily="49" charset="-128"/>
+              <a:ea typeface="BIZ UDゴシック" panose="020B0400000000000000" pitchFamily="49" charset="-128"/>
+            </a:endParaRPr>
+          </a:p>
+          <a:p>
+            <a:pPr indent="-228600" defTabSz="914400">
+              <a:lnSpc>
+                <a:spcPct val="90000"/>
+              </a:lnSpc>
+              <a:spcAft>
+                <a:spcPts val="600"/>
+              </a:spcAft>
+              <a:buFont typeface="Arial" panose="020B0604020202020204" pitchFamily="34" charset="0"/>
+              <a:buChar char="•"/>
+            </a:pPr>
+            <a:r>
+              <a:rPr lang="en-US" altLang="ja-JP" sz="1500" dirty="0">
+                <a:latin typeface="BIZ UDゴシック" panose="020B0400000000000000" pitchFamily="49" charset="-128"/>
+                <a:ea typeface="BIZ UDゴシック" panose="020B0400000000000000" pitchFamily="49" charset="-128"/>
+              </a:rPr>
+              <a:t>Photoshop</a:t>
+            </a:r>
+            <a:r>
+              <a:rPr lang="ja-JP" altLang="en-US" sz="1500" dirty="0">
+                <a:latin typeface="BIZ UDゴシック" panose="020B0400000000000000" pitchFamily="49" charset="-128"/>
+                <a:ea typeface="BIZ UDゴシック" panose="020B0400000000000000" pitchFamily="49" charset="-128"/>
+              </a:rPr>
+              <a:t>で写真の色味や明るさを調整・加工する。</a:t>
+            </a:r>
+            <a:endParaRPr kumimoji="1" lang="en-US" altLang="ja-JP" sz="1500" dirty="0">
+              <a:latin typeface="BIZ UDゴシック" panose="020B0400000000000000" pitchFamily="49" charset="-128"/>
+              <a:ea typeface="BIZ UDゴシック" panose="020B0400000000000000" pitchFamily="49" charset="-128"/>
+            </a:endParaRPr>
+          </a:p>
+          <a:p>
+            <a:pPr indent="-228600" defTabSz="914400">
+              <a:lnSpc>
+                <a:spcPct val="90000"/>
+              </a:lnSpc>
+              <a:spcAft>
+                <a:spcPts val="600"/>
+              </a:spcAft>
+              <a:buFont typeface="Arial" panose="020B0604020202020204" pitchFamily="34" charset="0"/>
+              <a:buChar char="•"/>
+            </a:pPr>
+            <a:endParaRPr kumimoji="1" lang="en-US" altLang="ja-JP" sz="1500" dirty="0">
+              <a:latin typeface="BIZ UDゴシック" panose="020B0400000000000000" pitchFamily="49" charset="-128"/>
+              <a:ea typeface="BIZ UDゴシック" panose="020B0400000000000000" pitchFamily="49" charset="-128"/>
+            </a:endParaRPr>
+          </a:p>
+          <a:p>
+            <a:pPr indent="-228600" defTabSz="914400">
+              <a:lnSpc>
+                <a:spcPct val="90000"/>
+              </a:lnSpc>
+              <a:spcAft>
+                <a:spcPts val="600"/>
+              </a:spcAft>
+              <a:buFont typeface="Arial" panose="020B0604020202020204" pitchFamily="34" charset="0"/>
+              <a:buChar char="•"/>
+            </a:pPr>
+            <a:endParaRPr kumimoji="1" lang="en-US" altLang="ja-JP" sz="1500" dirty="0">
+              <a:latin typeface="BIZ UDゴシック" panose="020B0400000000000000" pitchFamily="49" charset="-128"/>
+              <a:ea typeface="BIZ UDゴシック" panose="020B0400000000000000" pitchFamily="49" charset="-128"/>
+            </a:endParaRPr>
+          </a:p>
+          <a:p>
+            <a:pPr indent="-228600" defTabSz="914400">
+              <a:lnSpc>
+                <a:spcPct val="90000"/>
+              </a:lnSpc>
+              <a:spcAft>
+                <a:spcPts val="600"/>
+              </a:spcAft>
+              <a:buFont typeface="Arial" panose="020B0604020202020204" pitchFamily="34" charset="0"/>
+              <a:buChar char="•"/>
+            </a:pPr>
+            <a:endParaRPr kumimoji="1" lang="en-US" altLang="ja-JP" sz="1500" dirty="0">
+              <a:latin typeface="BIZ UDゴシック" panose="020B0400000000000000" pitchFamily="49" charset="-128"/>
+              <a:ea typeface="BIZ UDゴシック" panose="020B0400000000000000" pitchFamily="49" charset="-128"/>
+            </a:endParaRPr>
+          </a:p>
+          <a:p>
+            <a:pPr indent="-228600" defTabSz="914400">
+              <a:lnSpc>
+                <a:spcPct val="90000"/>
+              </a:lnSpc>
+              <a:spcAft>
+                <a:spcPts val="600"/>
+              </a:spcAft>
+              <a:buFont typeface="Arial" panose="020B0604020202020204" pitchFamily="34" charset="0"/>
+              <a:buChar char="•"/>
+            </a:pPr>
+            <a:endParaRPr kumimoji="1" lang="en-US" altLang="ja-JP" sz="1500" dirty="0">
+              <a:latin typeface="BIZ UDゴシック" panose="020B0400000000000000" pitchFamily="49" charset="-128"/>
+              <a:ea typeface="BIZ UDゴシック" panose="020B0400000000000000" pitchFamily="49" charset="-128"/>
+            </a:endParaRPr>
+          </a:p>
+        </p:txBody>
+      </p:sp>
+      <p:pic>
+        <p:nvPicPr>
+          <p:cNvPr id="8" name="図 7">
+            <a:extLst>
+              <a:ext uri="{FF2B5EF4-FFF2-40B4-BE49-F238E27FC236}">
+                <a16:creationId xmlns:a16="http://schemas.microsoft.com/office/drawing/2014/main" id="{FCA74D0B-D75A-2A28-E44F-96CF39E7DCF5}"/>
+              </a:ext>
+            </a:extLst>
+          </p:cNvPr>
+          <p:cNvPicPr>
+            <a:picLocks noChangeAspect="1"/>
+          </p:cNvPicPr>
+          <p:nvPr/>
+        </p:nvPicPr>
+        <p:blipFill>
+          <a:blip r:embed="rId2">
+            <a:extLst>
+              <a:ext uri="{28A0092B-C50C-407E-A947-70E740481C1C}">
+                <a14:useLocalDpi xmlns:a14="http://schemas.microsoft.com/office/drawing/2010/main" val="0"/>
+              </a:ext>
+            </a:extLst>
+          </a:blip>
+          <a:stretch>
+            <a:fillRect/>
+          </a:stretch>
+        </p:blipFill>
+        <p:spPr>
+          <a:xfrm>
+            <a:off x="4221730" y="742846"/>
+            <a:ext cx="7857248" cy="5067508"/>
+          </a:xfrm>
+          <a:prstGeom prst="rect">
+            <a:avLst/>
+          </a:prstGeom>
+        </p:spPr>
+      </p:pic>
+    </p:spTree>
+    <p:extLst>
+      <p:ext uri="{BB962C8B-B14F-4D97-AF65-F5344CB8AC3E}">
+        <p14:creationId xmlns:p14="http://schemas.microsoft.com/office/powerpoint/2010/main" val="1665339706"/>
+      </p:ext>
+    </p:extLst>
+  </p:cSld>
+  <p:clrMapOvr>
+    <a:masterClrMapping/>
+  </p:clrMapOvr>
+</p:sld>
+</file>
+
 <file path=ppt/theme/theme1.xml><?xml version="1.0" encoding="utf-8"?>
 <a:theme xmlns:a="http://schemas.openxmlformats.org/drawingml/2006/main" name="Office 2013 - 2022 テーマ">
   <a:themeElements>

--- a/中間発表 power point/25007 大平凜音.pptx
+++ b/中間発表 power point/25007 大平凜音.pptx
@@ -14,6 +14,7 @@
     <p:sldId id="262" r:id="rId8"/>
     <p:sldId id="265" r:id="rId9"/>
     <p:sldId id="267" r:id="rId10"/>
+    <p:sldId id="268" r:id="rId11"/>
   </p:sldIdLst>
   <p:sldSz cx="12192000" cy="6858000"/>
   <p:notesSz cx="6858000" cy="9144000"/>
@@ -4834,31 +4835,24 @@
         <a:lstStyle/>
         <a:p>
           <a:r>
-            <a:rPr lang="ja-JP" altLang="en-US" sz="4800" dirty="0"/>
-            <a:t>福岡の夜景を整理し、</a:t>
-          </a:r>
-          <a:endParaRPr lang="en-US" altLang="ja-JP" sz="4800" dirty="0"/>
-        </a:p>
-        <a:p>
-          <a:r>
             <a:rPr lang="ja-JP" sz="4800" dirty="0"/>
-            <a:t>観光</a:t>
+            <a:t>福岡県の夜景スポットを</a:t>
           </a:r>
           <a:r>
-            <a:rPr lang="ja-JP" altLang="en-US" sz="4800" dirty="0"/>
-            <a:t>・</a:t>
+            <a:rPr lang="en-US" altLang="ja-JP" sz="4800" dirty="0"/>
+            <a:t>    </a:t>
           </a:r>
           <a:r>
             <a:rPr lang="ja-JP" sz="4800" dirty="0"/>
-            <a:t>ドライブで使</a:t>
+            <a:t>エリアごとに紹介し、観光やドライブ、デートなどで訪れるきっかけとなる</a:t>
           </a:r>
           <a:r>
-            <a:rPr lang="ja-JP" altLang="en-US" sz="4800" dirty="0"/>
-            <a:t>える</a:t>
+            <a:rPr lang="en-US" altLang="ja-JP" sz="4800" dirty="0"/>
+            <a:t>	  </a:t>
           </a:r>
           <a:r>
             <a:rPr lang="ja-JP" sz="4800" dirty="0"/>
-            <a:t>情報サイトを目指す</a:t>
+            <a:t>Webサイトを制作することを目的としています。</a:t>
           </a:r>
           <a:endParaRPr lang="en-US" sz="4800" dirty="0"/>
         </a:p>
@@ -4907,7 +4901,7 @@
       <dgm:spPr/>
     </dgm:pt>
     <dgm:pt modelId="{C0F6B9BB-A39E-4A6E-A407-173B59A17A04}" type="pres">
-      <dgm:prSet presAssocID="{32D0AF28-D0FA-4F65-B2F7-23AAEEEE0F94}" presName="rootText" presStyleLbl="node1" presStyleIdx="0" presStyleCnt="1"/>
+      <dgm:prSet presAssocID="{32D0AF28-D0FA-4F65-B2F7-23AAEEEE0F94}" presName="rootText" presStyleLbl="node1" presStyleIdx="0" presStyleCnt="1" custScaleX="100196" custScaleY="146574"/>
       <dgm:spPr/>
     </dgm:pt>
     <dgm:pt modelId="{31C5EF23-1F2D-491E-9123-C2BC704F9FCD}" type="pres">
@@ -5467,9 +5461,20 @@
         <a:bodyPr/>
         <a:lstStyle/>
         <a:p>
+          <a:pPr>
+            <a:buNone/>
+          </a:pPr>
           <a:r>
-            <a:rPr kumimoji="1" lang="ja-JP" dirty="0"/>
-            <a:t>13kg減量した経験をもとに構成 </a:t>
+            <a:rPr lang="ja-JP" dirty="0"/>
+            <a:t>健康的な体になりたい</a:t>
+          </a:r>
+          <a:r>
+            <a:rPr lang="ja-JP" altLang="en-US" dirty="0"/>
+            <a:t>・</a:t>
+          </a:r>
+          <a:r>
+            <a:rPr lang="ja-JP" dirty="0"/>
+            <a:t>かっこよくなりたい・モテたいと思っている人に向けて、減量や筋力トレーニングの方法を分かりやすく紹介し、一歩踏み出すきっかけを提供することを目的としています。</a:t>
           </a:r>
           <a:endParaRPr lang="en-US" dirty="0"/>
         </a:p>
@@ -5497,80 +5502,6 @@
         </a:p>
       </dgm:t>
     </dgm:pt>
-    <dgm:pt modelId="{32D0AF28-D0FA-4F65-B2F7-23AAEEEE0F94}">
-      <dgm:prSet/>
-      <dgm:spPr/>
-      <dgm:t>
-        <a:bodyPr/>
-        <a:lstStyle/>
-        <a:p>
-          <a:r>
-            <a:rPr kumimoji="1" lang="ja-JP" dirty="0"/>
-            <a:t>食事・運動・生活習慣を紹介 </a:t>
-          </a:r>
-          <a:endParaRPr lang="en-US" dirty="0"/>
-        </a:p>
-      </dgm:t>
-    </dgm:pt>
-    <dgm:pt modelId="{4B84B4DB-380C-4981-A74E-F50124B68B1F}" type="parTrans" cxnId="{DB6B11AB-7A3D-4C5F-9973-C80F8319E836}">
-      <dgm:prSet/>
-      <dgm:spPr/>
-      <dgm:t>
-        <a:bodyPr/>
-        <a:lstStyle/>
-        <a:p>
-          <a:endParaRPr lang="en-US"/>
-        </a:p>
-      </dgm:t>
-    </dgm:pt>
-    <dgm:pt modelId="{8A3CF4E5-3706-415E-9D31-BFE21C2F1426}" type="sibTrans" cxnId="{DB6B11AB-7A3D-4C5F-9973-C80F8319E836}">
-      <dgm:prSet/>
-      <dgm:spPr/>
-      <dgm:t>
-        <a:bodyPr/>
-        <a:lstStyle/>
-        <a:p>
-          <a:endParaRPr lang="en-US"/>
-        </a:p>
-      </dgm:t>
-    </dgm:pt>
-    <dgm:pt modelId="{8E4530D3-8653-4CBB-B4E3-550BF0D8D9EF}">
-      <dgm:prSet/>
-      <dgm:spPr/>
-      <dgm:t>
-        <a:bodyPr/>
-        <a:lstStyle/>
-        <a:p>
-          <a:r>
-            <a:rPr kumimoji="1" lang="ja-JP" dirty="0"/>
-            <a:t>初心者でも真似できる内容にする </a:t>
-          </a:r>
-          <a:endParaRPr lang="en-US" dirty="0"/>
-        </a:p>
-      </dgm:t>
-    </dgm:pt>
-    <dgm:pt modelId="{D8187686-73C9-4CE8-8C2E-8D4C627E93BE}" type="parTrans" cxnId="{4CF6FBEE-4E02-4813-8CA8-5C23BCD79343}">
-      <dgm:prSet/>
-      <dgm:spPr/>
-      <dgm:t>
-        <a:bodyPr/>
-        <a:lstStyle/>
-        <a:p>
-          <a:endParaRPr lang="en-US"/>
-        </a:p>
-      </dgm:t>
-    </dgm:pt>
-    <dgm:pt modelId="{2838EEA9-E7A5-4831-927A-A4C8DBEC77F1}" type="sibTrans" cxnId="{4CF6FBEE-4E02-4813-8CA8-5C23BCD79343}">
-      <dgm:prSet/>
-      <dgm:spPr/>
-      <dgm:t>
-        <a:bodyPr/>
-        <a:lstStyle/>
-        <a:p>
-          <a:endParaRPr lang="en-US"/>
-        </a:p>
-      </dgm:t>
-    </dgm:pt>
     <dgm:pt modelId="{59E3FFAE-0611-4528-AEAC-2D1EC6079493}" type="pres">
       <dgm:prSet presAssocID="{BF36AB4D-68B9-48A2-8150-4DDA94F9E141}" presName="linear" presStyleCnt="0">
         <dgm:presLayoutVars>
@@ -5581,33 +5512,7 @@
       <dgm:spPr/>
     </dgm:pt>
     <dgm:pt modelId="{23AD429A-2CA8-43A8-B86C-C0E0C4C63593}" type="pres">
-      <dgm:prSet presAssocID="{70835F68-70E5-40F9-9269-66989606866E}" presName="parentText" presStyleLbl="node1" presStyleIdx="0" presStyleCnt="3">
-        <dgm:presLayoutVars>
-          <dgm:chMax val="0"/>
-          <dgm:bulletEnabled val="1"/>
-        </dgm:presLayoutVars>
-      </dgm:prSet>
-      <dgm:spPr/>
-    </dgm:pt>
-    <dgm:pt modelId="{93B7F09B-3C7F-472A-BF1D-72BE8197C4DB}" type="pres">
-      <dgm:prSet presAssocID="{C9E9004A-C84D-476D-99CE-F3912DD8F096}" presName="spacer" presStyleCnt="0"/>
-      <dgm:spPr/>
-    </dgm:pt>
-    <dgm:pt modelId="{2A6F186D-70E5-460D-AB72-DBDFED6C7F62}" type="pres">
-      <dgm:prSet presAssocID="{32D0AF28-D0FA-4F65-B2F7-23AAEEEE0F94}" presName="parentText" presStyleLbl="node1" presStyleIdx="1" presStyleCnt="3">
-        <dgm:presLayoutVars>
-          <dgm:chMax val="0"/>
-          <dgm:bulletEnabled val="1"/>
-        </dgm:presLayoutVars>
-      </dgm:prSet>
-      <dgm:spPr/>
-    </dgm:pt>
-    <dgm:pt modelId="{341E1828-20B9-4F6F-8DB1-5141D1C23354}" type="pres">
-      <dgm:prSet presAssocID="{8A3CF4E5-3706-415E-9D31-BFE21C2F1426}" presName="spacer" presStyleCnt="0"/>
-      <dgm:spPr/>
-    </dgm:pt>
-    <dgm:pt modelId="{F23E8ED6-D8CC-45B1-829B-28A75C22DF82}" type="pres">
-      <dgm:prSet presAssocID="{8E4530D3-8653-4CBB-B4E3-550BF0D8D9EF}" presName="parentText" presStyleLbl="node1" presStyleIdx="2" presStyleCnt="3">
+      <dgm:prSet presAssocID="{70835F68-70E5-40F9-9269-66989606866E}" presName="parentText" presStyleLbl="node1" presStyleIdx="0" presStyleCnt="1">
         <dgm:presLayoutVars>
           <dgm:chMax val="0"/>
           <dgm:bulletEnabled val="1"/>
@@ -5617,18 +5522,10 @@
     </dgm:pt>
   </dgm:ptLst>
   <dgm:cxnLst>
-    <dgm:cxn modelId="{76227C5D-FB3C-4F5C-8FB6-A95B14078291}" type="presOf" srcId="{32D0AF28-D0FA-4F65-B2F7-23AAEEEE0F94}" destId="{2A6F186D-70E5-460D-AB72-DBDFED6C7F62}" srcOrd="0" destOrd="0" presId="urn:microsoft.com/office/officeart/2005/8/layout/vList2"/>
-    <dgm:cxn modelId="{467E2654-C68D-4EB7-9AA2-EB984F84FD49}" type="presOf" srcId="{8E4530D3-8653-4CBB-B4E3-550BF0D8D9EF}" destId="{F23E8ED6-D8CC-45B1-829B-28A75C22DF82}" srcOrd="0" destOrd="0" presId="urn:microsoft.com/office/officeart/2005/8/layout/vList2"/>
     <dgm:cxn modelId="{0B4FAD78-FC92-4C7B-8A4F-E52D208D4D51}" srcId="{BF36AB4D-68B9-48A2-8150-4DDA94F9E141}" destId="{70835F68-70E5-40F9-9269-66989606866E}" srcOrd="0" destOrd="0" parTransId="{2E6F0A49-6E29-44FE-B2EB-9CA86E66B24C}" sibTransId="{C9E9004A-C84D-476D-99CE-F3912DD8F096}"/>
     <dgm:cxn modelId="{7850E3AA-2F77-4CA9-BA41-9D0DD7F799F7}" type="presOf" srcId="{70835F68-70E5-40F9-9269-66989606866E}" destId="{23AD429A-2CA8-43A8-B86C-C0E0C4C63593}" srcOrd="0" destOrd="0" presId="urn:microsoft.com/office/officeart/2005/8/layout/vList2"/>
-    <dgm:cxn modelId="{DB6B11AB-7A3D-4C5F-9973-C80F8319E836}" srcId="{BF36AB4D-68B9-48A2-8150-4DDA94F9E141}" destId="{32D0AF28-D0FA-4F65-B2F7-23AAEEEE0F94}" srcOrd="1" destOrd="0" parTransId="{4B84B4DB-380C-4981-A74E-F50124B68B1F}" sibTransId="{8A3CF4E5-3706-415E-9D31-BFE21C2F1426}"/>
     <dgm:cxn modelId="{8A434EC4-F8ED-4457-A3CE-612196B426FF}" type="presOf" srcId="{BF36AB4D-68B9-48A2-8150-4DDA94F9E141}" destId="{59E3FFAE-0611-4528-AEAC-2D1EC6079493}" srcOrd="0" destOrd="0" presId="urn:microsoft.com/office/officeart/2005/8/layout/vList2"/>
-    <dgm:cxn modelId="{4CF6FBEE-4E02-4813-8CA8-5C23BCD79343}" srcId="{BF36AB4D-68B9-48A2-8150-4DDA94F9E141}" destId="{8E4530D3-8653-4CBB-B4E3-550BF0D8D9EF}" srcOrd="2" destOrd="0" parTransId="{D8187686-73C9-4CE8-8C2E-8D4C627E93BE}" sibTransId="{2838EEA9-E7A5-4831-927A-A4C8DBEC77F1}"/>
     <dgm:cxn modelId="{A8E2A606-5109-446C-9ED0-A264D7CB7C87}" type="presParOf" srcId="{59E3FFAE-0611-4528-AEAC-2D1EC6079493}" destId="{23AD429A-2CA8-43A8-B86C-C0E0C4C63593}" srcOrd="0" destOrd="0" presId="urn:microsoft.com/office/officeart/2005/8/layout/vList2"/>
-    <dgm:cxn modelId="{935043A9-DFBF-40E2-B5FE-72B0E4788DCA}" type="presParOf" srcId="{59E3FFAE-0611-4528-AEAC-2D1EC6079493}" destId="{93B7F09B-3C7F-472A-BF1D-72BE8197C4DB}" srcOrd="1" destOrd="0" presId="urn:microsoft.com/office/officeart/2005/8/layout/vList2"/>
-    <dgm:cxn modelId="{A0A44388-6736-43B7-8B80-C57BDD87009A}" type="presParOf" srcId="{59E3FFAE-0611-4528-AEAC-2D1EC6079493}" destId="{2A6F186D-70E5-460D-AB72-DBDFED6C7F62}" srcOrd="2" destOrd="0" presId="urn:microsoft.com/office/officeart/2005/8/layout/vList2"/>
-    <dgm:cxn modelId="{2CFF8EBA-F1F5-44DD-9BA9-0BA67B511B61}" type="presParOf" srcId="{59E3FFAE-0611-4528-AEAC-2D1EC6079493}" destId="{341E1828-20B9-4F6F-8DB1-5141D1C23354}" srcOrd="3" destOrd="0" presId="urn:microsoft.com/office/officeart/2005/8/layout/vList2"/>
-    <dgm:cxn modelId="{22BAAD89-B7FA-4FD6-BDB8-D4E2C53BE5A9}" type="presParOf" srcId="{59E3FFAE-0611-4528-AEAC-2D1EC6079493}" destId="{F23E8ED6-D8CC-45B1-829B-28A75C22DF82}" srcOrd="4" destOrd="0" presId="urn:microsoft.com/office/officeart/2005/8/layout/vList2"/>
   </dgm:cxnLst>
   <dgm:bg/>
   <dgm:whole/>
@@ -6166,8 +6063,8 @@
       </dsp:nvSpPr>
       <dsp:spPr>
         <a:xfrm>
-          <a:off x="0" y="543231"/>
-          <a:ext cx="7522890" cy="3761445"/>
+          <a:off x="3982" y="2917"/>
+          <a:ext cx="8158466" cy="5967399"/>
         </a:xfrm>
         <a:prstGeom prst="roundRect">
           <a:avLst>
@@ -6229,50 +6126,31 @@
             <a:buNone/>
           </a:pPr>
           <a:r>
-            <a:rPr lang="ja-JP" altLang="en-US" sz="4800" kern="1200" dirty="0"/>
-            <a:t>福岡の夜景を整理し、</a:t>
-          </a:r>
-          <a:endParaRPr lang="en-US" altLang="ja-JP" sz="4800" kern="1200" dirty="0"/>
-        </a:p>
-        <a:p>
-          <a:pPr marL="0" lvl="0" indent="0" algn="ctr" defTabSz="2133600">
-            <a:lnSpc>
-              <a:spcPct val="90000"/>
-            </a:lnSpc>
-            <a:spcBef>
-              <a:spcPct val="0"/>
-            </a:spcBef>
-            <a:spcAft>
-              <a:spcPct val="35000"/>
-            </a:spcAft>
-            <a:buNone/>
-          </a:pPr>
-          <a:r>
             <a:rPr lang="ja-JP" sz="4800" kern="1200" dirty="0"/>
-            <a:t>観光</a:t>
+            <a:t>福岡県の夜景スポットを</a:t>
           </a:r>
           <a:r>
-            <a:rPr lang="ja-JP" altLang="en-US" sz="4800" kern="1200" dirty="0"/>
-            <a:t>・</a:t>
+            <a:rPr lang="en-US" altLang="ja-JP" sz="4800" kern="1200" dirty="0"/>
+            <a:t>    </a:t>
           </a:r>
           <a:r>
             <a:rPr lang="ja-JP" sz="4800" kern="1200" dirty="0"/>
-            <a:t>ドライブで使</a:t>
+            <a:t>エリアごとに紹介し、観光やドライブ、デートなどで訪れるきっかけとなる</a:t>
           </a:r>
           <a:r>
-            <a:rPr lang="ja-JP" altLang="en-US" sz="4800" kern="1200" dirty="0"/>
-            <a:t>える</a:t>
+            <a:rPr lang="en-US" altLang="ja-JP" sz="4800" kern="1200" dirty="0"/>
+            <a:t>	  </a:t>
           </a:r>
           <a:r>
             <a:rPr lang="ja-JP" sz="4800" kern="1200" dirty="0"/>
-            <a:t>情報サイトを目指す</a:t>
+            <a:t>Webサイトを制作することを目的としています。</a:t>
           </a:r>
           <a:endParaRPr lang="en-US" sz="4800" kern="1200" dirty="0"/>
         </a:p>
       </dsp:txBody>
       <dsp:txXfrm>
-        <a:off x="110169" y="653400"/>
-        <a:ext cx="7302552" cy="3541107"/>
+        <a:off x="178761" y="177696"/>
+        <a:ext cx="7808908" cy="5617841"/>
       </dsp:txXfrm>
     </dsp:sp>
   </dsp:spTree>
@@ -6957,8 +6835,8 @@
       </dsp:nvSpPr>
       <dsp:spPr>
         <a:xfrm>
-          <a:off x="0" y="629084"/>
-          <a:ext cx="7522890" cy="1125540"/>
+          <a:off x="0" y="276693"/>
+          <a:ext cx="8187268" cy="5246280"/>
         </a:xfrm>
         <a:prstGeom prst="roundRect">
           <a:avLst/>
@@ -7000,12 +6878,12 @@
         </a:fontRef>
       </dsp:style>
       <dsp:txBody>
-        <a:bodyPr spcFirstLastPara="0" vert="horz" wrap="square" lIns="140970" tIns="140970" rIns="140970" bIns="140970" numCol="1" spcCol="1270" anchor="ctr" anchorCtr="0">
+        <a:bodyPr spcFirstLastPara="0" vert="horz" wrap="square" lIns="144780" tIns="144780" rIns="144780" bIns="144780" numCol="1" spcCol="1270" anchor="ctr" anchorCtr="0">
           <a:noAutofit/>
         </a:bodyPr>
         <a:lstStyle/>
         <a:p>
-          <a:pPr marL="0" lvl="0" indent="0" algn="l" defTabSz="1644650">
+          <a:pPr marL="0" lvl="0" indent="0" algn="l" defTabSz="1689100">
             <a:lnSpc>
               <a:spcPct val="90000"/>
             </a:lnSpc>
@@ -7018,173 +6896,23 @@
             <a:buNone/>
           </a:pPr>
           <a:r>
-            <a:rPr kumimoji="1" lang="ja-JP" sz="3700" kern="1200" dirty="0"/>
-            <a:t>13kg減量した経験をもとに構成 </a:t>
+            <a:rPr lang="ja-JP" sz="3800" kern="1200" dirty="0"/>
+            <a:t>健康的な体になりたい</a:t>
           </a:r>
-          <a:endParaRPr lang="en-US" sz="3700" kern="1200" dirty="0"/>
+          <a:r>
+            <a:rPr lang="ja-JP" altLang="en-US" sz="3800" kern="1200" dirty="0"/>
+            <a:t>・</a:t>
+          </a:r>
+          <a:r>
+            <a:rPr lang="ja-JP" sz="3800" kern="1200" dirty="0"/>
+            <a:t>かっこよくなりたい・モテたいと思っている人に向けて、減量や筋力トレーニングの方法を分かりやすく紹介し、一歩踏み出すきっかけを提供することを目的としています。</a:t>
+          </a:r>
+          <a:endParaRPr lang="en-US" sz="3800" kern="1200" dirty="0"/>
         </a:p>
       </dsp:txBody>
       <dsp:txXfrm>
-        <a:off x="54944" y="684028"/>
-        <a:ext cx="7413002" cy="1015652"/>
-      </dsp:txXfrm>
-    </dsp:sp>
-    <dsp:sp modelId="{2A6F186D-70E5-460D-AB72-DBDFED6C7F62}">
-      <dsp:nvSpPr>
-        <dsp:cNvPr id="0" name=""/>
-        <dsp:cNvSpPr/>
-      </dsp:nvSpPr>
-      <dsp:spPr>
-        <a:xfrm>
-          <a:off x="0" y="1861184"/>
-          <a:ext cx="7522890" cy="1125540"/>
-        </a:xfrm>
-        <a:prstGeom prst="roundRect">
-          <a:avLst/>
-        </a:prstGeom>
-        <a:solidFill>
-          <a:schemeClr val="accent5">
-            <a:hueOff val="-3379271"/>
-            <a:satOff val="-8710"/>
-            <a:lumOff val="-5883"/>
-            <a:alphaOff val="0"/>
-          </a:schemeClr>
-        </a:solidFill>
-        <a:ln w="12700" cap="flat" cmpd="sng" algn="ctr">
-          <a:solidFill>
-            <a:schemeClr val="lt1">
-              <a:hueOff val="0"/>
-              <a:satOff val="0"/>
-              <a:lumOff val="0"/>
-              <a:alphaOff val="0"/>
-            </a:schemeClr>
-          </a:solidFill>
-          <a:prstDash val="solid"/>
-          <a:miter lim="800000"/>
-        </a:ln>
-        <a:effectLst/>
-      </dsp:spPr>
-      <dsp:style>
-        <a:lnRef idx="2">
-          <a:scrgbClr r="0" g="0" b="0"/>
-        </a:lnRef>
-        <a:fillRef idx="1">
-          <a:scrgbClr r="0" g="0" b="0"/>
-        </a:fillRef>
-        <a:effectRef idx="0">
-          <a:scrgbClr r="0" g="0" b="0"/>
-        </a:effectRef>
-        <a:fontRef idx="minor">
-          <a:schemeClr val="lt1"/>
-        </a:fontRef>
-      </dsp:style>
-      <dsp:txBody>
-        <a:bodyPr spcFirstLastPara="0" vert="horz" wrap="square" lIns="140970" tIns="140970" rIns="140970" bIns="140970" numCol="1" spcCol="1270" anchor="ctr" anchorCtr="0">
-          <a:noAutofit/>
-        </a:bodyPr>
-        <a:lstStyle/>
-        <a:p>
-          <a:pPr marL="0" lvl="0" indent="0" algn="l" defTabSz="1644650">
-            <a:lnSpc>
-              <a:spcPct val="90000"/>
-            </a:lnSpc>
-            <a:spcBef>
-              <a:spcPct val="0"/>
-            </a:spcBef>
-            <a:spcAft>
-              <a:spcPct val="35000"/>
-            </a:spcAft>
-            <a:buNone/>
-          </a:pPr>
-          <a:r>
-            <a:rPr kumimoji="1" lang="ja-JP" sz="3700" kern="1200" dirty="0"/>
-            <a:t>食事・運動・生活習慣を紹介 </a:t>
-          </a:r>
-          <a:endParaRPr lang="en-US" sz="3700" kern="1200" dirty="0"/>
-        </a:p>
-      </dsp:txBody>
-      <dsp:txXfrm>
-        <a:off x="54944" y="1916128"/>
-        <a:ext cx="7413002" cy="1015652"/>
-      </dsp:txXfrm>
-    </dsp:sp>
-    <dsp:sp modelId="{F23E8ED6-D8CC-45B1-829B-28A75C22DF82}">
-      <dsp:nvSpPr>
-        <dsp:cNvPr id="0" name=""/>
-        <dsp:cNvSpPr/>
-      </dsp:nvSpPr>
-      <dsp:spPr>
-        <a:xfrm>
-          <a:off x="0" y="3093284"/>
-          <a:ext cx="7522890" cy="1125540"/>
-        </a:xfrm>
-        <a:prstGeom prst="roundRect">
-          <a:avLst/>
-        </a:prstGeom>
-        <a:solidFill>
-          <a:schemeClr val="accent5">
-            <a:hueOff val="-6758543"/>
-            <a:satOff val="-17419"/>
-            <a:lumOff val="-11765"/>
-            <a:alphaOff val="0"/>
-          </a:schemeClr>
-        </a:solidFill>
-        <a:ln w="12700" cap="flat" cmpd="sng" algn="ctr">
-          <a:solidFill>
-            <a:schemeClr val="lt1">
-              <a:hueOff val="0"/>
-              <a:satOff val="0"/>
-              <a:lumOff val="0"/>
-              <a:alphaOff val="0"/>
-            </a:schemeClr>
-          </a:solidFill>
-          <a:prstDash val="solid"/>
-          <a:miter lim="800000"/>
-        </a:ln>
-        <a:effectLst/>
-      </dsp:spPr>
-      <dsp:style>
-        <a:lnRef idx="2">
-          <a:scrgbClr r="0" g="0" b="0"/>
-        </a:lnRef>
-        <a:fillRef idx="1">
-          <a:scrgbClr r="0" g="0" b="0"/>
-        </a:fillRef>
-        <a:effectRef idx="0">
-          <a:scrgbClr r="0" g="0" b="0"/>
-        </a:effectRef>
-        <a:fontRef idx="minor">
-          <a:schemeClr val="lt1"/>
-        </a:fontRef>
-      </dsp:style>
-      <dsp:txBody>
-        <a:bodyPr spcFirstLastPara="0" vert="horz" wrap="square" lIns="140970" tIns="140970" rIns="140970" bIns="140970" numCol="1" spcCol="1270" anchor="ctr" anchorCtr="0">
-          <a:noAutofit/>
-        </a:bodyPr>
-        <a:lstStyle/>
-        <a:p>
-          <a:pPr marL="0" lvl="0" indent="0" algn="l" defTabSz="1644650">
-            <a:lnSpc>
-              <a:spcPct val="90000"/>
-            </a:lnSpc>
-            <a:spcBef>
-              <a:spcPct val="0"/>
-            </a:spcBef>
-            <a:spcAft>
-              <a:spcPct val="35000"/>
-            </a:spcAft>
-            <a:buNone/>
-          </a:pPr>
-          <a:r>
-            <a:rPr kumimoji="1" lang="ja-JP" sz="3700" kern="1200" dirty="0"/>
-            <a:t>初心者でも真似できる内容にする </a:t>
-          </a:r>
-          <a:endParaRPr lang="en-US" sz="3700" kern="1200" dirty="0"/>
-        </a:p>
-      </dsp:txBody>
-      <dsp:txXfrm>
-        <a:off x="54944" y="3148228"/>
-        <a:ext cx="7413002" cy="1015652"/>
+        <a:off x="256102" y="532795"/>
+        <a:ext cx="7675064" cy="4734076"/>
       </dsp:txXfrm>
     </dsp:sp>
   </dsp:spTree>
@@ -15336,7 +15064,7 @@
           <a:p>
             <a:fld id="{96184D05-BF12-4806-9DA3-587B7D57B7E5}" type="datetimeFigureOut">
               <a:rPr kumimoji="1" lang="ja-JP" altLang="en-US" smtClean="0"/>
-              <a:t>2026/6/30</a:t>
+              <a:t>2026/7/2</a:t>
             </a:fld>
             <a:endParaRPr kumimoji="1" lang="ja-JP" altLang="en-US"/>
           </a:p>
@@ -15538,7 +15266,7 @@
           <a:p>
             <a:fld id="{96184D05-BF12-4806-9DA3-587B7D57B7E5}" type="datetimeFigureOut">
               <a:rPr kumimoji="1" lang="ja-JP" altLang="en-US" smtClean="0"/>
-              <a:t>2026/6/30</a:t>
+              <a:t>2026/7/2</a:t>
             </a:fld>
             <a:endParaRPr kumimoji="1" lang="ja-JP" altLang="en-US"/>
           </a:p>
@@ -15750,7 +15478,7 @@
           <a:p>
             <a:fld id="{96184D05-BF12-4806-9DA3-587B7D57B7E5}" type="datetimeFigureOut">
               <a:rPr kumimoji="1" lang="ja-JP" altLang="en-US" smtClean="0"/>
-              <a:t>2026/6/30</a:t>
+              <a:t>2026/7/2</a:t>
             </a:fld>
             <a:endParaRPr kumimoji="1" lang="ja-JP" altLang="en-US"/>
           </a:p>
@@ -15952,7 +15680,7 @@
           <a:p>
             <a:fld id="{96184D05-BF12-4806-9DA3-587B7D57B7E5}" type="datetimeFigureOut">
               <a:rPr kumimoji="1" lang="ja-JP" altLang="en-US" smtClean="0"/>
-              <a:t>2026/6/30</a:t>
+              <a:t>2026/7/2</a:t>
             </a:fld>
             <a:endParaRPr kumimoji="1" lang="ja-JP" altLang="en-US"/>
           </a:p>
@@ -16198,7 +15926,7 @@
           <a:p>
             <a:fld id="{96184D05-BF12-4806-9DA3-587B7D57B7E5}" type="datetimeFigureOut">
               <a:rPr kumimoji="1" lang="ja-JP" altLang="en-US" smtClean="0"/>
-              <a:t>2026/6/30</a:t>
+              <a:t>2026/7/2</a:t>
             </a:fld>
             <a:endParaRPr kumimoji="1" lang="ja-JP" altLang="en-US"/>
           </a:p>
@@ -16494,7 +16222,7 @@
           <a:p>
             <a:fld id="{96184D05-BF12-4806-9DA3-587B7D57B7E5}" type="datetimeFigureOut">
               <a:rPr kumimoji="1" lang="ja-JP" altLang="en-US" smtClean="0"/>
-              <a:t>2026/6/30</a:t>
+              <a:t>2026/7/2</a:t>
             </a:fld>
             <a:endParaRPr kumimoji="1" lang="ja-JP" altLang="en-US"/>
           </a:p>
@@ -16925,7 +16653,7 @@
           <a:p>
             <a:fld id="{96184D05-BF12-4806-9DA3-587B7D57B7E5}" type="datetimeFigureOut">
               <a:rPr kumimoji="1" lang="ja-JP" altLang="en-US" smtClean="0"/>
-              <a:t>2026/6/30</a:t>
+              <a:t>2026/7/2</a:t>
             </a:fld>
             <a:endParaRPr kumimoji="1" lang="ja-JP" altLang="en-US"/>
           </a:p>
@@ -17043,7 +16771,7 @@
           <a:p>
             <a:fld id="{96184D05-BF12-4806-9DA3-587B7D57B7E5}" type="datetimeFigureOut">
               <a:rPr kumimoji="1" lang="ja-JP" altLang="en-US" smtClean="0"/>
-              <a:t>2026/6/30</a:t>
+              <a:t>2026/7/2</a:t>
             </a:fld>
             <a:endParaRPr kumimoji="1" lang="ja-JP" altLang="en-US"/>
           </a:p>
@@ -17138,7 +16866,7 @@
           <a:p>
             <a:fld id="{96184D05-BF12-4806-9DA3-587B7D57B7E5}" type="datetimeFigureOut">
               <a:rPr kumimoji="1" lang="ja-JP" altLang="en-US" smtClean="0"/>
-              <a:t>2026/6/30</a:t>
+              <a:t>2026/7/2</a:t>
             </a:fld>
             <a:endParaRPr kumimoji="1" lang="ja-JP" altLang="en-US"/>
           </a:p>
@@ -17447,7 +17175,7 @@
           <a:p>
             <a:fld id="{96184D05-BF12-4806-9DA3-587B7D57B7E5}" type="datetimeFigureOut">
               <a:rPr kumimoji="1" lang="ja-JP" altLang="en-US" smtClean="0"/>
-              <a:t>2026/6/30</a:t>
+              <a:t>2026/7/2</a:t>
             </a:fld>
             <a:endParaRPr kumimoji="1" lang="ja-JP" altLang="en-US"/>
           </a:p>
@@ -17704,7 +17432,7 @@
           <a:p>
             <a:fld id="{96184D05-BF12-4806-9DA3-587B7D57B7E5}" type="datetimeFigureOut">
               <a:rPr kumimoji="1" lang="ja-JP" altLang="en-US" smtClean="0"/>
-              <a:t>2026/6/30</a:t>
+              <a:t>2026/7/2</a:t>
             </a:fld>
             <a:endParaRPr kumimoji="1" lang="ja-JP" altLang="en-US"/>
           </a:p>
@@ -17949,7 +17677,7 @@
           <a:p>
             <a:fld id="{96184D05-BF12-4806-9DA3-587B7D57B7E5}" type="datetimeFigureOut">
               <a:rPr kumimoji="1" lang="ja-JP" altLang="en-US" smtClean="0"/>
-              <a:t>2026/6/30</a:t>
+              <a:t>2026/7/2</a:t>
             </a:fld>
             <a:endParaRPr kumimoji="1" lang="ja-JP" altLang="en-US"/>
           </a:p>
@@ -19546,6 +19274,838 @@
 </p:sld>
 </file>
 
+<file path=ppt/slides/slide10.xml><?xml version="1.0" encoding="utf-8"?>
+<p:sld xmlns:a="http://schemas.openxmlformats.org/drawingml/2006/main" xmlns:r="http://schemas.openxmlformats.org/officeDocument/2006/relationships" xmlns:p="http://schemas.openxmlformats.org/presentationml/2006/main">
+  <p:cSld>
+    <p:bg>
+      <p:bgPr>
+        <a:solidFill>
+          <a:schemeClr val="bg1"/>
+        </a:solidFill>
+        <a:effectLst/>
+      </p:bgPr>
+    </p:bg>
+    <p:spTree>
+      <p:nvGrpSpPr>
+        <p:cNvPr id="1" name=""/>
+        <p:cNvGrpSpPr/>
+        <p:nvPr/>
+      </p:nvGrpSpPr>
+      <p:grpSpPr>
+        <a:xfrm>
+          <a:off x="0" y="0"/>
+          <a:ext cx="0" cy="0"/>
+          <a:chOff x="0" y="0"/>
+          <a:chExt cx="0" cy="0"/>
+        </a:xfrm>
+      </p:grpSpPr>
+      <p:sp>
+        <p:nvSpPr>
+          <p:cNvPr id="7" name="テキスト ボックス 6">
+            <a:extLst>
+              <a:ext uri="{FF2B5EF4-FFF2-40B4-BE49-F238E27FC236}">
+                <a16:creationId xmlns:a16="http://schemas.microsoft.com/office/drawing/2014/main" id="{13D5B6F3-B625-AAD2-F088-0CAFF6774D42}"/>
+              </a:ext>
+            </a:extLst>
+          </p:cNvPr>
+          <p:cNvSpPr txBox="1"/>
+          <p:nvPr/>
+        </p:nvSpPr>
+        <p:spPr>
+          <a:xfrm>
+            <a:off x="719666" y="423333"/>
+            <a:ext cx="4470401" cy="461665"/>
+          </a:xfrm>
+          <a:prstGeom prst="rect">
+            <a:avLst/>
+          </a:prstGeom>
+        </p:spPr>
+        <p:txBody>
+          <a:bodyPr vert="horz" lIns="91440" tIns="45720" rIns="91440" bIns="45720" rtlCol="0" anchor="t">
+            <a:noAutofit/>
+          </a:bodyPr>
+          <a:lstStyle/>
+          <a:p>
+            <a:pPr indent="-228600" defTabSz="914400">
+              <a:lnSpc>
+                <a:spcPct val="90000"/>
+              </a:lnSpc>
+              <a:spcAft>
+                <a:spcPts val="600"/>
+              </a:spcAft>
+              <a:buFont typeface="Arial" panose="020B0604020202020204" pitchFamily="34" charset="0"/>
+              <a:buChar char="•"/>
+            </a:pPr>
+            <a:r>
+              <a:rPr lang="ja-JP" altLang="en-US" sz="3200" b="1" dirty="0"/>
+              <a:t>今後の流れ</a:t>
+            </a:r>
+          </a:p>
+        </p:txBody>
+      </p:sp>
+      <p:grpSp>
+        <p:nvGrpSpPr>
+          <p:cNvPr id="22" name="Group 18">
+            <a:extLst>
+              <a:ext uri="{FF2B5EF4-FFF2-40B4-BE49-F238E27FC236}">
+                <a16:creationId xmlns:a16="http://schemas.microsoft.com/office/drawing/2014/main" id="{16C73AF9-0D33-5C66-5D79-0D0129904B31}"/>
+              </a:ext>
+              <a:ext uri="{C183D7F6-B498-43B3-948B-1728B52AA6E4}">
+                <adec:decorative xmlns:adec="http://schemas.microsoft.com/office/drawing/2017/decorative" val="1"/>
+              </a:ext>
+            </a:extLst>
+          </p:cNvPr>
+          <p:cNvGrpSpPr>
+            <a:grpSpLocks noGrp="1" noUngrp="1" noRot="1" noChangeAspect="1" noMove="1" noResize="1"/>
+          </p:cNvGrpSpPr>
+          <p:nvPr>
+            <p:extLst>
+              <p:ext uri="{386F3935-93C4-4BCD-93E2-E3B085C9AB24}">
+                <p16:designElem xmlns:p16="http://schemas.microsoft.com/office/powerpoint/2015/main" val="1"/>
+              </p:ext>
+            </p:extLst>
+          </p:nvPr>
+        </p:nvGrpSpPr>
+        <p:grpSpPr>
+          <a:xfrm>
+            <a:off x="-5025" y="6737718"/>
+            <a:ext cx="12207200" cy="123363"/>
+            <a:chOff x="-5025" y="6737718"/>
+            <a:chExt cx="12207200" cy="123363"/>
+          </a:xfrm>
+        </p:grpSpPr>
+        <p:sp>
+          <p:nvSpPr>
+            <p:cNvPr id="20" name="Rectangle 19">
+              <a:extLst>
+                <a:ext uri="{FF2B5EF4-FFF2-40B4-BE49-F238E27FC236}">
+                  <a16:creationId xmlns:a16="http://schemas.microsoft.com/office/drawing/2014/main" id="{ED96FD6F-5EE9-36C7-C200-3111EF6D0152}"/>
+                </a:ext>
+                <a:ext uri="{C183D7F6-B498-43B3-948B-1728B52AA6E4}">
+                  <adec:decorative xmlns:adec="http://schemas.microsoft.com/office/drawing/2017/decorative" val="1"/>
+                </a:ext>
+              </a:extLst>
+            </p:cNvPr>
+            <p:cNvSpPr/>
+            <p:nvPr>
+              <p:extLst>
+                <p:ext uri="{386F3935-93C4-4BCD-93E2-E3B085C9AB24}">
+                  <p16:designElem xmlns:p16="http://schemas.microsoft.com/office/powerpoint/2015/main" val="1"/>
+                </p:ext>
+              </p:extLst>
+            </p:nvPr>
+          </p:nvSpPr>
+          <p:spPr>
+            <a:xfrm rot="5400000" flipH="1">
+              <a:off x="6036894" y="695800"/>
+              <a:ext cx="123362" cy="12207199"/>
+            </a:xfrm>
+            <a:prstGeom prst="rect">
+              <a:avLst/>
+            </a:prstGeom>
+            <a:gradFill>
+              <a:gsLst>
+                <a:gs pos="0">
+                  <a:schemeClr val="accent5"/>
+                </a:gs>
+                <a:gs pos="100000">
+                  <a:schemeClr val="accent2"/>
+                </a:gs>
+              </a:gsLst>
+              <a:lin ang="1800000" scaled="0"/>
+            </a:gradFill>
+            <a:ln>
+              <a:noFill/>
+            </a:ln>
+          </p:spPr>
+          <p:style>
+            <a:lnRef idx="2">
+              <a:schemeClr val="accent1">
+                <a:shade val="50000"/>
+              </a:schemeClr>
+            </a:lnRef>
+            <a:fillRef idx="1">
+              <a:schemeClr val="accent1"/>
+            </a:fillRef>
+            <a:effectRef idx="0">
+              <a:schemeClr val="accent1"/>
+            </a:effectRef>
+            <a:fontRef idx="minor">
+              <a:schemeClr val="lt1"/>
+            </a:fontRef>
+          </p:style>
+          <p:txBody>
+            <a:bodyPr rtlCol="0" anchor="ctr"/>
+            <a:lstStyle/>
+            <a:p>
+              <a:pPr algn="ctr"/>
+              <a:endParaRPr lang="en-US"/>
+            </a:p>
+          </p:txBody>
+        </p:sp>
+        <p:sp>
+          <p:nvSpPr>
+            <p:cNvPr id="21" name="Rectangle 20">
+              <a:extLst>
+                <a:ext uri="{FF2B5EF4-FFF2-40B4-BE49-F238E27FC236}">
+                  <a16:creationId xmlns:a16="http://schemas.microsoft.com/office/drawing/2014/main" id="{62A39BB2-02C1-8A8B-8021-68446E04747F}"/>
+                </a:ext>
+                <a:ext uri="{C183D7F6-B498-43B3-948B-1728B52AA6E4}">
+                  <adec:decorative xmlns:adec="http://schemas.microsoft.com/office/drawing/2017/decorative" val="1"/>
+                </a:ext>
+              </a:extLst>
+            </p:cNvPr>
+            <p:cNvSpPr/>
+            <p:nvPr>
+              <p:extLst>
+                <p:ext uri="{386F3935-93C4-4BCD-93E2-E3B085C9AB24}">
+                  <p16:designElem xmlns:p16="http://schemas.microsoft.com/office/powerpoint/2015/main" val="1"/>
+                </p:ext>
+              </p:extLst>
+            </p:nvPr>
+          </p:nvSpPr>
+          <p:spPr>
+            <a:xfrm rot="16200000">
+              <a:off x="9176406" y="3835311"/>
+              <a:ext cx="123362" cy="5928176"/>
+            </a:xfrm>
+            <a:prstGeom prst="rect">
+              <a:avLst/>
+            </a:prstGeom>
+            <a:gradFill>
+              <a:gsLst>
+                <a:gs pos="19000">
+                  <a:schemeClr val="accent5">
+                    <a:alpha val="0"/>
+                  </a:schemeClr>
+                </a:gs>
+                <a:gs pos="100000">
+                  <a:schemeClr val="accent5">
+                    <a:lumMod val="60000"/>
+                    <a:lumOff val="40000"/>
+                  </a:schemeClr>
+                </a:gs>
+              </a:gsLst>
+              <a:lin ang="600000" scaled="0"/>
+            </a:gradFill>
+            <a:ln>
+              <a:noFill/>
+            </a:ln>
+          </p:spPr>
+          <p:style>
+            <a:lnRef idx="2">
+              <a:schemeClr val="accent1">
+                <a:shade val="50000"/>
+              </a:schemeClr>
+            </a:lnRef>
+            <a:fillRef idx="1">
+              <a:schemeClr val="accent1"/>
+            </a:fillRef>
+            <a:effectRef idx="0">
+              <a:schemeClr val="accent1"/>
+            </a:effectRef>
+            <a:fontRef idx="minor">
+              <a:schemeClr val="lt1"/>
+            </a:fontRef>
+          </p:style>
+          <p:txBody>
+            <a:bodyPr rtlCol="0" anchor="ctr"/>
+            <a:lstStyle/>
+            <a:p>
+              <a:pPr algn="ctr"/>
+              <a:endParaRPr lang="en-US"/>
+            </a:p>
+          </p:txBody>
+        </p:sp>
+      </p:grpSp>
+      <p:sp>
+        <p:nvSpPr>
+          <p:cNvPr id="4" name="テキスト ボックス 3">
+            <a:extLst>
+              <a:ext uri="{FF2B5EF4-FFF2-40B4-BE49-F238E27FC236}">
+                <a16:creationId xmlns:a16="http://schemas.microsoft.com/office/drawing/2014/main" id="{B9874C8A-8FCB-C283-F6C5-E43ADFD50B1F}"/>
+              </a:ext>
+            </a:extLst>
+          </p:cNvPr>
+          <p:cNvSpPr txBox="1"/>
+          <p:nvPr/>
+        </p:nvSpPr>
+        <p:spPr>
+          <a:xfrm>
+            <a:off x="719666" y="423333"/>
+            <a:ext cx="2404533" cy="461665"/>
+          </a:xfrm>
+          <a:prstGeom prst="rect">
+            <a:avLst/>
+          </a:prstGeom>
+          <a:noFill/>
+        </p:spPr>
+        <p:txBody>
+          <a:bodyPr wrap="square" rtlCol="0">
+            <a:spAutoFit/>
+          </a:bodyPr>
+          <a:lstStyle/>
+          <a:p>
+            <a:endParaRPr kumimoji="1" lang="ja-JP" altLang="en-US" sz="2400" dirty="0"/>
+          </a:p>
+        </p:txBody>
+      </p:sp>
+      <p:graphicFrame>
+        <p:nvGraphicFramePr>
+          <p:cNvPr id="5" name="表 4">
+            <a:extLst>
+              <a:ext uri="{FF2B5EF4-FFF2-40B4-BE49-F238E27FC236}">
+                <a16:creationId xmlns:a16="http://schemas.microsoft.com/office/drawing/2014/main" id="{D6BBCA6C-DA45-AD84-3375-A1196D3D2BB7}"/>
+              </a:ext>
+            </a:extLst>
+          </p:cNvPr>
+          <p:cNvGraphicFramePr>
+            <a:graphicFrameLocks noGrp="1"/>
+          </p:cNvGraphicFramePr>
+          <p:nvPr>
+            <p:extLst>
+              <p:ext uri="{D42A27DB-BD31-4B8C-83A1-F6EECF244321}">
+                <p14:modId xmlns:p14="http://schemas.microsoft.com/office/powerpoint/2010/main" val="2051858441"/>
+              </p:ext>
+            </p:extLst>
+          </p:nvPr>
+        </p:nvGraphicFramePr>
+        <p:xfrm>
+          <a:off x="2427855" y="1355134"/>
+          <a:ext cx="6810232" cy="4912449"/>
+        </p:xfrm>
+        <a:graphic>
+          <a:graphicData uri="http://schemas.openxmlformats.org/drawingml/2006/table">
+            <a:tbl>
+              <a:tblPr/>
+              <a:tblGrid>
+                <a:gridCol w="1188166">
+                  <a:extLst>
+                    <a:ext uri="{9D8B030D-6E8A-4147-A177-3AD203B41FA5}">
+                      <a16:colId xmlns:a16="http://schemas.microsoft.com/office/drawing/2014/main" val="2018763903"/>
+                    </a:ext>
+                  </a:extLst>
+                </a:gridCol>
+                <a:gridCol w="5622066">
+                  <a:extLst>
+                    <a:ext uri="{9D8B030D-6E8A-4147-A177-3AD203B41FA5}">
+                      <a16:colId xmlns:a16="http://schemas.microsoft.com/office/drawing/2014/main" val="218502001"/>
+                    </a:ext>
+                  </a:extLst>
+                </a:gridCol>
+              </a:tblGrid>
+              <a:tr h="476597">
+                <a:tc>
+                  <a:txBody>
+                    <a:bodyPr/>
+                    <a:lstStyle/>
+                    <a:p>
+                      <a:pPr>
+                        <a:buNone/>
+                      </a:pPr>
+                      <a:r>
+                        <a:rPr lang="ja-JP" sz="1700" dirty="0"/>
+                        <a:t>時期</a:t>
+                      </a:r>
+                    </a:p>
+                  </a:txBody>
+                  <a:tcPr marL="87596" marR="87596" marT="43797" marB="43797" anchor="ctr">
+                    <a:lnL>
+                      <a:noFill/>
+                    </a:lnL>
+                    <a:lnR>
+                      <a:noFill/>
+                    </a:lnR>
+                    <a:lnT>
+                      <a:noFill/>
+                    </a:lnT>
+                    <a:lnB>
+                      <a:noFill/>
+                    </a:lnB>
+                    <a:noFill/>
+                  </a:tcPr>
+                </a:tc>
+                <a:tc>
+                  <a:txBody>
+                    <a:bodyPr/>
+                    <a:lstStyle/>
+                    <a:p>
+                      <a:pPr>
+                        <a:buNone/>
+                      </a:pPr>
+                      <a:r>
+                        <a:rPr lang="ja-JP" sz="1700"/>
+                        <a:t>内容</a:t>
+                      </a:r>
+                    </a:p>
+                  </a:txBody>
+                  <a:tcPr marL="87596" marR="87596" marT="43797" marB="43797" anchor="ctr">
+                    <a:lnL>
+                      <a:noFill/>
+                    </a:lnL>
+                    <a:lnR>
+                      <a:noFill/>
+                    </a:lnR>
+                    <a:lnT>
+                      <a:noFill/>
+                    </a:lnT>
+                    <a:lnB>
+                      <a:noFill/>
+                    </a:lnB>
+                    <a:noFill/>
+                  </a:tcPr>
+                </a:tc>
+                <a:extLst>
+                  <a:ext uri="{0D108BD9-81ED-4DB2-BD59-A6C34878D82A}">
+                    <a16:rowId xmlns:a16="http://schemas.microsoft.com/office/drawing/2014/main" val="1142988008"/>
+                  </a:ext>
+                </a:extLst>
+              </a:tr>
+              <a:tr h="791851">
+                <a:tc>
+                  <a:txBody>
+                    <a:bodyPr/>
+                    <a:lstStyle/>
+                    <a:p>
+                      <a:pPr>
+                        <a:buNone/>
+                      </a:pPr>
+                      <a:r>
+                        <a:rPr lang="ja-JP" sz="1700" b="1"/>
+                        <a:t>7月</a:t>
+                      </a:r>
+                      <a:endParaRPr lang="ja-JP" sz="1700"/>
+                    </a:p>
+                  </a:txBody>
+                  <a:tcPr marL="87596" marR="87596" marT="43797" marB="43797" anchor="ctr">
+                    <a:lnL>
+                      <a:noFill/>
+                    </a:lnL>
+                    <a:lnR>
+                      <a:noFill/>
+                    </a:lnR>
+                    <a:lnT>
+                      <a:noFill/>
+                    </a:lnT>
+                    <a:lnB>
+                      <a:noFill/>
+                    </a:lnB>
+                    <a:noFill/>
+                  </a:tcPr>
+                </a:tc>
+                <a:tc>
+                  <a:txBody>
+                    <a:bodyPr/>
+                    <a:lstStyle/>
+                    <a:p>
+                      <a:pPr>
+                        <a:buNone/>
+                      </a:pPr>
+                      <a:r>
+                        <a:rPr lang="ja-JP" sz="1700" dirty="0"/>
+                        <a:t>Illustratorでワイヤーフレーム作成</a:t>
+                      </a:r>
+                    </a:p>
+                  </a:txBody>
+                  <a:tcPr marL="87596" marR="87596" marT="43797" marB="43797" anchor="ctr">
+                    <a:lnL>
+                      <a:noFill/>
+                    </a:lnL>
+                    <a:lnR>
+                      <a:noFill/>
+                    </a:lnR>
+                    <a:lnT>
+                      <a:noFill/>
+                    </a:lnT>
+                    <a:lnB>
+                      <a:noFill/>
+                    </a:lnB>
+                    <a:noFill/>
+                  </a:tcPr>
+                </a:tc>
+                <a:extLst>
+                  <a:ext uri="{0D108BD9-81ED-4DB2-BD59-A6C34878D82A}">
+                    <a16:rowId xmlns:a16="http://schemas.microsoft.com/office/drawing/2014/main" val="348572962"/>
+                  </a:ext>
+                </a:extLst>
+              </a:tr>
+              <a:tr h="791851">
+                <a:tc>
+                  <a:txBody>
+                    <a:bodyPr/>
+                    <a:lstStyle/>
+                    <a:p>
+                      <a:pPr>
+                        <a:buNone/>
+                      </a:pPr>
+                      <a:r>
+                        <a:rPr lang="ja-JP" sz="1700" b="1"/>
+                        <a:t>8月</a:t>
+                      </a:r>
+                      <a:endParaRPr lang="ja-JP" sz="1700"/>
+                    </a:p>
+                  </a:txBody>
+                  <a:tcPr marL="87596" marR="87596" marT="43797" marB="43797" anchor="ctr">
+                    <a:lnL>
+                      <a:noFill/>
+                    </a:lnL>
+                    <a:lnR>
+                      <a:noFill/>
+                    </a:lnR>
+                    <a:lnT>
+                      <a:noFill/>
+                    </a:lnT>
+                    <a:lnB>
+                      <a:noFill/>
+                    </a:lnB>
+                    <a:noFill/>
+                  </a:tcPr>
+                </a:tc>
+                <a:tc>
+                  <a:txBody>
+                    <a:bodyPr/>
+                    <a:lstStyle/>
+                    <a:p>
+                      <a:pPr>
+                        <a:buNone/>
+                      </a:pPr>
+                      <a:r>
+                        <a:rPr lang="ja-JP" sz="1700" dirty="0"/>
+                        <a:t>夜景スポットを撮影し、Photoshopで写真を加工・補正</a:t>
+                      </a:r>
+                    </a:p>
+                  </a:txBody>
+                  <a:tcPr marL="87596" marR="87596" marT="43797" marB="43797" anchor="ctr">
+                    <a:lnL>
+                      <a:noFill/>
+                    </a:lnL>
+                    <a:lnR>
+                      <a:noFill/>
+                    </a:lnR>
+                    <a:lnT>
+                      <a:noFill/>
+                    </a:lnT>
+                    <a:lnB>
+                      <a:noFill/>
+                    </a:lnB>
+                    <a:noFill/>
+                  </a:tcPr>
+                </a:tc>
+                <a:extLst>
+                  <a:ext uri="{0D108BD9-81ED-4DB2-BD59-A6C34878D82A}">
+                    <a16:rowId xmlns:a16="http://schemas.microsoft.com/office/drawing/2014/main" val="4031319902"/>
+                  </a:ext>
+                </a:extLst>
+              </a:tr>
+              <a:tr h="476597">
+                <a:tc>
+                  <a:txBody>
+                    <a:bodyPr/>
+                    <a:lstStyle/>
+                    <a:p>
+                      <a:pPr>
+                        <a:buNone/>
+                      </a:pPr>
+                      <a:r>
+                        <a:rPr lang="ja-JP" sz="1700" b="1"/>
+                        <a:t>9月</a:t>
+                      </a:r>
+                      <a:endParaRPr lang="ja-JP" sz="1700"/>
+                    </a:p>
+                  </a:txBody>
+                  <a:tcPr marL="87596" marR="87596" marT="43797" marB="43797" anchor="ctr">
+                    <a:lnL>
+                      <a:noFill/>
+                    </a:lnL>
+                    <a:lnR>
+                      <a:noFill/>
+                    </a:lnR>
+                    <a:lnT>
+                      <a:noFill/>
+                    </a:lnT>
+                    <a:lnB>
+                      <a:noFill/>
+                    </a:lnB>
+                    <a:noFill/>
+                  </a:tcPr>
+                </a:tc>
+                <a:tc>
+                  <a:txBody>
+                    <a:bodyPr/>
+                    <a:lstStyle/>
+                    <a:p>
+                      <a:pPr>
+                        <a:buNone/>
+                      </a:pPr>
+                      <a:r>
+                        <a:rPr lang="ja-JP" sz="1700" dirty="0"/>
+                        <a:t>HTML・CSSでWebサイトを制作</a:t>
+                      </a:r>
+                      <a:r>
+                        <a:rPr lang="ja-JP" altLang="en-US" sz="1700" dirty="0"/>
+                        <a:t>開始</a:t>
+                      </a:r>
+                      <a:endParaRPr lang="ja-JP" sz="1700" dirty="0"/>
+                    </a:p>
+                  </a:txBody>
+                  <a:tcPr marL="87596" marR="87596" marT="43797" marB="43797" anchor="ctr">
+                    <a:lnL>
+                      <a:noFill/>
+                    </a:lnL>
+                    <a:lnR>
+                      <a:noFill/>
+                    </a:lnR>
+                    <a:lnT>
+                      <a:noFill/>
+                    </a:lnT>
+                    <a:lnB>
+                      <a:noFill/>
+                    </a:lnB>
+                    <a:noFill/>
+                  </a:tcPr>
+                </a:tc>
+                <a:extLst>
+                  <a:ext uri="{0D108BD9-81ED-4DB2-BD59-A6C34878D82A}">
+                    <a16:rowId xmlns:a16="http://schemas.microsoft.com/office/drawing/2014/main" val="4131190529"/>
+                  </a:ext>
+                </a:extLst>
+              </a:tr>
+              <a:tr h="791851">
+                <a:tc>
+                  <a:txBody>
+                    <a:bodyPr/>
+                    <a:lstStyle/>
+                    <a:p>
+                      <a:pPr>
+                        <a:buNone/>
+                      </a:pPr>
+                      <a:r>
+                        <a:rPr lang="ja-JP" sz="1700" b="1"/>
+                        <a:t>10月</a:t>
+                      </a:r>
+                      <a:endParaRPr lang="ja-JP" sz="1700"/>
+                    </a:p>
+                  </a:txBody>
+                  <a:tcPr marL="87596" marR="87596" marT="43797" marB="43797" anchor="ctr">
+                    <a:lnL>
+                      <a:noFill/>
+                    </a:lnL>
+                    <a:lnR>
+                      <a:noFill/>
+                    </a:lnR>
+                    <a:lnT>
+                      <a:noFill/>
+                    </a:lnT>
+                    <a:lnB>
+                      <a:noFill/>
+                    </a:lnB>
+                    <a:noFill/>
+                  </a:tcPr>
+                </a:tc>
+                <a:tc>
+                  <a:txBody>
+                    <a:bodyPr/>
+                    <a:lstStyle/>
+                    <a:p>
+                      <a:pPr>
+                        <a:buNone/>
+                      </a:pPr>
+                      <a:r>
+                        <a:rPr lang="ja-JP" sz="1700" dirty="0"/>
+                        <a:t>デザイン調整</a:t>
+                      </a:r>
+                      <a:r>
+                        <a:rPr lang="ja-JP" altLang="en-US" sz="1700" dirty="0"/>
+                        <a:t>、コーディング</a:t>
+                      </a:r>
+                      <a:endParaRPr lang="ja-JP" sz="1700" dirty="0"/>
+                    </a:p>
+                  </a:txBody>
+                  <a:tcPr marL="87596" marR="87596" marT="43797" marB="43797" anchor="ctr">
+                    <a:lnL>
+                      <a:noFill/>
+                    </a:lnL>
+                    <a:lnR>
+                      <a:noFill/>
+                    </a:lnR>
+                    <a:lnT>
+                      <a:noFill/>
+                    </a:lnT>
+                    <a:lnB>
+                      <a:noFill/>
+                    </a:lnB>
+                    <a:noFill/>
+                  </a:tcPr>
+                </a:tc>
+                <a:extLst>
+                  <a:ext uri="{0D108BD9-81ED-4DB2-BD59-A6C34878D82A}">
+                    <a16:rowId xmlns:a16="http://schemas.microsoft.com/office/drawing/2014/main" val="4112659929"/>
+                  </a:ext>
+                </a:extLst>
+              </a:tr>
+              <a:tr h="791851">
+                <a:tc>
+                  <a:txBody>
+                    <a:bodyPr/>
+                    <a:lstStyle/>
+                    <a:p>
+                      <a:pPr>
+                        <a:buNone/>
+                      </a:pPr>
+                      <a:r>
+                        <a:rPr lang="ja-JP" sz="1700" b="1"/>
+                        <a:t>11月</a:t>
+                      </a:r>
+                      <a:endParaRPr lang="ja-JP" sz="1700"/>
+                    </a:p>
+                  </a:txBody>
+                  <a:tcPr marL="87596" marR="87596" marT="43797" marB="43797" anchor="ctr">
+                    <a:lnL>
+                      <a:noFill/>
+                    </a:lnL>
+                    <a:lnR>
+                      <a:noFill/>
+                    </a:lnR>
+                    <a:lnT>
+                      <a:noFill/>
+                    </a:lnT>
+                    <a:lnB>
+                      <a:noFill/>
+                    </a:lnB>
+                    <a:noFill/>
+                  </a:tcPr>
+                </a:tc>
+                <a:tc>
+                  <a:txBody>
+                    <a:bodyPr/>
+                    <a:lstStyle/>
+                    <a:p>
+                      <a:pPr>
+                        <a:buNone/>
+                      </a:pPr>
+                      <a:r>
+                        <a:rPr lang="ja-JP" sz="1700" dirty="0"/>
+                        <a:t>Webサイトの修正・動作確認、</a:t>
+                      </a:r>
+                      <a:r>
+                        <a:rPr lang="ja-JP" sz="1700" b="1" dirty="0"/>
+                        <a:t>ポスターのデザイン・制作</a:t>
+                      </a:r>
+                      <a:endParaRPr lang="ja-JP" sz="1700" dirty="0"/>
+                    </a:p>
+                  </a:txBody>
+                  <a:tcPr marL="87596" marR="87596" marT="43797" marB="43797" anchor="ctr">
+                    <a:lnL>
+                      <a:noFill/>
+                    </a:lnL>
+                    <a:lnR>
+                      <a:noFill/>
+                    </a:lnR>
+                    <a:lnT>
+                      <a:noFill/>
+                    </a:lnT>
+                    <a:lnB>
+                      <a:noFill/>
+                    </a:lnB>
+                    <a:noFill/>
+                  </a:tcPr>
+                </a:tc>
+                <a:extLst>
+                  <a:ext uri="{0D108BD9-81ED-4DB2-BD59-A6C34878D82A}">
+                    <a16:rowId xmlns:a16="http://schemas.microsoft.com/office/drawing/2014/main" val="2233361872"/>
+                  </a:ext>
+                </a:extLst>
+              </a:tr>
+              <a:tr h="791851">
+                <a:tc>
+                  <a:txBody>
+                    <a:bodyPr/>
+                    <a:lstStyle/>
+                    <a:p>
+                      <a:pPr>
+                        <a:buNone/>
+                      </a:pPr>
+                      <a:r>
+                        <a:rPr lang="ja-JP" sz="1700" b="1"/>
+                        <a:t>12月</a:t>
+                      </a:r>
+                      <a:endParaRPr lang="ja-JP" sz="1700"/>
+                    </a:p>
+                  </a:txBody>
+                  <a:tcPr marL="87596" marR="87596" marT="43797" marB="43797" anchor="ctr">
+                    <a:lnL>
+                      <a:noFill/>
+                    </a:lnL>
+                    <a:lnR>
+                      <a:noFill/>
+                    </a:lnR>
+                    <a:lnT>
+                      <a:noFill/>
+                    </a:lnT>
+                    <a:lnB>
+                      <a:noFill/>
+                    </a:lnB>
+                    <a:noFill/>
+                  </a:tcPr>
+                </a:tc>
+                <a:tc>
+                  <a:txBody>
+                    <a:bodyPr/>
+                    <a:lstStyle/>
+                    <a:p>
+                      <a:pPr>
+                        <a:buNone/>
+                      </a:pPr>
+                      <a:r>
+                        <a:rPr lang="ja-JP" sz="1700" dirty="0"/>
+                        <a:t>ポスター完成</a:t>
+                      </a:r>
+                      <a:r>
+                        <a:rPr lang="ja-JP" altLang="en-US" sz="1700" dirty="0"/>
+                        <a:t>、テーマ２つ目に入る</a:t>
+                      </a:r>
+                      <a:endParaRPr lang="ja-JP" sz="1700" dirty="0"/>
+                    </a:p>
+                  </a:txBody>
+                  <a:tcPr marL="87596" marR="87596" marT="43797" marB="43797" anchor="ctr">
+                    <a:lnL>
+                      <a:noFill/>
+                    </a:lnL>
+                    <a:lnR>
+                      <a:noFill/>
+                    </a:lnR>
+                    <a:lnT>
+                      <a:noFill/>
+                    </a:lnT>
+                    <a:lnB>
+                      <a:noFill/>
+                    </a:lnB>
+                    <a:noFill/>
+                  </a:tcPr>
+                </a:tc>
+                <a:extLst>
+                  <a:ext uri="{0D108BD9-81ED-4DB2-BD59-A6C34878D82A}">
+                    <a16:rowId xmlns:a16="http://schemas.microsoft.com/office/drawing/2014/main" val="1048876203"/>
+                  </a:ext>
+                </a:extLst>
+              </a:tr>
+            </a:tbl>
+          </a:graphicData>
+        </a:graphic>
+      </p:graphicFrame>
+    </p:spTree>
+    <p:extLst>
+      <p:ext uri="{BB962C8B-B14F-4D97-AF65-F5344CB8AC3E}">
+        <p14:creationId xmlns:p14="http://schemas.microsoft.com/office/powerpoint/2010/main" val="2807845909"/>
+      </p:ext>
+    </p:extLst>
+  </p:cSld>
+  <p:clrMapOvr>
+    <a:masterClrMapping/>
+  </p:clrMapOvr>
+</p:sld>
+</file>
+
 <file path=ppt/slides/slide2.xml><?xml version="1.0" encoding="utf-8"?>
 <p:sld xmlns:a="http://schemas.openxmlformats.org/drawingml/2006/main" xmlns:r="http://schemas.openxmlformats.org/officeDocument/2006/relationships" xmlns:p="http://schemas.openxmlformats.org/presentationml/2006/main">
   <p:cSld>
@@ -22142,14 +22702,14 @@
             <p:ph idx="1"/>
             <p:extLst>
               <p:ext uri="{D42A27DB-BD31-4B8C-83A1-F6EECF244321}">
-                <p14:modId xmlns:p14="http://schemas.microsoft.com/office/powerpoint/2010/main" val="186591338"/>
+                <p14:modId xmlns:p14="http://schemas.microsoft.com/office/powerpoint/2010/main" val="1496866891"/>
               </p:ext>
             </p:extLst>
           </p:nvPr>
         </p:nvGraphicFramePr>
         <p:xfrm>
-          <a:off x="4432044" y="931332"/>
-          <a:ext cx="7522890" cy="4847909"/>
+          <a:off x="3852333" y="355600"/>
+          <a:ext cx="8166432" cy="5973234"/>
         </p:xfrm>
         <a:graphic>
           <a:graphicData uri="http://schemas.openxmlformats.org/drawingml/2006/diagram">
@@ -27935,6 +28495,22 @@
               </a:rPr>
               <a:t>で写真の色味や明るさを調整・加工する。</a:t>
             </a:r>
+            <a:endParaRPr lang="en-US" altLang="ja-JP" sz="1500" dirty="0">
+              <a:latin typeface="BIZ UDゴシック" panose="020B0400000000000000" pitchFamily="49" charset="-128"/>
+              <a:ea typeface="BIZ UDゴシック" panose="020B0400000000000000" pitchFamily="49" charset="-128"/>
+            </a:endParaRPr>
+          </a:p>
+          <a:p>
+            <a:pPr indent="-228600" defTabSz="914400">
+              <a:lnSpc>
+                <a:spcPct val="90000"/>
+              </a:lnSpc>
+              <a:spcAft>
+                <a:spcPts val="600"/>
+              </a:spcAft>
+              <a:buFont typeface="Arial" panose="020B0604020202020204" pitchFamily="34" charset="0"/>
+              <a:buChar char="•"/>
+            </a:pPr>
             <a:endParaRPr kumimoji="1" lang="en-US" altLang="ja-JP" sz="1500" dirty="0">
               <a:latin typeface="BIZ UDゴシック" panose="020B0400000000000000" pitchFamily="49" charset="-128"/>
               <a:ea typeface="BIZ UDゴシック" panose="020B0400000000000000" pitchFamily="49" charset="-128"/>
@@ -30657,14 +31233,14 @@
             <p:ph idx="1"/>
             <p:extLst>
               <p:ext uri="{D42A27DB-BD31-4B8C-83A1-F6EECF244321}">
-                <p14:modId xmlns:p14="http://schemas.microsoft.com/office/powerpoint/2010/main" val="2608308508"/>
+                <p14:modId xmlns:p14="http://schemas.microsoft.com/office/powerpoint/2010/main" val="2134009600"/>
               </p:ext>
             </p:extLst>
           </p:nvPr>
         </p:nvGraphicFramePr>
         <p:xfrm>
-          <a:off x="4432044" y="931332"/>
-          <a:ext cx="7522890" cy="4847909"/>
+          <a:off x="3767667" y="609600"/>
+          <a:ext cx="8187268" cy="5799666"/>
         </p:xfrm>
         <a:graphic>
           <a:graphicData uri="http://schemas.openxmlformats.org/drawingml/2006/diagram">
@@ -36291,8 +36867,8 @@
         </p:nvSpPr>
         <p:spPr>
           <a:xfrm>
-            <a:off x="491067" y="1346200"/>
-            <a:ext cx="3730663" cy="2929467"/>
+            <a:off x="491067" y="1047646"/>
+            <a:ext cx="3860800" cy="3439687"/>
           </a:xfrm>
           <a:prstGeom prst="rect">
             <a:avLst/>
@@ -36319,7 +36895,7 @@
                 <a:latin typeface="BIZ UDゴシック" panose="020B0400000000000000" pitchFamily="49" charset="-128"/>
                 <a:ea typeface="BIZ UDゴシック" panose="020B0400000000000000" pitchFamily="49" charset="-128"/>
               </a:rPr>
-              <a:t>ページ数は４ページにします。</a:t>
+              <a:t>ページ数は４～５ページにします。</a:t>
             </a:r>
             <a:endParaRPr kumimoji="1" lang="en-US" altLang="ja-JP" sz="1600" dirty="0">
               <a:latin typeface="BIZ UDゴシック" panose="020B0400000000000000" pitchFamily="49" charset="-128"/>
@@ -36340,7 +36916,21 @@
                 <a:latin typeface="BIZ UDゴシック" panose="020B0400000000000000" pitchFamily="49" charset="-128"/>
                 <a:ea typeface="BIZ UDゴシック" panose="020B0400000000000000" pitchFamily="49" charset="-128"/>
               </a:rPr>
-              <a:t>１ページにつき写真を４枚程度掲載し、１枚づつに</a:t>
+              <a:t>１ページにつき写真を</a:t>
+            </a:r>
+            <a:r>
+              <a:rPr kumimoji="1" lang="en-US" altLang="ja-JP" sz="1600" dirty="0">
+                <a:latin typeface="BIZ UDゴシック" panose="020B0400000000000000" pitchFamily="49" charset="-128"/>
+                <a:ea typeface="BIZ UDゴシック" panose="020B0400000000000000" pitchFamily="49" charset="-128"/>
+              </a:rPr>
+              <a:t>4</a:t>
+            </a:r>
+            <a:r>
+              <a:rPr kumimoji="1" lang="ja-JP" altLang="en-US" sz="1600" dirty="0">
+                <a:latin typeface="BIZ UDゴシック" panose="020B0400000000000000" pitchFamily="49" charset="-128"/>
+                <a:ea typeface="BIZ UDゴシック" panose="020B0400000000000000" pitchFamily="49" charset="-128"/>
+              </a:rPr>
+              <a:t>枚程度掲載し、１枚づつに</a:t>
             </a:r>
             <a:r>
               <a:rPr kumimoji="1" lang="en-US" altLang="ja-JP" sz="1600" dirty="0">
@@ -36375,7 +36965,21 @@
                 <a:latin typeface="BIZ UDゴシック" panose="020B0400000000000000" pitchFamily="49" charset="-128"/>
                 <a:ea typeface="BIZ UDゴシック" panose="020B0400000000000000" pitchFamily="49" charset="-128"/>
               </a:rPr>
-              <a:t>説明文とアクセスポイントを書きます。</a:t>
+              <a:t>説明文を書きます。（</a:t>
+            </a:r>
+            <a:r>
+              <a:rPr kumimoji="1" lang="en-US" altLang="ja-JP" sz="1500" dirty="0">
+                <a:latin typeface="BIZ UDゴシック" panose="020B0400000000000000" pitchFamily="49" charset="-128"/>
+                <a:ea typeface="BIZ UDゴシック" panose="020B0400000000000000" pitchFamily="49" charset="-128"/>
+              </a:rPr>
+              <a:t>PFC</a:t>
+            </a:r>
+            <a:r>
+              <a:rPr kumimoji="1" lang="ja-JP" altLang="en-US" sz="1500" dirty="0">
+                <a:latin typeface="BIZ UDゴシック" panose="020B0400000000000000" pitchFamily="49" charset="-128"/>
+                <a:ea typeface="BIZ UDゴシック" panose="020B0400000000000000" pitchFamily="49" charset="-128"/>
+              </a:rPr>
+              <a:t>バランスなど）</a:t>
             </a:r>
             <a:endParaRPr kumimoji="1" lang="en-US" altLang="ja-JP" sz="1500" dirty="0">
               <a:latin typeface="BIZ UDゴシック" panose="020B0400000000000000" pitchFamily="49" charset="-128"/>
@@ -36425,13 +37029,6 @@
               <a:buFont typeface="Arial" panose="020B0604020202020204" pitchFamily="34" charset="0"/>
               <a:buChar char="•"/>
             </a:pPr>
-            <a:r>
-              <a:rPr lang="ja-JP" altLang="en-US" sz="1500" dirty="0">
-                <a:latin typeface="BIZ UDゴシック" panose="020B0400000000000000" pitchFamily="49" charset="-128"/>
-                <a:ea typeface="BIZ UDゴシック" panose="020B0400000000000000" pitchFamily="49" charset="-128"/>
-              </a:rPr>
-              <a:t>８月に福岡県内の夜景スポットを撮　　　　  影し写真素材を収集。</a:t>
-            </a:r>
             <a:endParaRPr lang="en-US" altLang="ja-JP" sz="1500" dirty="0">
               <a:latin typeface="BIZ UDゴシック" panose="020B0400000000000000" pitchFamily="49" charset="-128"/>
               <a:ea typeface="BIZ UDゴシック" panose="020B0400000000000000" pitchFamily="49" charset="-128"/>
@@ -36460,9 +37057,23 @@
                 <a:latin typeface="BIZ UDゴシック" panose="020B0400000000000000" pitchFamily="49" charset="-128"/>
                 <a:ea typeface="BIZ UDゴシック" panose="020B0400000000000000" pitchFamily="49" charset="-128"/>
               </a:rPr>
-              <a:t>で写真の色味や明るさを調整・加工する。</a:t>
+              <a:t>で写真の色味や明るさを</a:t>
             </a:r>
-            <a:endParaRPr kumimoji="1" lang="en-US" altLang="ja-JP" sz="1500" dirty="0">
+            <a:r>
+              <a:rPr lang="en-US" altLang="ja-JP" sz="1500" dirty="0">
+                <a:latin typeface="BIZ UDゴシック" panose="020B0400000000000000" pitchFamily="49" charset="-128"/>
+                <a:ea typeface="BIZ UDゴシック" panose="020B0400000000000000" pitchFamily="49" charset="-128"/>
+              </a:rPr>
+              <a:t>	</a:t>
+            </a:r>
+            <a:r>
+              <a:rPr lang="ja-JP" altLang="en-US" sz="1500" dirty="0">
+                <a:latin typeface="BIZ UDゴシック" panose="020B0400000000000000" pitchFamily="49" charset="-128"/>
+                <a:ea typeface="BIZ UDゴシック" panose="020B0400000000000000" pitchFamily="49" charset="-128"/>
+              </a:rPr>
+              <a:t>調整・加工する。</a:t>
+            </a:r>
+            <a:endParaRPr lang="en-US" altLang="ja-JP" sz="1500" dirty="0">
               <a:latin typeface="BIZ UDゴシック" panose="020B0400000000000000" pitchFamily="49" charset="-128"/>
               <a:ea typeface="BIZ UDゴシック" panose="020B0400000000000000" pitchFamily="49" charset="-128"/>
             </a:endParaRPr>
@@ -36478,21 +37089,68 @@
               <a:buFont typeface="Arial" panose="020B0604020202020204" pitchFamily="34" charset="0"/>
               <a:buChar char="•"/>
             </a:pPr>
+            <a:r>
+              <a:rPr kumimoji="1" lang="ja-JP" altLang="en-US" sz="1500" dirty="0">
+                <a:latin typeface="BIZ UDゴシック" panose="020B0400000000000000" pitchFamily="49" charset="-128"/>
+                <a:ea typeface="BIZ UDゴシック" panose="020B0400000000000000" pitchFamily="49" charset="-128"/>
+              </a:rPr>
+              <a:t>ジムでトレーニングの撮影</a:t>
+            </a:r>
+            <a:r>
+              <a:rPr kumimoji="1" lang="en-US" altLang="ja-JP" sz="1500" dirty="0">
+                <a:latin typeface="BIZ UDゴシック" panose="020B0400000000000000" pitchFamily="49" charset="-128"/>
+                <a:ea typeface="BIZ UDゴシック" panose="020B0400000000000000" pitchFamily="49" charset="-128"/>
+              </a:rPr>
+              <a:t>	</a:t>
+            </a:r>
+            <a:r>
+              <a:rPr kumimoji="1" lang="ja-JP" altLang="en-US" sz="1500" dirty="0">
+                <a:latin typeface="BIZ UDゴシック" panose="020B0400000000000000" pitchFamily="49" charset="-128"/>
+                <a:ea typeface="BIZ UDゴシック" panose="020B0400000000000000" pitchFamily="49" charset="-128"/>
+              </a:rPr>
+              <a:t>　　　　　　　　　　　　　　　　　　　　場所　　上津　</a:t>
+            </a:r>
+            <a:r>
+              <a:rPr kumimoji="1" lang="en-US" altLang="ja-JP" sz="1500" dirty="0">
+                <a:latin typeface="BIZ UDゴシック" panose="020B0400000000000000" pitchFamily="49" charset="-128"/>
+                <a:ea typeface="BIZ UDゴシック" panose="020B0400000000000000" pitchFamily="49" charset="-128"/>
+              </a:rPr>
+              <a:t>FITPLACE		※</a:t>
+            </a:r>
+            <a:r>
+              <a:rPr kumimoji="1" lang="ja-JP" altLang="en-US" sz="1500" dirty="0">
+                <a:latin typeface="BIZ UDゴシック" panose="020B0400000000000000" pitchFamily="49" charset="-128"/>
+                <a:ea typeface="BIZ UDゴシック" panose="020B0400000000000000" pitchFamily="49" charset="-128"/>
+              </a:rPr>
+              <a:t>撮影許可取得済み</a:t>
+            </a:r>
             <a:endParaRPr kumimoji="1" lang="en-US" altLang="ja-JP" sz="1500" dirty="0">
               <a:latin typeface="BIZ UDゴシック" panose="020B0400000000000000" pitchFamily="49" charset="-128"/>
               <a:ea typeface="BIZ UDゴシック" panose="020B0400000000000000" pitchFamily="49" charset="-128"/>
             </a:endParaRPr>
           </a:p>
           <a:p>
-            <a:pPr indent="-228600" defTabSz="914400">
+            <a:pPr defTabSz="914400">
               <a:lnSpc>
                 <a:spcPct val="90000"/>
               </a:lnSpc>
               <a:spcAft>
                 <a:spcPts val="600"/>
               </a:spcAft>
-              <a:buFont typeface="Arial" panose="020B0604020202020204" pitchFamily="34" charset="0"/>
-              <a:buChar char="•"/>
+            </a:pPr>
+            <a:endParaRPr kumimoji="1" lang="en-US" altLang="ja-JP" sz="1500" dirty="0">
+              <a:latin typeface="BIZ UDゴシック" panose="020B0400000000000000" pitchFamily="49" charset="-128"/>
+              <a:ea typeface="BIZ UDゴシック" panose="020B0400000000000000" pitchFamily="49" charset="-128"/>
+            </a:endParaRPr>
+          </a:p>
+          <a:p>
+            <a:pPr defTabSz="914400">
+              <a:lnSpc>
+                <a:spcPct val="90000"/>
+              </a:lnSpc>
+              <a:spcAft>
+                <a:spcPts val="600"/>
+              </a:spcAft>
             </a:pPr>
             <a:endParaRPr kumimoji="1" lang="en-US" altLang="ja-JP" sz="1500" dirty="0">
               <a:latin typeface="BIZ UDゴシック" panose="020B0400000000000000" pitchFamily="49" charset="-128"/>

--- a/中間発表 power point/25007 大平凜音.pptx
+++ b/中間発表 power point/25007 大平凜音.pptx
@@ -9,8 +9,8 @@
   </p:notesMasterIdLst>
   <p:sldIdLst>
     <p:sldId id="269" r:id="rId2"/>
-    <p:sldId id="256" r:id="rId3"/>
-    <p:sldId id="270" r:id="rId4"/>
+    <p:sldId id="270" r:id="rId3"/>
+    <p:sldId id="256" r:id="rId4"/>
     <p:sldId id="257" r:id="rId5"/>
     <p:sldId id="258" r:id="rId6"/>
     <p:sldId id="264" r:id="rId7"/>
@@ -5659,10 +5659,10 @@
         <a:lstStyle/>
         <a:p>
           <a:r>
-            <a:rPr kumimoji="1" lang="ja-JP"/>
+            <a:rPr kumimoji="1" lang="ja-JP" dirty="0"/>
             <a:t>目的</a:t>
           </a:r>
-          <a:endParaRPr lang="en-US"/>
+          <a:endParaRPr lang="en-US" dirty="0"/>
         </a:p>
       </dgm:t>
     </dgm:pt>
@@ -5698,11 +5698,15 @@
           <a:pPr algn="l"/>
           <a:r>
             <a:rPr kumimoji="1" lang="ja-JP" altLang="en-US" dirty="0"/>
-            <a:t>　　</a:t>
+            <a:t>　</a:t>
           </a:r>
           <a:r>
             <a:rPr kumimoji="1" lang="ja-JP" dirty="0"/>
             <a:t>構成</a:t>
+          </a:r>
+          <a:r>
+            <a:rPr kumimoji="1" lang="ja-JP" altLang="en-US" dirty="0"/>
+            <a:t>・内容</a:t>
           </a:r>
           <a:endParaRPr kumimoji="1" lang="en-US" altLang="ja-JP" dirty="0"/>
         </a:p>
@@ -7346,10 +7350,10 @@
             <a:buNone/>
           </a:pPr>
           <a:r>
-            <a:rPr kumimoji="1" lang="ja-JP" sz="2100" kern="1200"/>
+            <a:rPr kumimoji="1" lang="ja-JP" sz="2100" kern="1200" dirty="0"/>
             <a:t>目的</a:t>
           </a:r>
-          <a:endParaRPr lang="en-US" sz="2100" kern="1200"/>
+          <a:endParaRPr lang="en-US" sz="2100" kern="1200" dirty="0"/>
         </a:p>
       </dsp:txBody>
       <dsp:txXfrm>
@@ -7497,11 +7501,15 @@
           </a:pPr>
           <a:r>
             <a:rPr kumimoji="1" lang="ja-JP" altLang="en-US" sz="2100" kern="1200" dirty="0"/>
-            <a:t>　　</a:t>
+            <a:t>　</a:t>
           </a:r>
           <a:r>
             <a:rPr kumimoji="1" lang="ja-JP" sz="2100" kern="1200" dirty="0"/>
             <a:t>構成</a:t>
+          </a:r>
+          <a:r>
+            <a:rPr kumimoji="1" lang="ja-JP" altLang="en-US" sz="2100" kern="1200" dirty="0"/>
+            <a:t>・内容</a:t>
           </a:r>
           <a:endParaRPr kumimoji="1" lang="en-US" altLang="ja-JP" sz="2100" kern="1200" dirty="0"/>
         </a:p>
@@ -18199,7 +18207,7 @@
           <a:p>
             <a:fld id="{3B63ADA8-B0F7-486D-898A-093426B2058E}" type="slidenum">
               <a:rPr kumimoji="1" lang="ja-JP" altLang="en-US" smtClean="0"/>
-              <a:t>2</a:t>
+              <a:t>3</a:t>
             </a:fld>
             <a:endParaRPr kumimoji="1" lang="ja-JP" altLang="en-US"/>
           </a:p>
@@ -24278,17 +24286,17 @@
           <a:lstStyle/>
           <a:p>
             <a:r>
-              <a:rPr lang="ja-JP" altLang="ja-JP" b="1" dirty="0"/>
+              <a:rPr lang="ja-JP" altLang="ja-JP" sz="4000" b="1" dirty="0"/>
               <a:t>サイトの</a:t>
             </a:r>
             <a:r>
-              <a:rPr lang="ja-JP" altLang="en-US" b="1" dirty="0"/>
+              <a:rPr lang="ja-JP" altLang="en-US" sz="4000" b="1" dirty="0"/>
               <a:t>内容</a:t>
             </a:r>
             <a:br>
-              <a:rPr lang="ja-JP" altLang="ja-JP" b="1" dirty="0"/>
+              <a:rPr lang="ja-JP" altLang="ja-JP" sz="4000" b="1" dirty="0"/>
             </a:br>
-            <a:endParaRPr kumimoji="1" lang="ja-JP" altLang="en-US" dirty="0"/>
+            <a:endParaRPr kumimoji="1" lang="ja-JP" altLang="en-US" sz="4000" dirty="0"/>
           </a:p>
         </p:txBody>
       </p:sp>
@@ -25883,6 +25891,784 @@
       </p:grpSpPr>
       <p:sp useBgFill="1">
         <p:nvSpPr>
+          <p:cNvPr id="9" name="Rectangle 8">
+            <a:extLst>
+              <a:ext uri="{FF2B5EF4-FFF2-40B4-BE49-F238E27FC236}">
+                <a16:creationId xmlns:a16="http://schemas.microsoft.com/office/drawing/2014/main" id="{35DB3719-6FDC-4E5D-891D-FF40B7300F64}"/>
+              </a:ext>
+              <a:ext uri="{C183D7F6-B498-43B3-948B-1728B52AA6E4}">
+                <adec:decorative xmlns:adec="http://schemas.microsoft.com/office/drawing/2017/decorative" val="1"/>
+              </a:ext>
+            </a:extLst>
+          </p:cNvPr>
+          <p:cNvSpPr>
+            <a:spLocks noGrp="1" noRot="1" noChangeAspect="1" noMove="1" noResize="1" noEditPoints="1" noAdjustHandles="1" noChangeArrowheads="1" noChangeShapeType="1" noTextEdit="1"/>
+          </p:cNvSpPr>
+          <p:nvPr>
+            <p:extLst>
+              <p:ext uri="{386F3935-93C4-4BCD-93E2-E3B085C9AB24}">
+                <p16:designElem xmlns:p16="http://schemas.microsoft.com/office/powerpoint/2015/main" val="1"/>
+              </p:ext>
+            </p:extLst>
+          </p:nvPr>
+        </p:nvSpPr>
+        <p:spPr>
+          <a:xfrm>
+            <a:off x="0" y="0"/>
+            <a:ext cx="12188952" cy="6858000"/>
+          </a:xfrm>
+          <a:prstGeom prst="rect">
+            <a:avLst/>
+          </a:prstGeom>
+          <a:ln>
+            <a:noFill/>
+          </a:ln>
+        </p:spPr>
+        <p:style>
+          <a:lnRef idx="2">
+            <a:schemeClr val="accent1">
+              <a:shade val="50000"/>
+            </a:schemeClr>
+          </a:lnRef>
+          <a:fillRef idx="1">
+            <a:schemeClr val="accent1"/>
+          </a:fillRef>
+          <a:effectRef idx="0">
+            <a:schemeClr val="accent1"/>
+          </a:effectRef>
+          <a:fontRef idx="minor">
+            <a:schemeClr val="lt1"/>
+          </a:fontRef>
+        </p:style>
+        <p:txBody>
+          <a:bodyPr rtlCol="0" anchor="ctr"/>
+          <a:lstStyle/>
+          <a:p>
+            <a:pPr algn="ctr"/>
+            <a:endParaRPr lang="en-US"/>
+          </a:p>
+        </p:txBody>
+      </p:sp>
+      <p:sp>
+        <p:nvSpPr>
+          <p:cNvPr id="2" name="タイトル 1">
+            <a:extLst>
+              <a:ext uri="{FF2B5EF4-FFF2-40B4-BE49-F238E27FC236}">
+                <a16:creationId xmlns:a16="http://schemas.microsoft.com/office/drawing/2014/main" id="{8619712B-8DCB-97DC-5A72-B1284E123FD2}"/>
+              </a:ext>
+            </a:extLst>
+          </p:cNvPr>
+          <p:cNvSpPr>
+            <a:spLocks noGrp="1"/>
+          </p:cNvSpPr>
+          <p:nvPr>
+            <p:ph type="title"/>
+          </p:nvPr>
+        </p:nvSpPr>
+        <p:spPr>
+          <a:xfrm>
+            <a:off x="838200" y="365125"/>
+            <a:ext cx="10515600" cy="1325563"/>
+          </a:xfrm>
+        </p:spPr>
+        <p:txBody>
+          <a:bodyPr>
+            <a:normAutofit/>
+          </a:bodyPr>
+          <a:lstStyle/>
+          <a:p>
+            <a:pPr algn="just"/>
+            <a:r>
+              <a:rPr kumimoji="1" lang="ja-JP" altLang="en-US" sz="5400"/>
+              <a:t>もくじ</a:t>
+            </a:r>
+          </a:p>
+        </p:txBody>
+      </p:sp>
+      <p:sp>
+        <p:nvSpPr>
+          <p:cNvPr id="11" name="sketch line">
+            <a:extLst>
+              <a:ext uri="{FF2B5EF4-FFF2-40B4-BE49-F238E27FC236}">
+                <a16:creationId xmlns:a16="http://schemas.microsoft.com/office/drawing/2014/main" id="{E0CBAC23-2E3F-4A90-BA59-F8299F6A5439}"/>
+              </a:ext>
+              <a:ext uri="{C183D7F6-B498-43B3-948B-1728B52AA6E4}">
+                <adec:decorative xmlns:adec="http://schemas.microsoft.com/office/drawing/2017/decorative" val="1"/>
+              </a:ext>
+            </a:extLst>
+          </p:cNvPr>
+          <p:cNvSpPr>
+            <a:spLocks noGrp="1" noRot="1" noChangeAspect="1" noMove="1" noResize="1" noEditPoints="1" noAdjustHandles="1" noChangeArrowheads="1" noChangeShapeType="1" noTextEdit="1"/>
+          </p:cNvSpPr>
+          <p:nvPr>
+            <p:extLst>
+              <p:ext uri="{386F3935-93C4-4BCD-93E2-E3B085C9AB24}">
+                <p16:designElem xmlns:p16="http://schemas.microsoft.com/office/powerpoint/2015/main" val="1"/>
+              </p:ext>
+            </p:extLst>
+          </p:nvPr>
+        </p:nvSpPr>
+        <p:spPr>
+          <a:xfrm>
+            <a:off x="838200" y="1865313"/>
+            <a:ext cx="10424160" cy="18288"/>
+          </a:xfrm>
+          <a:custGeom>
+            <a:avLst/>
+            <a:gdLst>
+              <a:gd name="csX0" fmla="*/ 0 w 10424160"/>
+              <a:gd name="csY0" fmla="*/ 0 h 18288"/>
+              <a:gd name="csX1" fmla="*/ 903427 w 10424160"/>
+              <a:gd name="csY1" fmla="*/ 0 h 18288"/>
+              <a:gd name="csX2" fmla="*/ 1389888 w 10424160"/>
+              <a:gd name="csY2" fmla="*/ 0 h 18288"/>
+              <a:gd name="csX3" fmla="*/ 2189074 w 10424160"/>
+              <a:gd name="csY3" fmla="*/ 0 h 18288"/>
+              <a:gd name="csX4" fmla="*/ 2675534 w 10424160"/>
+              <a:gd name="csY4" fmla="*/ 0 h 18288"/>
+              <a:gd name="csX5" fmla="*/ 3370478 w 10424160"/>
+              <a:gd name="csY5" fmla="*/ 0 h 18288"/>
+              <a:gd name="csX6" fmla="*/ 4169664 w 10424160"/>
+              <a:gd name="csY6" fmla="*/ 0 h 18288"/>
+              <a:gd name="csX7" fmla="*/ 4551883 w 10424160"/>
+              <a:gd name="csY7" fmla="*/ 0 h 18288"/>
+              <a:gd name="csX8" fmla="*/ 4934102 w 10424160"/>
+              <a:gd name="csY8" fmla="*/ 0 h 18288"/>
+              <a:gd name="csX9" fmla="*/ 5837530 w 10424160"/>
+              <a:gd name="csY9" fmla="*/ 0 h 18288"/>
+              <a:gd name="csX10" fmla="*/ 6532474 w 10424160"/>
+              <a:gd name="csY10" fmla="*/ 0 h 18288"/>
+              <a:gd name="csX11" fmla="*/ 6914693 w 10424160"/>
+              <a:gd name="csY11" fmla="*/ 0 h 18288"/>
+              <a:gd name="csX12" fmla="*/ 7609637 w 10424160"/>
+              <a:gd name="csY12" fmla="*/ 0 h 18288"/>
+              <a:gd name="csX13" fmla="*/ 8513064 w 10424160"/>
+              <a:gd name="csY13" fmla="*/ 0 h 18288"/>
+              <a:gd name="csX14" fmla="*/ 9103766 w 10424160"/>
+              <a:gd name="csY14" fmla="*/ 0 h 18288"/>
+              <a:gd name="csX15" fmla="*/ 9694469 w 10424160"/>
+              <a:gd name="csY15" fmla="*/ 0 h 18288"/>
+              <a:gd name="csX16" fmla="*/ 10424160 w 10424160"/>
+              <a:gd name="csY16" fmla="*/ 0 h 18288"/>
+              <a:gd name="csX17" fmla="*/ 10424160 w 10424160"/>
+              <a:gd name="csY17" fmla="*/ 18288 h 18288"/>
+              <a:gd name="csX18" fmla="*/ 9729216 w 10424160"/>
+              <a:gd name="csY18" fmla="*/ 18288 h 18288"/>
+              <a:gd name="csX19" fmla="*/ 8930030 w 10424160"/>
+              <a:gd name="csY19" fmla="*/ 18288 h 18288"/>
+              <a:gd name="csX20" fmla="*/ 8130845 w 10424160"/>
+              <a:gd name="csY20" fmla="*/ 18288 h 18288"/>
+              <a:gd name="csX21" fmla="*/ 7644384 w 10424160"/>
+              <a:gd name="csY21" fmla="*/ 18288 h 18288"/>
+              <a:gd name="csX22" fmla="*/ 6740957 w 10424160"/>
+              <a:gd name="csY22" fmla="*/ 18288 h 18288"/>
+              <a:gd name="csX23" fmla="*/ 6046013 w 10424160"/>
+              <a:gd name="csY23" fmla="*/ 18288 h 18288"/>
+              <a:gd name="csX24" fmla="*/ 5663794 w 10424160"/>
+              <a:gd name="csY24" fmla="*/ 18288 h 18288"/>
+              <a:gd name="csX25" fmla="*/ 4968850 w 10424160"/>
+              <a:gd name="csY25" fmla="*/ 18288 h 18288"/>
+              <a:gd name="csX26" fmla="*/ 4378147 w 10424160"/>
+              <a:gd name="csY26" fmla="*/ 18288 h 18288"/>
+              <a:gd name="csX27" fmla="*/ 3787445 w 10424160"/>
+              <a:gd name="csY27" fmla="*/ 18288 h 18288"/>
+              <a:gd name="csX28" fmla="*/ 3196742 w 10424160"/>
+              <a:gd name="csY28" fmla="*/ 18288 h 18288"/>
+              <a:gd name="csX29" fmla="*/ 2606040 w 10424160"/>
+              <a:gd name="csY29" fmla="*/ 18288 h 18288"/>
+              <a:gd name="csX30" fmla="*/ 1806854 w 10424160"/>
+              <a:gd name="csY30" fmla="*/ 18288 h 18288"/>
+              <a:gd name="csX31" fmla="*/ 1111910 w 10424160"/>
+              <a:gd name="csY31" fmla="*/ 18288 h 18288"/>
+              <a:gd name="csX32" fmla="*/ 729691 w 10424160"/>
+              <a:gd name="csY32" fmla="*/ 18288 h 18288"/>
+              <a:gd name="csX33" fmla="*/ 0 w 10424160"/>
+              <a:gd name="csY33" fmla="*/ 18288 h 18288"/>
+              <a:gd name="csX34" fmla="*/ 0 w 10424160"/>
+              <a:gd name="csY34" fmla="*/ 0 h 18288"/>
+            </a:gdLst>
+            <a:ahLst/>
+            <a:cxnLst>
+              <a:cxn ang="0">
+                <a:pos x="csX0" y="csY0"/>
+              </a:cxn>
+              <a:cxn ang="0">
+                <a:pos x="csX1" y="csY1"/>
+              </a:cxn>
+              <a:cxn ang="0">
+                <a:pos x="csX2" y="csY2"/>
+              </a:cxn>
+              <a:cxn ang="0">
+                <a:pos x="csX3" y="csY3"/>
+              </a:cxn>
+              <a:cxn ang="0">
+                <a:pos x="csX4" y="csY4"/>
+              </a:cxn>
+              <a:cxn ang="0">
+                <a:pos x="csX5" y="csY5"/>
+              </a:cxn>
+              <a:cxn ang="0">
+                <a:pos x="csX6" y="csY6"/>
+              </a:cxn>
+              <a:cxn ang="0">
+                <a:pos x="csX7" y="csY7"/>
+              </a:cxn>
+              <a:cxn ang="0">
+                <a:pos x="csX8" y="csY8"/>
+              </a:cxn>
+              <a:cxn ang="0">
+                <a:pos x="csX9" y="csY9"/>
+              </a:cxn>
+              <a:cxn ang="0">
+                <a:pos x="csX10" y="csY10"/>
+              </a:cxn>
+              <a:cxn ang="0">
+                <a:pos x="csX11" y="csY11"/>
+              </a:cxn>
+              <a:cxn ang="0">
+                <a:pos x="csX12" y="csY12"/>
+              </a:cxn>
+              <a:cxn ang="0">
+                <a:pos x="csX13" y="csY13"/>
+              </a:cxn>
+              <a:cxn ang="0">
+                <a:pos x="csX14" y="csY14"/>
+              </a:cxn>
+              <a:cxn ang="0">
+                <a:pos x="csX15" y="csY15"/>
+              </a:cxn>
+              <a:cxn ang="0">
+                <a:pos x="csX16" y="csY16"/>
+              </a:cxn>
+              <a:cxn ang="0">
+                <a:pos x="csX17" y="csY17"/>
+              </a:cxn>
+              <a:cxn ang="0">
+                <a:pos x="csX18" y="csY18"/>
+              </a:cxn>
+              <a:cxn ang="0">
+                <a:pos x="csX19" y="csY19"/>
+              </a:cxn>
+              <a:cxn ang="0">
+                <a:pos x="csX20" y="csY20"/>
+              </a:cxn>
+              <a:cxn ang="0">
+                <a:pos x="csX21" y="csY21"/>
+              </a:cxn>
+              <a:cxn ang="0">
+                <a:pos x="csX22" y="csY22"/>
+              </a:cxn>
+              <a:cxn ang="0">
+                <a:pos x="csX23" y="csY23"/>
+              </a:cxn>
+              <a:cxn ang="0">
+                <a:pos x="csX24" y="csY24"/>
+              </a:cxn>
+              <a:cxn ang="0">
+                <a:pos x="csX25" y="csY25"/>
+              </a:cxn>
+              <a:cxn ang="0">
+                <a:pos x="csX26" y="csY26"/>
+              </a:cxn>
+              <a:cxn ang="0">
+                <a:pos x="csX27" y="csY27"/>
+              </a:cxn>
+              <a:cxn ang="0">
+                <a:pos x="csX28" y="csY28"/>
+              </a:cxn>
+              <a:cxn ang="0">
+                <a:pos x="csX29" y="csY29"/>
+              </a:cxn>
+              <a:cxn ang="0">
+                <a:pos x="csX30" y="csY30"/>
+              </a:cxn>
+              <a:cxn ang="0">
+                <a:pos x="csX31" y="csY31"/>
+              </a:cxn>
+              <a:cxn ang="0">
+                <a:pos x="csX32" y="csY32"/>
+              </a:cxn>
+              <a:cxn ang="0">
+                <a:pos x="csX33" y="csY33"/>
+              </a:cxn>
+              <a:cxn ang="0">
+                <a:pos x="csX34" y="csY34"/>
+              </a:cxn>
+            </a:cxnLst>
+            <a:rect l="l" t="t" r="r" b="b"/>
+            <a:pathLst>
+              <a:path w="10424160" h="18288" fill="none" extrusionOk="0">
+                <a:moveTo>
+                  <a:pt x="0" y="0"/>
+                </a:moveTo>
+                <a:cubicBezTo>
+                  <a:pt x="251416" y="-3874"/>
+                  <a:pt x="479411" y="-20508"/>
+                  <a:pt x="903427" y="0"/>
+                </a:cubicBezTo>
+                <a:cubicBezTo>
+                  <a:pt x="1327443" y="20508"/>
+                  <a:pt x="1177990" y="-7387"/>
+                  <a:pt x="1389888" y="0"/>
+                </a:cubicBezTo>
+                <a:cubicBezTo>
+                  <a:pt x="1601786" y="7387"/>
+                  <a:pt x="1928602" y="-6697"/>
+                  <a:pt x="2189074" y="0"/>
+                </a:cubicBezTo>
+                <a:cubicBezTo>
+                  <a:pt x="2449546" y="6697"/>
+                  <a:pt x="2440085" y="-21144"/>
+                  <a:pt x="2675534" y="0"/>
+                </a:cubicBezTo>
+                <a:cubicBezTo>
+                  <a:pt x="2910983" y="21144"/>
+                  <a:pt x="3026158" y="-11124"/>
+                  <a:pt x="3370478" y="0"/>
+                </a:cubicBezTo>
+                <a:cubicBezTo>
+                  <a:pt x="3714798" y="11124"/>
+                  <a:pt x="3864539" y="-10660"/>
+                  <a:pt x="4169664" y="0"/>
+                </a:cubicBezTo>
+                <a:cubicBezTo>
+                  <a:pt x="4474789" y="10660"/>
+                  <a:pt x="4471218" y="16488"/>
+                  <a:pt x="4551883" y="0"/>
+                </a:cubicBezTo>
+                <a:cubicBezTo>
+                  <a:pt x="4632548" y="-16488"/>
+                  <a:pt x="4786830" y="7986"/>
+                  <a:pt x="4934102" y="0"/>
+                </a:cubicBezTo>
+                <a:cubicBezTo>
+                  <a:pt x="5081374" y="-7986"/>
+                  <a:pt x="5575881" y="-33003"/>
+                  <a:pt x="5837530" y="0"/>
+                </a:cubicBezTo>
+                <a:cubicBezTo>
+                  <a:pt x="6099179" y="33003"/>
+                  <a:pt x="6305895" y="14170"/>
+                  <a:pt x="6532474" y="0"/>
+                </a:cubicBezTo>
+                <a:cubicBezTo>
+                  <a:pt x="6759053" y="-14170"/>
+                  <a:pt x="6726707" y="16121"/>
+                  <a:pt x="6914693" y="0"/>
+                </a:cubicBezTo>
+                <a:cubicBezTo>
+                  <a:pt x="7102679" y="-16121"/>
+                  <a:pt x="7397857" y="32594"/>
+                  <a:pt x="7609637" y="0"/>
+                </a:cubicBezTo>
+                <a:cubicBezTo>
+                  <a:pt x="7821417" y="-32594"/>
+                  <a:pt x="8141235" y="-3745"/>
+                  <a:pt x="8513064" y="0"/>
+                </a:cubicBezTo>
+                <a:cubicBezTo>
+                  <a:pt x="8884893" y="3745"/>
+                  <a:pt x="8877548" y="3359"/>
+                  <a:pt x="9103766" y="0"/>
+                </a:cubicBezTo>
+                <a:cubicBezTo>
+                  <a:pt x="9329984" y="-3359"/>
+                  <a:pt x="9545570" y="-17843"/>
+                  <a:pt x="9694469" y="0"/>
+                </a:cubicBezTo>
+                <a:cubicBezTo>
+                  <a:pt x="9843368" y="17843"/>
+                  <a:pt x="10162477" y="-1217"/>
+                  <a:pt x="10424160" y="0"/>
+                </a:cubicBezTo>
+                <a:cubicBezTo>
+                  <a:pt x="10424498" y="7640"/>
+                  <a:pt x="10423710" y="11289"/>
+                  <a:pt x="10424160" y="18288"/>
+                </a:cubicBezTo>
+                <a:cubicBezTo>
+                  <a:pt x="10184680" y="20716"/>
+                  <a:pt x="10034768" y="-9357"/>
+                  <a:pt x="9729216" y="18288"/>
+                </a:cubicBezTo>
+                <a:cubicBezTo>
+                  <a:pt x="9423664" y="45933"/>
+                  <a:pt x="9309220" y="36372"/>
+                  <a:pt x="8930030" y="18288"/>
+                </a:cubicBezTo>
+                <a:cubicBezTo>
+                  <a:pt x="8550840" y="204"/>
+                  <a:pt x="8513376" y="34707"/>
+                  <a:pt x="8130845" y="18288"/>
+                </a:cubicBezTo>
+                <a:cubicBezTo>
+                  <a:pt x="7748315" y="1869"/>
+                  <a:pt x="7864674" y="19659"/>
+                  <a:pt x="7644384" y="18288"/>
+                </a:cubicBezTo>
+                <a:cubicBezTo>
+                  <a:pt x="7424094" y="16917"/>
+                  <a:pt x="6947001" y="55680"/>
+                  <a:pt x="6740957" y="18288"/>
+                </a:cubicBezTo>
+                <a:cubicBezTo>
+                  <a:pt x="6534913" y="-19104"/>
+                  <a:pt x="6313809" y="33391"/>
+                  <a:pt x="6046013" y="18288"/>
+                </a:cubicBezTo>
+                <a:cubicBezTo>
+                  <a:pt x="5778217" y="3185"/>
+                  <a:pt x="5786775" y="1439"/>
+                  <a:pt x="5663794" y="18288"/>
+                </a:cubicBezTo>
+                <a:cubicBezTo>
+                  <a:pt x="5540813" y="35137"/>
+                  <a:pt x="5204724" y="25434"/>
+                  <a:pt x="4968850" y="18288"/>
+                </a:cubicBezTo>
+                <a:cubicBezTo>
+                  <a:pt x="4732976" y="11142"/>
+                  <a:pt x="4559928" y="34568"/>
+                  <a:pt x="4378147" y="18288"/>
+                </a:cubicBezTo>
+                <a:cubicBezTo>
+                  <a:pt x="4196366" y="2008"/>
+                  <a:pt x="3992200" y="35409"/>
+                  <a:pt x="3787445" y="18288"/>
+                </a:cubicBezTo>
+                <a:cubicBezTo>
+                  <a:pt x="3582690" y="1167"/>
+                  <a:pt x="3488876" y="-7583"/>
+                  <a:pt x="3196742" y="18288"/>
+                </a:cubicBezTo>
+                <a:cubicBezTo>
+                  <a:pt x="2904608" y="44159"/>
+                  <a:pt x="2729828" y="45906"/>
+                  <a:pt x="2606040" y="18288"/>
+                </a:cubicBezTo>
+                <a:cubicBezTo>
+                  <a:pt x="2482252" y="-9330"/>
+                  <a:pt x="2000672" y="-5498"/>
+                  <a:pt x="1806854" y="18288"/>
+                </a:cubicBezTo>
+                <a:cubicBezTo>
+                  <a:pt x="1613036" y="42074"/>
+                  <a:pt x="1310933" y="-4240"/>
+                  <a:pt x="1111910" y="18288"/>
+                </a:cubicBezTo>
+                <a:cubicBezTo>
+                  <a:pt x="912887" y="40816"/>
+                  <a:pt x="891560" y="1701"/>
+                  <a:pt x="729691" y="18288"/>
+                </a:cubicBezTo>
+                <a:cubicBezTo>
+                  <a:pt x="567822" y="34875"/>
+                  <a:pt x="203025" y="34462"/>
+                  <a:pt x="0" y="18288"/>
+                </a:cubicBezTo>
+                <a:cubicBezTo>
+                  <a:pt x="-82" y="11708"/>
+                  <a:pt x="-178" y="8956"/>
+                  <a:pt x="0" y="0"/>
+                </a:cubicBezTo>
+                <a:close/>
+              </a:path>
+              <a:path w="10424160" h="18288" stroke="0" extrusionOk="0">
+                <a:moveTo>
+                  <a:pt x="0" y="0"/>
+                </a:moveTo>
+                <a:cubicBezTo>
+                  <a:pt x="119910" y="17195"/>
+                  <a:pt x="345032" y="1652"/>
+                  <a:pt x="590702" y="0"/>
+                </a:cubicBezTo>
+                <a:cubicBezTo>
+                  <a:pt x="836372" y="-1652"/>
+                  <a:pt x="830717" y="-10944"/>
+                  <a:pt x="972922" y="0"/>
+                </a:cubicBezTo>
+                <a:cubicBezTo>
+                  <a:pt x="1115127" y="10944"/>
+                  <a:pt x="1638708" y="17269"/>
+                  <a:pt x="1876349" y="0"/>
+                </a:cubicBezTo>
+                <a:cubicBezTo>
+                  <a:pt x="2113990" y="-17269"/>
+                  <a:pt x="2263529" y="27642"/>
+                  <a:pt x="2467051" y="0"/>
+                </a:cubicBezTo>
+                <a:cubicBezTo>
+                  <a:pt x="2670573" y="-27642"/>
+                  <a:pt x="2867743" y="-1552"/>
+                  <a:pt x="3057754" y="0"/>
+                </a:cubicBezTo>
+                <a:cubicBezTo>
+                  <a:pt x="3247765" y="1552"/>
+                  <a:pt x="3729099" y="45169"/>
+                  <a:pt x="3961181" y="0"/>
+                </a:cubicBezTo>
+                <a:cubicBezTo>
+                  <a:pt x="4193263" y="-45169"/>
+                  <a:pt x="4313735" y="4067"/>
+                  <a:pt x="4447642" y="0"/>
+                </a:cubicBezTo>
+                <a:cubicBezTo>
+                  <a:pt x="4581549" y="-4067"/>
+                  <a:pt x="5123626" y="11867"/>
+                  <a:pt x="5351069" y="0"/>
+                </a:cubicBezTo>
+                <a:cubicBezTo>
+                  <a:pt x="5578512" y="-11867"/>
+                  <a:pt x="6044105" y="-19983"/>
+                  <a:pt x="6254496" y="0"/>
+                </a:cubicBezTo>
+                <a:cubicBezTo>
+                  <a:pt x="6464887" y="19983"/>
+                  <a:pt x="6664731" y="4232"/>
+                  <a:pt x="6949440" y="0"/>
+                </a:cubicBezTo>
+                <a:cubicBezTo>
+                  <a:pt x="7234149" y="-4232"/>
+                  <a:pt x="7497205" y="28731"/>
+                  <a:pt x="7852867" y="0"/>
+                </a:cubicBezTo>
+                <a:cubicBezTo>
+                  <a:pt x="8208529" y="-28731"/>
+                  <a:pt x="8287556" y="2616"/>
+                  <a:pt x="8443570" y="0"/>
+                </a:cubicBezTo>
+                <a:cubicBezTo>
+                  <a:pt x="8599584" y="-2616"/>
+                  <a:pt x="8871283" y="-14113"/>
+                  <a:pt x="9034272" y="0"/>
+                </a:cubicBezTo>
+                <a:cubicBezTo>
+                  <a:pt x="9197261" y="14113"/>
+                  <a:pt x="9604978" y="-35623"/>
+                  <a:pt x="9833458" y="0"/>
+                </a:cubicBezTo>
+                <a:cubicBezTo>
+                  <a:pt x="10061938" y="35623"/>
+                  <a:pt x="10231944" y="-8194"/>
+                  <a:pt x="10424160" y="0"/>
+                </a:cubicBezTo>
+                <a:cubicBezTo>
+                  <a:pt x="10424285" y="4395"/>
+                  <a:pt x="10424085" y="9776"/>
+                  <a:pt x="10424160" y="18288"/>
+                </a:cubicBezTo>
+                <a:cubicBezTo>
+                  <a:pt x="10058736" y="-5772"/>
+                  <a:pt x="9942989" y="-18764"/>
+                  <a:pt x="9624974" y="18288"/>
+                </a:cubicBezTo>
+                <a:cubicBezTo>
+                  <a:pt x="9306959" y="55340"/>
+                  <a:pt x="9229263" y="24995"/>
+                  <a:pt x="8930030" y="18288"/>
+                </a:cubicBezTo>
+                <a:cubicBezTo>
+                  <a:pt x="8630797" y="11581"/>
+                  <a:pt x="8647263" y="10931"/>
+                  <a:pt x="8547811" y="18288"/>
+                </a:cubicBezTo>
+                <a:cubicBezTo>
+                  <a:pt x="8448359" y="25645"/>
+                  <a:pt x="8173221" y="219"/>
+                  <a:pt x="8061350" y="18288"/>
+                </a:cubicBezTo>
+                <a:cubicBezTo>
+                  <a:pt x="7949479" y="36357"/>
+                  <a:pt x="7437002" y="17516"/>
+                  <a:pt x="7157923" y="18288"/>
+                </a:cubicBezTo>
+                <a:cubicBezTo>
+                  <a:pt x="6878844" y="19060"/>
+                  <a:pt x="6610241" y="8864"/>
+                  <a:pt x="6462979" y="18288"/>
+                </a:cubicBezTo>
+                <a:cubicBezTo>
+                  <a:pt x="6315717" y="27712"/>
+                  <a:pt x="6124879" y="4989"/>
+                  <a:pt x="5976518" y="18288"/>
+                </a:cubicBezTo>
+                <a:cubicBezTo>
+                  <a:pt x="5828157" y="31587"/>
+                  <a:pt x="5566880" y="7112"/>
+                  <a:pt x="5281574" y="18288"/>
+                </a:cubicBezTo>
+                <a:cubicBezTo>
+                  <a:pt x="4996268" y="29464"/>
+                  <a:pt x="5085614" y="20493"/>
+                  <a:pt x="4899355" y="18288"/>
+                </a:cubicBezTo>
+                <a:cubicBezTo>
+                  <a:pt x="4713096" y="16083"/>
+                  <a:pt x="4606138" y="34359"/>
+                  <a:pt x="4517136" y="18288"/>
+                </a:cubicBezTo>
+                <a:cubicBezTo>
+                  <a:pt x="4428134" y="2217"/>
+                  <a:pt x="4125335" y="52414"/>
+                  <a:pt x="3822192" y="18288"/>
+                </a:cubicBezTo>
+                <a:cubicBezTo>
+                  <a:pt x="3519049" y="-15838"/>
+                  <a:pt x="3453132" y="3859"/>
+                  <a:pt x="3335731" y="18288"/>
+                </a:cubicBezTo>
+                <a:cubicBezTo>
+                  <a:pt x="3218330" y="32717"/>
+                  <a:pt x="2718749" y="-13936"/>
+                  <a:pt x="2536546" y="18288"/>
+                </a:cubicBezTo>
+                <a:cubicBezTo>
+                  <a:pt x="2354343" y="50512"/>
+                  <a:pt x="2190669" y="3238"/>
+                  <a:pt x="2050085" y="18288"/>
+                </a:cubicBezTo>
+                <a:cubicBezTo>
+                  <a:pt x="1909501" y="33338"/>
+                  <a:pt x="1520975" y="3062"/>
+                  <a:pt x="1250899" y="18288"/>
+                </a:cubicBezTo>
+                <a:cubicBezTo>
+                  <a:pt x="980823" y="33514"/>
+                  <a:pt x="992936" y="28036"/>
+                  <a:pt x="868680" y="18288"/>
+                </a:cubicBezTo>
+                <a:cubicBezTo>
+                  <a:pt x="744424" y="8540"/>
+                  <a:pt x="230364" y="33365"/>
+                  <a:pt x="0" y="18288"/>
+                </a:cubicBezTo>
+                <a:cubicBezTo>
+                  <a:pt x="-504" y="12101"/>
+                  <a:pt x="-591" y="7719"/>
+                  <a:pt x="0" y="0"/>
+                </a:cubicBezTo>
+                <a:close/>
+              </a:path>
+            </a:pathLst>
+          </a:custGeom>
+          <a:solidFill>
+            <a:schemeClr val="accent2"/>
+          </a:solidFill>
+          <a:ln w="41275" cap="rnd">
+            <a:solidFill>
+              <a:schemeClr val="accent2"/>
+            </a:solidFill>
+            <a:round/>
+            <a:extLst>
+              <a:ext uri="{C807C97D-BFC1-408E-A445-0C87EB9F89A2}">
+                <ask:lineSketchStyleProps xmlns:ask="http://schemas.microsoft.com/office/drawing/2018/sketchyshapes" sd="1219033472">
+                  <a:prstGeom prst="rect">
+                    <a:avLst/>
+                  </a:prstGeom>
+                  <ask:type>
+                    <ask:lineSketchFreehand/>
+                  </ask:type>
+                </ask:lineSketchStyleProps>
+              </a:ext>
+            </a:extLst>
+          </a:ln>
+        </p:spPr>
+        <p:style>
+          <a:lnRef idx="2">
+            <a:schemeClr val="accent1">
+              <a:shade val="50000"/>
+            </a:schemeClr>
+          </a:lnRef>
+          <a:fillRef idx="1">
+            <a:schemeClr val="accent1"/>
+          </a:fillRef>
+          <a:effectRef idx="0">
+            <a:schemeClr val="accent1"/>
+          </a:effectRef>
+          <a:fontRef idx="minor">
+            <a:schemeClr val="lt1"/>
+          </a:fontRef>
+        </p:style>
+        <p:txBody>
+          <a:bodyPr rtlCol="0" anchor="ctr"/>
+          <a:lstStyle/>
+          <a:p>
+            <a:pPr algn="ctr"/>
+            <a:endParaRPr lang="en-US"/>
+          </a:p>
+        </p:txBody>
+      </p:sp>
+      <p:graphicFrame>
+        <p:nvGraphicFramePr>
+          <p:cNvPr id="5" name="コンテンツ プレースホルダー 2">
+            <a:extLst>
+              <a:ext uri="{FF2B5EF4-FFF2-40B4-BE49-F238E27FC236}">
+                <a16:creationId xmlns:a16="http://schemas.microsoft.com/office/drawing/2014/main" id="{E431B520-B51A-11B5-6BE6-2057736599D3}"/>
+              </a:ext>
+            </a:extLst>
+          </p:cNvPr>
+          <p:cNvGraphicFramePr>
+            <a:graphicFrameLocks noGrp="1"/>
+          </p:cNvGraphicFramePr>
+          <p:nvPr>
+            <p:ph idx="1"/>
+            <p:extLst>
+              <p:ext uri="{D42A27DB-BD31-4B8C-83A1-F6EECF244321}">
+                <p14:modId xmlns:p14="http://schemas.microsoft.com/office/powerpoint/2010/main" val="226587219"/>
+              </p:ext>
+            </p:extLst>
+          </p:nvPr>
+        </p:nvGraphicFramePr>
+        <p:xfrm>
+          <a:off x="838200" y="2228087"/>
+          <a:ext cx="10515600" cy="3948876"/>
+        </p:xfrm>
+        <a:graphic>
+          <a:graphicData uri="http://schemas.openxmlformats.org/drawingml/2006/diagram">
+            <dgm:relIds xmlns:dgm="http://schemas.openxmlformats.org/drawingml/2006/diagram" xmlns:r="http://schemas.openxmlformats.org/officeDocument/2006/relationships" r:dm="rId2" r:lo="rId3" r:qs="rId4" r:cs="rId5"/>
+          </a:graphicData>
+        </a:graphic>
+      </p:graphicFrame>
+    </p:spTree>
+    <p:extLst>
+      <p:ext uri="{BB962C8B-B14F-4D97-AF65-F5344CB8AC3E}">
+        <p14:creationId xmlns:p14="http://schemas.microsoft.com/office/powerpoint/2010/main" val="854494049"/>
+      </p:ext>
+    </p:extLst>
+  </p:cSld>
+  <p:clrMapOvr>
+    <a:masterClrMapping/>
+  </p:clrMapOvr>
+</p:sld>
+</file>
+
+<file path=ppt/slides/slide3.xml><?xml version="1.0" encoding="utf-8"?>
+<p:sld xmlns:a="http://schemas.openxmlformats.org/drawingml/2006/main" xmlns:r="http://schemas.openxmlformats.org/officeDocument/2006/relationships" xmlns:p="http://schemas.openxmlformats.org/presentationml/2006/main">
+  <p:cSld>
+    <p:bg>
+      <p:bgPr>
+        <a:solidFill>
+          <a:schemeClr val="bg1"/>
+        </a:solidFill>
+        <a:effectLst/>
+      </p:bgPr>
+    </p:bg>
+    <p:spTree>
+      <p:nvGrpSpPr>
+        <p:cNvPr id="1" name=""/>
+        <p:cNvGrpSpPr/>
+        <p:nvPr/>
+      </p:nvGrpSpPr>
+      <p:grpSpPr>
+        <a:xfrm>
+          <a:off x="0" y="0"/>
+          <a:ext cx="0" cy="0"/>
+          <a:chOff x="0" y="0"/>
+          <a:chExt cx="0" cy="0"/>
+        </a:xfrm>
+      </p:grpSpPr>
+      <p:sp useBgFill="1">
+        <p:nvSpPr>
           <p:cNvPr id="22" name="Rectangle 14">
             <a:extLst>
               <a:ext uri="{FF2B5EF4-FFF2-40B4-BE49-F238E27FC236}">
@@ -26345,784 +27131,6 @@
     <p:extLst>
       <p:ext uri="{BB962C8B-B14F-4D97-AF65-F5344CB8AC3E}">
         <p14:creationId xmlns:p14="http://schemas.microsoft.com/office/powerpoint/2010/main" val="3709688109"/>
-      </p:ext>
-    </p:extLst>
-  </p:cSld>
-  <p:clrMapOvr>
-    <a:masterClrMapping/>
-  </p:clrMapOvr>
-</p:sld>
-</file>
-
-<file path=ppt/slides/slide3.xml><?xml version="1.0" encoding="utf-8"?>
-<p:sld xmlns:a="http://schemas.openxmlformats.org/drawingml/2006/main" xmlns:r="http://schemas.openxmlformats.org/officeDocument/2006/relationships" xmlns:p="http://schemas.openxmlformats.org/presentationml/2006/main">
-  <p:cSld>
-    <p:bg>
-      <p:bgPr>
-        <a:solidFill>
-          <a:schemeClr val="bg1"/>
-        </a:solidFill>
-        <a:effectLst/>
-      </p:bgPr>
-    </p:bg>
-    <p:spTree>
-      <p:nvGrpSpPr>
-        <p:cNvPr id="1" name=""/>
-        <p:cNvGrpSpPr/>
-        <p:nvPr/>
-      </p:nvGrpSpPr>
-      <p:grpSpPr>
-        <a:xfrm>
-          <a:off x="0" y="0"/>
-          <a:ext cx="0" cy="0"/>
-          <a:chOff x="0" y="0"/>
-          <a:chExt cx="0" cy="0"/>
-        </a:xfrm>
-      </p:grpSpPr>
-      <p:sp useBgFill="1">
-        <p:nvSpPr>
-          <p:cNvPr id="9" name="Rectangle 8">
-            <a:extLst>
-              <a:ext uri="{FF2B5EF4-FFF2-40B4-BE49-F238E27FC236}">
-                <a16:creationId xmlns:a16="http://schemas.microsoft.com/office/drawing/2014/main" id="{35DB3719-6FDC-4E5D-891D-FF40B7300F64}"/>
-              </a:ext>
-              <a:ext uri="{C183D7F6-B498-43B3-948B-1728B52AA6E4}">
-                <adec:decorative xmlns:adec="http://schemas.microsoft.com/office/drawing/2017/decorative" val="1"/>
-              </a:ext>
-            </a:extLst>
-          </p:cNvPr>
-          <p:cNvSpPr>
-            <a:spLocks noGrp="1" noRot="1" noChangeAspect="1" noMove="1" noResize="1" noEditPoints="1" noAdjustHandles="1" noChangeArrowheads="1" noChangeShapeType="1" noTextEdit="1"/>
-          </p:cNvSpPr>
-          <p:nvPr>
-            <p:extLst>
-              <p:ext uri="{386F3935-93C4-4BCD-93E2-E3B085C9AB24}">
-                <p16:designElem xmlns:p16="http://schemas.microsoft.com/office/powerpoint/2015/main" val="1"/>
-              </p:ext>
-            </p:extLst>
-          </p:nvPr>
-        </p:nvSpPr>
-        <p:spPr>
-          <a:xfrm>
-            <a:off x="0" y="0"/>
-            <a:ext cx="12188952" cy="6858000"/>
-          </a:xfrm>
-          <a:prstGeom prst="rect">
-            <a:avLst/>
-          </a:prstGeom>
-          <a:ln>
-            <a:noFill/>
-          </a:ln>
-        </p:spPr>
-        <p:style>
-          <a:lnRef idx="2">
-            <a:schemeClr val="accent1">
-              <a:shade val="50000"/>
-            </a:schemeClr>
-          </a:lnRef>
-          <a:fillRef idx="1">
-            <a:schemeClr val="accent1"/>
-          </a:fillRef>
-          <a:effectRef idx="0">
-            <a:schemeClr val="accent1"/>
-          </a:effectRef>
-          <a:fontRef idx="minor">
-            <a:schemeClr val="lt1"/>
-          </a:fontRef>
-        </p:style>
-        <p:txBody>
-          <a:bodyPr rtlCol="0" anchor="ctr"/>
-          <a:lstStyle/>
-          <a:p>
-            <a:pPr algn="ctr"/>
-            <a:endParaRPr lang="en-US"/>
-          </a:p>
-        </p:txBody>
-      </p:sp>
-      <p:sp>
-        <p:nvSpPr>
-          <p:cNvPr id="2" name="タイトル 1">
-            <a:extLst>
-              <a:ext uri="{FF2B5EF4-FFF2-40B4-BE49-F238E27FC236}">
-                <a16:creationId xmlns:a16="http://schemas.microsoft.com/office/drawing/2014/main" id="{8619712B-8DCB-97DC-5A72-B1284E123FD2}"/>
-              </a:ext>
-            </a:extLst>
-          </p:cNvPr>
-          <p:cNvSpPr>
-            <a:spLocks noGrp="1"/>
-          </p:cNvSpPr>
-          <p:nvPr>
-            <p:ph type="title"/>
-          </p:nvPr>
-        </p:nvSpPr>
-        <p:spPr>
-          <a:xfrm>
-            <a:off x="838200" y="365125"/>
-            <a:ext cx="10515600" cy="1325563"/>
-          </a:xfrm>
-        </p:spPr>
-        <p:txBody>
-          <a:bodyPr>
-            <a:normAutofit/>
-          </a:bodyPr>
-          <a:lstStyle/>
-          <a:p>
-            <a:pPr algn="just"/>
-            <a:r>
-              <a:rPr kumimoji="1" lang="ja-JP" altLang="en-US" sz="5400"/>
-              <a:t>もくじ</a:t>
-            </a:r>
-          </a:p>
-        </p:txBody>
-      </p:sp>
-      <p:sp>
-        <p:nvSpPr>
-          <p:cNvPr id="11" name="sketch line">
-            <a:extLst>
-              <a:ext uri="{FF2B5EF4-FFF2-40B4-BE49-F238E27FC236}">
-                <a16:creationId xmlns:a16="http://schemas.microsoft.com/office/drawing/2014/main" id="{E0CBAC23-2E3F-4A90-BA59-F8299F6A5439}"/>
-              </a:ext>
-              <a:ext uri="{C183D7F6-B498-43B3-948B-1728B52AA6E4}">
-                <adec:decorative xmlns:adec="http://schemas.microsoft.com/office/drawing/2017/decorative" val="1"/>
-              </a:ext>
-            </a:extLst>
-          </p:cNvPr>
-          <p:cNvSpPr>
-            <a:spLocks noGrp="1" noRot="1" noChangeAspect="1" noMove="1" noResize="1" noEditPoints="1" noAdjustHandles="1" noChangeArrowheads="1" noChangeShapeType="1" noTextEdit="1"/>
-          </p:cNvSpPr>
-          <p:nvPr>
-            <p:extLst>
-              <p:ext uri="{386F3935-93C4-4BCD-93E2-E3B085C9AB24}">
-                <p16:designElem xmlns:p16="http://schemas.microsoft.com/office/powerpoint/2015/main" val="1"/>
-              </p:ext>
-            </p:extLst>
-          </p:nvPr>
-        </p:nvSpPr>
-        <p:spPr>
-          <a:xfrm>
-            <a:off x="838200" y="1865313"/>
-            <a:ext cx="10424160" cy="18288"/>
-          </a:xfrm>
-          <a:custGeom>
-            <a:avLst/>
-            <a:gdLst>
-              <a:gd name="csX0" fmla="*/ 0 w 10424160"/>
-              <a:gd name="csY0" fmla="*/ 0 h 18288"/>
-              <a:gd name="csX1" fmla="*/ 903427 w 10424160"/>
-              <a:gd name="csY1" fmla="*/ 0 h 18288"/>
-              <a:gd name="csX2" fmla="*/ 1389888 w 10424160"/>
-              <a:gd name="csY2" fmla="*/ 0 h 18288"/>
-              <a:gd name="csX3" fmla="*/ 2189074 w 10424160"/>
-              <a:gd name="csY3" fmla="*/ 0 h 18288"/>
-              <a:gd name="csX4" fmla="*/ 2675534 w 10424160"/>
-              <a:gd name="csY4" fmla="*/ 0 h 18288"/>
-              <a:gd name="csX5" fmla="*/ 3370478 w 10424160"/>
-              <a:gd name="csY5" fmla="*/ 0 h 18288"/>
-              <a:gd name="csX6" fmla="*/ 4169664 w 10424160"/>
-              <a:gd name="csY6" fmla="*/ 0 h 18288"/>
-              <a:gd name="csX7" fmla="*/ 4551883 w 10424160"/>
-              <a:gd name="csY7" fmla="*/ 0 h 18288"/>
-              <a:gd name="csX8" fmla="*/ 4934102 w 10424160"/>
-              <a:gd name="csY8" fmla="*/ 0 h 18288"/>
-              <a:gd name="csX9" fmla="*/ 5837530 w 10424160"/>
-              <a:gd name="csY9" fmla="*/ 0 h 18288"/>
-              <a:gd name="csX10" fmla="*/ 6532474 w 10424160"/>
-              <a:gd name="csY10" fmla="*/ 0 h 18288"/>
-              <a:gd name="csX11" fmla="*/ 6914693 w 10424160"/>
-              <a:gd name="csY11" fmla="*/ 0 h 18288"/>
-              <a:gd name="csX12" fmla="*/ 7609637 w 10424160"/>
-              <a:gd name="csY12" fmla="*/ 0 h 18288"/>
-              <a:gd name="csX13" fmla="*/ 8513064 w 10424160"/>
-              <a:gd name="csY13" fmla="*/ 0 h 18288"/>
-              <a:gd name="csX14" fmla="*/ 9103766 w 10424160"/>
-              <a:gd name="csY14" fmla="*/ 0 h 18288"/>
-              <a:gd name="csX15" fmla="*/ 9694469 w 10424160"/>
-              <a:gd name="csY15" fmla="*/ 0 h 18288"/>
-              <a:gd name="csX16" fmla="*/ 10424160 w 10424160"/>
-              <a:gd name="csY16" fmla="*/ 0 h 18288"/>
-              <a:gd name="csX17" fmla="*/ 10424160 w 10424160"/>
-              <a:gd name="csY17" fmla="*/ 18288 h 18288"/>
-              <a:gd name="csX18" fmla="*/ 9729216 w 10424160"/>
-              <a:gd name="csY18" fmla="*/ 18288 h 18288"/>
-              <a:gd name="csX19" fmla="*/ 8930030 w 10424160"/>
-              <a:gd name="csY19" fmla="*/ 18288 h 18288"/>
-              <a:gd name="csX20" fmla="*/ 8130845 w 10424160"/>
-              <a:gd name="csY20" fmla="*/ 18288 h 18288"/>
-              <a:gd name="csX21" fmla="*/ 7644384 w 10424160"/>
-              <a:gd name="csY21" fmla="*/ 18288 h 18288"/>
-              <a:gd name="csX22" fmla="*/ 6740957 w 10424160"/>
-              <a:gd name="csY22" fmla="*/ 18288 h 18288"/>
-              <a:gd name="csX23" fmla="*/ 6046013 w 10424160"/>
-              <a:gd name="csY23" fmla="*/ 18288 h 18288"/>
-              <a:gd name="csX24" fmla="*/ 5663794 w 10424160"/>
-              <a:gd name="csY24" fmla="*/ 18288 h 18288"/>
-              <a:gd name="csX25" fmla="*/ 4968850 w 10424160"/>
-              <a:gd name="csY25" fmla="*/ 18288 h 18288"/>
-              <a:gd name="csX26" fmla="*/ 4378147 w 10424160"/>
-              <a:gd name="csY26" fmla="*/ 18288 h 18288"/>
-              <a:gd name="csX27" fmla="*/ 3787445 w 10424160"/>
-              <a:gd name="csY27" fmla="*/ 18288 h 18288"/>
-              <a:gd name="csX28" fmla="*/ 3196742 w 10424160"/>
-              <a:gd name="csY28" fmla="*/ 18288 h 18288"/>
-              <a:gd name="csX29" fmla="*/ 2606040 w 10424160"/>
-              <a:gd name="csY29" fmla="*/ 18288 h 18288"/>
-              <a:gd name="csX30" fmla="*/ 1806854 w 10424160"/>
-              <a:gd name="csY30" fmla="*/ 18288 h 18288"/>
-              <a:gd name="csX31" fmla="*/ 1111910 w 10424160"/>
-              <a:gd name="csY31" fmla="*/ 18288 h 18288"/>
-              <a:gd name="csX32" fmla="*/ 729691 w 10424160"/>
-              <a:gd name="csY32" fmla="*/ 18288 h 18288"/>
-              <a:gd name="csX33" fmla="*/ 0 w 10424160"/>
-              <a:gd name="csY33" fmla="*/ 18288 h 18288"/>
-              <a:gd name="csX34" fmla="*/ 0 w 10424160"/>
-              <a:gd name="csY34" fmla="*/ 0 h 18288"/>
-            </a:gdLst>
-            <a:ahLst/>
-            <a:cxnLst>
-              <a:cxn ang="0">
-                <a:pos x="csX0" y="csY0"/>
-              </a:cxn>
-              <a:cxn ang="0">
-                <a:pos x="csX1" y="csY1"/>
-              </a:cxn>
-              <a:cxn ang="0">
-                <a:pos x="csX2" y="csY2"/>
-              </a:cxn>
-              <a:cxn ang="0">
-                <a:pos x="csX3" y="csY3"/>
-              </a:cxn>
-              <a:cxn ang="0">
-                <a:pos x="csX4" y="csY4"/>
-              </a:cxn>
-              <a:cxn ang="0">
-                <a:pos x="csX5" y="csY5"/>
-              </a:cxn>
-              <a:cxn ang="0">
-                <a:pos x="csX6" y="csY6"/>
-              </a:cxn>
-              <a:cxn ang="0">
-                <a:pos x="csX7" y="csY7"/>
-              </a:cxn>
-              <a:cxn ang="0">
-                <a:pos x="csX8" y="csY8"/>
-              </a:cxn>
-              <a:cxn ang="0">
-                <a:pos x="csX9" y="csY9"/>
-              </a:cxn>
-              <a:cxn ang="0">
-                <a:pos x="csX10" y="csY10"/>
-              </a:cxn>
-              <a:cxn ang="0">
-                <a:pos x="csX11" y="csY11"/>
-              </a:cxn>
-              <a:cxn ang="0">
-                <a:pos x="csX12" y="csY12"/>
-              </a:cxn>
-              <a:cxn ang="0">
-                <a:pos x="csX13" y="csY13"/>
-              </a:cxn>
-              <a:cxn ang="0">
-                <a:pos x="csX14" y="csY14"/>
-              </a:cxn>
-              <a:cxn ang="0">
-                <a:pos x="csX15" y="csY15"/>
-              </a:cxn>
-              <a:cxn ang="0">
-                <a:pos x="csX16" y="csY16"/>
-              </a:cxn>
-              <a:cxn ang="0">
-                <a:pos x="csX17" y="csY17"/>
-              </a:cxn>
-              <a:cxn ang="0">
-                <a:pos x="csX18" y="csY18"/>
-              </a:cxn>
-              <a:cxn ang="0">
-                <a:pos x="csX19" y="csY19"/>
-              </a:cxn>
-              <a:cxn ang="0">
-                <a:pos x="csX20" y="csY20"/>
-              </a:cxn>
-              <a:cxn ang="0">
-                <a:pos x="csX21" y="csY21"/>
-              </a:cxn>
-              <a:cxn ang="0">
-                <a:pos x="csX22" y="csY22"/>
-              </a:cxn>
-              <a:cxn ang="0">
-                <a:pos x="csX23" y="csY23"/>
-              </a:cxn>
-              <a:cxn ang="0">
-                <a:pos x="csX24" y="csY24"/>
-              </a:cxn>
-              <a:cxn ang="0">
-                <a:pos x="csX25" y="csY25"/>
-              </a:cxn>
-              <a:cxn ang="0">
-                <a:pos x="csX26" y="csY26"/>
-              </a:cxn>
-              <a:cxn ang="0">
-                <a:pos x="csX27" y="csY27"/>
-              </a:cxn>
-              <a:cxn ang="0">
-                <a:pos x="csX28" y="csY28"/>
-              </a:cxn>
-              <a:cxn ang="0">
-                <a:pos x="csX29" y="csY29"/>
-              </a:cxn>
-              <a:cxn ang="0">
-                <a:pos x="csX30" y="csY30"/>
-              </a:cxn>
-              <a:cxn ang="0">
-                <a:pos x="csX31" y="csY31"/>
-              </a:cxn>
-              <a:cxn ang="0">
-                <a:pos x="csX32" y="csY32"/>
-              </a:cxn>
-              <a:cxn ang="0">
-                <a:pos x="csX33" y="csY33"/>
-              </a:cxn>
-              <a:cxn ang="0">
-                <a:pos x="csX34" y="csY34"/>
-              </a:cxn>
-            </a:cxnLst>
-            <a:rect l="l" t="t" r="r" b="b"/>
-            <a:pathLst>
-              <a:path w="10424160" h="18288" fill="none" extrusionOk="0">
-                <a:moveTo>
-                  <a:pt x="0" y="0"/>
-                </a:moveTo>
-                <a:cubicBezTo>
-                  <a:pt x="251416" y="-3874"/>
-                  <a:pt x="479411" y="-20508"/>
-                  <a:pt x="903427" y="0"/>
-                </a:cubicBezTo>
-                <a:cubicBezTo>
-                  <a:pt x="1327443" y="20508"/>
-                  <a:pt x="1177990" y="-7387"/>
-                  <a:pt x="1389888" y="0"/>
-                </a:cubicBezTo>
-                <a:cubicBezTo>
-                  <a:pt x="1601786" y="7387"/>
-                  <a:pt x="1928602" y="-6697"/>
-                  <a:pt x="2189074" y="0"/>
-                </a:cubicBezTo>
-                <a:cubicBezTo>
-                  <a:pt x="2449546" y="6697"/>
-                  <a:pt x="2440085" y="-21144"/>
-                  <a:pt x="2675534" y="0"/>
-                </a:cubicBezTo>
-                <a:cubicBezTo>
-                  <a:pt x="2910983" y="21144"/>
-                  <a:pt x="3026158" y="-11124"/>
-                  <a:pt x="3370478" y="0"/>
-                </a:cubicBezTo>
-                <a:cubicBezTo>
-                  <a:pt x="3714798" y="11124"/>
-                  <a:pt x="3864539" y="-10660"/>
-                  <a:pt x="4169664" y="0"/>
-                </a:cubicBezTo>
-                <a:cubicBezTo>
-                  <a:pt x="4474789" y="10660"/>
-                  <a:pt x="4471218" y="16488"/>
-                  <a:pt x="4551883" y="0"/>
-                </a:cubicBezTo>
-                <a:cubicBezTo>
-                  <a:pt x="4632548" y="-16488"/>
-                  <a:pt x="4786830" y="7986"/>
-                  <a:pt x="4934102" y="0"/>
-                </a:cubicBezTo>
-                <a:cubicBezTo>
-                  <a:pt x="5081374" y="-7986"/>
-                  <a:pt x="5575881" y="-33003"/>
-                  <a:pt x="5837530" y="0"/>
-                </a:cubicBezTo>
-                <a:cubicBezTo>
-                  <a:pt x="6099179" y="33003"/>
-                  <a:pt x="6305895" y="14170"/>
-                  <a:pt x="6532474" y="0"/>
-                </a:cubicBezTo>
-                <a:cubicBezTo>
-                  <a:pt x="6759053" y="-14170"/>
-                  <a:pt x="6726707" y="16121"/>
-                  <a:pt x="6914693" y="0"/>
-                </a:cubicBezTo>
-                <a:cubicBezTo>
-                  <a:pt x="7102679" y="-16121"/>
-                  <a:pt x="7397857" y="32594"/>
-                  <a:pt x="7609637" y="0"/>
-                </a:cubicBezTo>
-                <a:cubicBezTo>
-                  <a:pt x="7821417" y="-32594"/>
-                  <a:pt x="8141235" y="-3745"/>
-                  <a:pt x="8513064" y="0"/>
-                </a:cubicBezTo>
-                <a:cubicBezTo>
-                  <a:pt x="8884893" y="3745"/>
-                  <a:pt x="8877548" y="3359"/>
-                  <a:pt x="9103766" y="0"/>
-                </a:cubicBezTo>
-                <a:cubicBezTo>
-                  <a:pt x="9329984" y="-3359"/>
-                  <a:pt x="9545570" y="-17843"/>
-                  <a:pt x="9694469" y="0"/>
-                </a:cubicBezTo>
-                <a:cubicBezTo>
-                  <a:pt x="9843368" y="17843"/>
-                  <a:pt x="10162477" y="-1217"/>
-                  <a:pt x="10424160" y="0"/>
-                </a:cubicBezTo>
-                <a:cubicBezTo>
-                  <a:pt x="10424498" y="7640"/>
-                  <a:pt x="10423710" y="11289"/>
-                  <a:pt x="10424160" y="18288"/>
-                </a:cubicBezTo>
-                <a:cubicBezTo>
-                  <a:pt x="10184680" y="20716"/>
-                  <a:pt x="10034768" y="-9357"/>
-                  <a:pt x="9729216" y="18288"/>
-                </a:cubicBezTo>
-                <a:cubicBezTo>
-                  <a:pt x="9423664" y="45933"/>
-                  <a:pt x="9309220" y="36372"/>
-                  <a:pt x="8930030" y="18288"/>
-                </a:cubicBezTo>
-                <a:cubicBezTo>
-                  <a:pt x="8550840" y="204"/>
-                  <a:pt x="8513376" y="34707"/>
-                  <a:pt x="8130845" y="18288"/>
-                </a:cubicBezTo>
-                <a:cubicBezTo>
-                  <a:pt x="7748315" y="1869"/>
-                  <a:pt x="7864674" y="19659"/>
-                  <a:pt x="7644384" y="18288"/>
-                </a:cubicBezTo>
-                <a:cubicBezTo>
-                  <a:pt x="7424094" y="16917"/>
-                  <a:pt x="6947001" y="55680"/>
-                  <a:pt x="6740957" y="18288"/>
-                </a:cubicBezTo>
-                <a:cubicBezTo>
-                  <a:pt x="6534913" y="-19104"/>
-                  <a:pt x="6313809" y="33391"/>
-                  <a:pt x="6046013" y="18288"/>
-                </a:cubicBezTo>
-                <a:cubicBezTo>
-                  <a:pt x="5778217" y="3185"/>
-                  <a:pt x="5786775" y="1439"/>
-                  <a:pt x="5663794" y="18288"/>
-                </a:cubicBezTo>
-                <a:cubicBezTo>
-                  <a:pt x="5540813" y="35137"/>
-                  <a:pt x="5204724" y="25434"/>
-                  <a:pt x="4968850" y="18288"/>
-                </a:cubicBezTo>
-                <a:cubicBezTo>
-                  <a:pt x="4732976" y="11142"/>
-                  <a:pt x="4559928" y="34568"/>
-                  <a:pt x="4378147" y="18288"/>
-                </a:cubicBezTo>
-                <a:cubicBezTo>
-                  <a:pt x="4196366" y="2008"/>
-                  <a:pt x="3992200" y="35409"/>
-                  <a:pt x="3787445" y="18288"/>
-                </a:cubicBezTo>
-                <a:cubicBezTo>
-                  <a:pt x="3582690" y="1167"/>
-                  <a:pt x="3488876" y="-7583"/>
-                  <a:pt x="3196742" y="18288"/>
-                </a:cubicBezTo>
-                <a:cubicBezTo>
-                  <a:pt x="2904608" y="44159"/>
-                  <a:pt x="2729828" y="45906"/>
-                  <a:pt x="2606040" y="18288"/>
-                </a:cubicBezTo>
-                <a:cubicBezTo>
-                  <a:pt x="2482252" y="-9330"/>
-                  <a:pt x="2000672" y="-5498"/>
-                  <a:pt x="1806854" y="18288"/>
-                </a:cubicBezTo>
-                <a:cubicBezTo>
-                  <a:pt x="1613036" y="42074"/>
-                  <a:pt x="1310933" y="-4240"/>
-                  <a:pt x="1111910" y="18288"/>
-                </a:cubicBezTo>
-                <a:cubicBezTo>
-                  <a:pt x="912887" y="40816"/>
-                  <a:pt x="891560" y="1701"/>
-                  <a:pt x="729691" y="18288"/>
-                </a:cubicBezTo>
-                <a:cubicBezTo>
-                  <a:pt x="567822" y="34875"/>
-                  <a:pt x="203025" y="34462"/>
-                  <a:pt x="0" y="18288"/>
-                </a:cubicBezTo>
-                <a:cubicBezTo>
-                  <a:pt x="-82" y="11708"/>
-                  <a:pt x="-178" y="8956"/>
-                  <a:pt x="0" y="0"/>
-                </a:cubicBezTo>
-                <a:close/>
-              </a:path>
-              <a:path w="10424160" h="18288" stroke="0" extrusionOk="0">
-                <a:moveTo>
-                  <a:pt x="0" y="0"/>
-                </a:moveTo>
-                <a:cubicBezTo>
-                  <a:pt x="119910" y="17195"/>
-                  <a:pt x="345032" y="1652"/>
-                  <a:pt x="590702" y="0"/>
-                </a:cubicBezTo>
-                <a:cubicBezTo>
-                  <a:pt x="836372" y="-1652"/>
-                  <a:pt x="830717" y="-10944"/>
-                  <a:pt x="972922" y="0"/>
-                </a:cubicBezTo>
-                <a:cubicBezTo>
-                  <a:pt x="1115127" y="10944"/>
-                  <a:pt x="1638708" y="17269"/>
-                  <a:pt x="1876349" y="0"/>
-                </a:cubicBezTo>
-                <a:cubicBezTo>
-                  <a:pt x="2113990" y="-17269"/>
-                  <a:pt x="2263529" y="27642"/>
-                  <a:pt x="2467051" y="0"/>
-                </a:cubicBezTo>
-                <a:cubicBezTo>
-                  <a:pt x="2670573" y="-27642"/>
-                  <a:pt x="2867743" y="-1552"/>
-                  <a:pt x="3057754" y="0"/>
-                </a:cubicBezTo>
-                <a:cubicBezTo>
-                  <a:pt x="3247765" y="1552"/>
-                  <a:pt x="3729099" y="45169"/>
-                  <a:pt x="3961181" y="0"/>
-                </a:cubicBezTo>
-                <a:cubicBezTo>
-                  <a:pt x="4193263" y="-45169"/>
-                  <a:pt x="4313735" y="4067"/>
-                  <a:pt x="4447642" y="0"/>
-                </a:cubicBezTo>
-                <a:cubicBezTo>
-                  <a:pt x="4581549" y="-4067"/>
-                  <a:pt x="5123626" y="11867"/>
-                  <a:pt x="5351069" y="0"/>
-                </a:cubicBezTo>
-                <a:cubicBezTo>
-                  <a:pt x="5578512" y="-11867"/>
-                  <a:pt x="6044105" y="-19983"/>
-                  <a:pt x="6254496" y="0"/>
-                </a:cubicBezTo>
-                <a:cubicBezTo>
-                  <a:pt x="6464887" y="19983"/>
-                  <a:pt x="6664731" y="4232"/>
-                  <a:pt x="6949440" y="0"/>
-                </a:cubicBezTo>
-                <a:cubicBezTo>
-                  <a:pt x="7234149" y="-4232"/>
-                  <a:pt x="7497205" y="28731"/>
-                  <a:pt x="7852867" y="0"/>
-                </a:cubicBezTo>
-                <a:cubicBezTo>
-                  <a:pt x="8208529" y="-28731"/>
-                  <a:pt x="8287556" y="2616"/>
-                  <a:pt x="8443570" y="0"/>
-                </a:cubicBezTo>
-                <a:cubicBezTo>
-                  <a:pt x="8599584" y="-2616"/>
-                  <a:pt x="8871283" y="-14113"/>
-                  <a:pt x="9034272" y="0"/>
-                </a:cubicBezTo>
-                <a:cubicBezTo>
-                  <a:pt x="9197261" y="14113"/>
-                  <a:pt x="9604978" y="-35623"/>
-                  <a:pt x="9833458" y="0"/>
-                </a:cubicBezTo>
-                <a:cubicBezTo>
-                  <a:pt x="10061938" y="35623"/>
-                  <a:pt x="10231944" y="-8194"/>
-                  <a:pt x="10424160" y="0"/>
-                </a:cubicBezTo>
-                <a:cubicBezTo>
-                  <a:pt x="10424285" y="4395"/>
-                  <a:pt x="10424085" y="9776"/>
-                  <a:pt x="10424160" y="18288"/>
-                </a:cubicBezTo>
-                <a:cubicBezTo>
-                  <a:pt x="10058736" y="-5772"/>
-                  <a:pt x="9942989" y="-18764"/>
-                  <a:pt x="9624974" y="18288"/>
-                </a:cubicBezTo>
-                <a:cubicBezTo>
-                  <a:pt x="9306959" y="55340"/>
-                  <a:pt x="9229263" y="24995"/>
-                  <a:pt x="8930030" y="18288"/>
-                </a:cubicBezTo>
-                <a:cubicBezTo>
-                  <a:pt x="8630797" y="11581"/>
-                  <a:pt x="8647263" y="10931"/>
-                  <a:pt x="8547811" y="18288"/>
-                </a:cubicBezTo>
-                <a:cubicBezTo>
-                  <a:pt x="8448359" y="25645"/>
-                  <a:pt x="8173221" y="219"/>
-                  <a:pt x="8061350" y="18288"/>
-                </a:cubicBezTo>
-                <a:cubicBezTo>
-                  <a:pt x="7949479" y="36357"/>
-                  <a:pt x="7437002" y="17516"/>
-                  <a:pt x="7157923" y="18288"/>
-                </a:cubicBezTo>
-                <a:cubicBezTo>
-                  <a:pt x="6878844" y="19060"/>
-                  <a:pt x="6610241" y="8864"/>
-                  <a:pt x="6462979" y="18288"/>
-                </a:cubicBezTo>
-                <a:cubicBezTo>
-                  <a:pt x="6315717" y="27712"/>
-                  <a:pt x="6124879" y="4989"/>
-                  <a:pt x="5976518" y="18288"/>
-                </a:cubicBezTo>
-                <a:cubicBezTo>
-                  <a:pt x="5828157" y="31587"/>
-                  <a:pt x="5566880" y="7112"/>
-                  <a:pt x="5281574" y="18288"/>
-                </a:cubicBezTo>
-                <a:cubicBezTo>
-                  <a:pt x="4996268" y="29464"/>
-                  <a:pt x="5085614" y="20493"/>
-                  <a:pt x="4899355" y="18288"/>
-                </a:cubicBezTo>
-                <a:cubicBezTo>
-                  <a:pt x="4713096" y="16083"/>
-                  <a:pt x="4606138" y="34359"/>
-                  <a:pt x="4517136" y="18288"/>
-                </a:cubicBezTo>
-                <a:cubicBezTo>
-                  <a:pt x="4428134" y="2217"/>
-                  <a:pt x="4125335" y="52414"/>
-                  <a:pt x="3822192" y="18288"/>
-                </a:cubicBezTo>
-                <a:cubicBezTo>
-                  <a:pt x="3519049" y="-15838"/>
-                  <a:pt x="3453132" y="3859"/>
-                  <a:pt x="3335731" y="18288"/>
-                </a:cubicBezTo>
-                <a:cubicBezTo>
-                  <a:pt x="3218330" y="32717"/>
-                  <a:pt x="2718749" y="-13936"/>
-                  <a:pt x="2536546" y="18288"/>
-                </a:cubicBezTo>
-                <a:cubicBezTo>
-                  <a:pt x="2354343" y="50512"/>
-                  <a:pt x="2190669" y="3238"/>
-                  <a:pt x="2050085" y="18288"/>
-                </a:cubicBezTo>
-                <a:cubicBezTo>
-                  <a:pt x="1909501" y="33338"/>
-                  <a:pt x="1520975" y="3062"/>
-                  <a:pt x="1250899" y="18288"/>
-                </a:cubicBezTo>
-                <a:cubicBezTo>
-                  <a:pt x="980823" y="33514"/>
-                  <a:pt x="992936" y="28036"/>
-                  <a:pt x="868680" y="18288"/>
-                </a:cubicBezTo>
-                <a:cubicBezTo>
-                  <a:pt x="744424" y="8540"/>
-                  <a:pt x="230364" y="33365"/>
-                  <a:pt x="0" y="18288"/>
-                </a:cubicBezTo>
-                <a:cubicBezTo>
-                  <a:pt x="-504" y="12101"/>
-                  <a:pt x="-591" y="7719"/>
-                  <a:pt x="0" y="0"/>
-                </a:cubicBezTo>
-                <a:close/>
-              </a:path>
-            </a:pathLst>
-          </a:custGeom>
-          <a:solidFill>
-            <a:schemeClr val="accent2"/>
-          </a:solidFill>
-          <a:ln w="41275" cap="rnd">
-            <a:solidFill>
-              <a:schemeClr val="accent2"/>
-            </a:solidFill>
-            <a:round/>
-            <a:extLst>
-              <a:ext uri="{C807C97D-BFC1-408E-A445-0C87EB9F89A2}">
-                <ask:lineSketchStyleProps xmlns:ask="http://schemas.microsoft.com/office/drawing/2018/sketchyshapes" sd="1219033472">
-                  <a:prstGeom prst="rect">
-                    <a:avLst/>
-                  </a:prstGeom>
-                  <ask:type>
-                    <ask:lineSketchFreehand/>
-                  </ask:type>
-                </ask:lineSketchStyleProps>
-              </a:ext>
-            </a:extLst>
-          </a:ln>
-        </p:spPr>
-        <p:style>
-          <a:lnRef idx="2">
-            <a:schemeClr val="accent1">
-              <a:shade val="50000"/>
-            </a:schemeClr>
-          </a:lnRef>
-          <a:fillRef idx="1">
-            <a:schemeClr val="accent1"/>
-          </a:fillRef>
-          <a:effectRef idx="0">
-            <a:schemeClr val="accent1"/>
-          </a:effectRef>
-          <a:fontRef idx="minor">
-            <a:schemeClr val="lt1"/>
-          </a:fontRef>
-        </p:style>
-        <p:txBody>
-          <a:bodyPr rtlCol="0" anchor="ctr"/>
-          <a:lstStyle/>
-          <a:p>
-            <a:pPr algn="ctr"/>
-            <a:endParaRPr lang="en-US"/>
-          </a:p>
-        </p:txBody>
-      </p:sp>
-      <p:graphicFrame>
-        <p:nvGraphicFramePr>
-          <p:cNvPr id="5" name="コンテンツ プレースホルダー 2">
-            <a:extLst>
-              <a:ext uri="{FF2B5EF4-FFF2-40B4-BE49-F238E27FC236}">
-                <a16:creationId xmlns:a16="http://schemas.microsoft.com/office/drawing/2014/main" id="{E431B520-B51A-11B5-6BE6-2057736599D3}"/>
-              </a:ext>
-            </a:extLst>
-          </p:cNvPr>
-          <p:cNvGraphicFramePr>
-            <a:graphicFrameLocks noGrp="1"/>
-          </p:cNvGraphicFramePr>
-          <p:nvPr>
-            <p:ph idx="1"/>
-            <p:extLst>
-              <p:ext uri="{D42A27DB-BD31-4B8C-83A1-F6EECF244321}">
-                <p14:modId xmlns:p14="http://schemas.microsoft.com/office/powerpoint/2010/main" val="4079832263"/>
-              </p:ext>
-            </p:extLst>
-          </p:nvPr>
-        </p:nvGraphicFramePr>
-        <p:xfrm>
-          <a:off x="838200" y="2228087"/>
-          <a:ext cx="10515600" cy="3948876"/>
-        </p:xfrm>
-        <a:graphic>
-          <a:graphicData uri="http://schemas.openxmlformats.org/drawingml/2006/diagram">
-            <dgm:relIds xmlns:dgm="http://schemas.openxmlformats.org/drawingml/2006/diagram" xmlns:r="http://schemas.openxmlformats.org/officeDocument/2006/relationships" r:dm="rId2" r:lo="rId3" r:qs="rId4" r:cs="rId5"/>
-          </a:graphicData>
-        </a:graphic>
-      </p:graphicFrame>
-    </p:spTree>
-    <p:extLst>
-      <p:ext uri="{BB962C8B-B14F-4D97-AF65-F5344CB8AC3E}">
-        <p14:creationId xmlns:p14="http://schemas.microsoft.com/office/powerpoint/2010/main" val="854494049"/>
       </p:ext>
     </p:extLst>
   </p:cSld>
@@ -32308,13 +32316,13 @@
           <a:lstStyle/>
           <a:p>
             <a:r>
-              <a:rPr lang="ja-JP" altLang="ja-JP" b="1" dirty="0"/>
+              <a:rPr lang="ja-JP" altLang="ja-JP" sz="4000" b="1" dirty="0"/>
               <a:t>サイトの構成</a:t>
             </a:r>
             <a:br>
-              <a:rPr lang="ja-JP" altLang="ja-JP" b="1" dirty="0"/>
+              <a:rPr lang="ja-JP" altLang="ja-JP" sz="4000" b="1" dirty="0"/>
             </a:br>
-            <a:endParaRPr kumimoji="1" lang="ja-JP" altLang="en-US" dirty="0"/>
+            <a:endParaRPr kumimoji="1" lang="ja-JP" altLang="en-US" sz="4000" dirty="0"/>
           </a:p>
         </p:txBody>
       </p:sp>
@@ -34924,7 +34932,7 @@
               <a:t>サイトの</a:t>
             </a:r>
             <a:r>
-              <a:rPr lang="ja-JP" altLang="en-US" b="1" dirty="0"/>
+              <a:rPr lang="ja-JP" altLang="en-US" sz="4000" b="1" dirty="0"/>
               <a:t>内容</a:t>
             </a:r>
             <a:br>
@@ -40913,13 +40921,13 @@
           <a:lstStyle/>
           <a:p>
             <a:r>
-              <a:rPr lang="ja-JP" altLang="ja-JP" b="1" dirty="0"/>
+              <a:rPr lang="ja-JP" altLang="ja-JP" sz="4000" b="1" dirty="0"/>
               <a:t>サイトの構成</a:t>
             </a:r>
             <a:br>
-              <a:rPr lang="ja-JP" altLang="ja-JP" b="1" dirty="0"/>
+              <a:rPr lang="ja-JP" altLang="ja-JP" sz="4000" b="1" dirty="0"/>
             </a:br>
-            <a:endParaRPr kumimoji="1" lang="ja-JP" altLang="en-US" dirty="0"/>
+            <a:endParaRPr kumimoji="1" lang="ja-JP" altLang="en-US" sz="4000" dirty="0"/>
           </a:p>
         </p:txBody>
       </p:sp>
